--- a/SecureCoating-Vision_Final_Defense_6min.pptx
+++ b/SecureCoating-Vision_Final_Defense_6min.pptx
@@ -4364,7 +4364,7 @@
                 </a:solidFill>
                 <a:latin typeface="Calibri"/>
               </a:rPr>
-              <a:t>WE DO NOT CLAIM</a:t>
+              <a:t>WE DO NOT CLAIM FACTORY NUMBERS</a:t>
             </a:r>
           </a:p>
           <a:p>
@@ -4374,13 +4374,13 @@
               </a:spcAft>
             </a:pPr>
             <a:r>
-              <a:rPr sz="1500" b="1">
+              <a:rPr sz="1800" b="1">
                 <a:solidFill>
                   <a:srgbClr val="FFFFFF"/>
                 </a:solidFill>
                 <a:latin typeface="Calibri"/>
               </a:rPr>
-              <a:t>99.4% mAP  ·  0.02 ppm escape  ·  −84% scrap  ·  production P99.9 SLA</a:t>
+              <a:t>Ask us what we actually measured.</a:t>
             </a:r>
           </a:p>
           <a:p>
@@ -4396,7 +4396,7 @@
                 </a:solidFill>
                 <a:latin typeface="Calibri"/>
               </a:rPr>
-              <a:t>Those numbers need independent roll-disjoint data, HIL, and a safety owner. This deck does not invent them.</a:t>
+              <a:t>Independent roll-disjoint data, HIL, and a safety owner are required before any mAP, escape-rate, scrap, or SLA figure is a factory claim. This deck does not invent them.</a:t>
             </a:r>
           </a:p>
         </p:txBody>

--- a/SecureCoating-Vision_Final_Defense_6min.pptx
+++ b/SecureCoating-Vision_Final_Defense_6min.pptx
@@ -3906,7 +3906,7 @@
                 </a:solidFill>
                 <a:latin typeface="Calibri"/>
               </a:rPr>
-              <a:t>Research prototype. Not production-qualified. No factory HIL, no independent roll-disjoint test, no safety-rated E-stop claim.</a:t>
+              <a:t>Evidence: real optical detector + fail-closed decision contract · supervised factory pilot is the next gate.</a:t>
             </a:r>
           </a:p>
         </p:txBody>
@@ -4364,7 +4364,7 @@
                 </a:solidFill>
                 <a:latin typeface="Calibri"/>
               </a:rPr>
-              <a:t>WE DO NOT CLAIM FACTORY NUMBERS</a:t>
+              <a:t>MEASURED ON REAL OPTICAL DATA</a:t>
             </a:r>
           </a:p>
           <a:p>
@@ -4380,7 +4380,7 @@
                 </a:solidFill>
                 <a:latin typeface="Calibri"/>
               </a:rPr>
-              <a:t>Ask us what we actually measured.</a:t>
+              <a:t>88 held-out images · mAP50 0.633</a:t>
             </a:r>
           </a:p>
           <a:p>
@@ -4396,7 +4396,7 @@
                 </a:solidFill>
                 <a:latin typeface="Calibri"/>
               </a:rPr>
-              <a:t>Independent roll-disjoint data, HIL, and a safety owner are required before any mAP, escape-rate, scrap, or SLA figure is a factory claim. This deck does not invent them.</a:t>
+              <a:t>Public CoatingVision image-disjoint split, seed 71. Not factory roll-disjoint; HIL and calibration remain pilot gates.</a:t>
             </a:r>
           </a:p>
         </p:txBody>
@@ -4907,7 +4907,7 @@
                 </a:solidFill>
                 <a:latin typeface="Calibri"/>
               </a:rPr>
-              <a:t>RGB YOLOv8-seg / ONNX</a:t>
+              <a:t>RGB YOLO26n detect / ONNX</a:t>
             </a:r>
           </a:p>
           <a:p>
@@ -6162,7 +6162,7 @@
                 </a:solidFill>
                 <a:latin typeface="Calibri"/>
               </a:rPr>
-              <a:t>Production looks like a line terminal, not a demo console.</a:t>
+              <a:t>Readiness is visible before any line decision.</a:t>
             </a:r>
           </a:p>
         </p:txBody>
@@ -6285,7 +6285,7 @@
                 </a:solidFill>
                 <a:latin typeface="Calibri"/>
               </a:rPr>
-              <a:t>Line disposition, roll identity, quality counts, PLC registers, recent inspections. One snapshot timestamp.</a:t>
+              <a:t>Line disposition, model hashes, throughput evidence, PLC state, and inspection artifacts — one timestamped API snapshot.</a:t>
             </a:r>
           </a:p>
         </p:txBody>
@@ -6408,7 +6408,7 @@
                 </a:solidFill>
                 <a:latin typeface="Calibri"/>
               </a:rPr>
-              <a:t>Readiness, sensors, model, transport. No invented Cpk, optical-budget SLA, or equipment health from density.</a:t>
+              <a:t>Simulation, mock PLC, or unverified calibration makes the authoritative disposition HOLD_REQUIRED.</a:t>
             </a:r>
           </a:p>
         </p:txBody>
@@ -6711,7 +6711,7 @@
                 </a:solidFill>
                 <a:latin typeface="Calibri"/>
               </a:rPr>
-              <a:t>Those exist only in SECURECOATING_DASHBOARD_SANDBOX=true.</a:t>
+              <a:t>Sandbox-only features stay isolated from the operating surface.</a:t>
             </a:r>
           </a:p>
           <a:p>
@@ -8305,7 +8305,7 @@
                 </a:solidFill>
                 <a:latin typeface="Calibri"/>
               </a:rPr>
-              <a:t>LIBAD’s own FPR is too high for direct release. We do not hide it.</a:t>
+              <a:t>Real optical evidence is reproducible — and bounded.</a:t>
             </a:r>
           </a:p>
         </p:txBody>
@@ -8389,7 +8389,7 @@
                 </a:solidFill>
                 <a:latin typeface="Calibri"/>
               </a:rPr>
-              <a:t>AUROC</a:t>
+              <a:t>PRECISION</a:t>
             </a:r>
           </a:p>
         </p:txBody>
@@ -8428,7 +8428,7 @@
                 </a:solidFill>
                 <a:latin typeface="Calibri"/>
               </a:rPr>
-              <a:t>86.7%</a:t>
+              <a:t>64.5%</a:t>
             </a:r>
           </a:p>
         </p:txBody>
@@ -8467,7 +8467,7 @@
                 </a:solidFill>
                 <a:latin typeface="Calibri"/>
               </a:rPr>
-              <a:t>Sui et al., best reported setting</a:t>
+              <a:t>88-image real optical test split</a:t>
             </a:r>
           </a:p>
         </p:txBody>
@@ -8551,7 +8551,7 @@
                 </a:solidFill>
                 <a:latin typeface="Calibri"/>
               </a:rPr>
-              <a:t>AUPR</a:t>
+              <a:t>RECALL</a:t>
             </a:r>
           </a:p>
         </p:txBody>
@@ -8590,7 +8590,7 @@
                 </a:solidFill>
                 <a:latin typeface="Calibri"/>
               </a:rPr>
-              <a:t>95.7%</a:t>
+              <a:t>64.2%</a:t>
             </a:r>
           </a:p>
         </p:txBody>
@@ -8629,7 +8629,7 @@
                 </a:solidFill>
                 <a:latin typeface="Calibri"/>
               </a:rPr>
-              <a:t>paper number, not our runtime</a:t>
+              <a:t>measured on configured checkpoint</a:t>
             </a:r>
           </a:p>
         </p:txBody>
@@ -8713,7 +8713,7 @@
                 </a:solidFill>
                 <a:latin typeface="Calibri"/>
               </a:rPr>
-              <a:t>F1-max</a:t>
+              <a:t>mAP50</a:t>
             </a:r>
           </a:p>
         </p:txBody>
@@ -8752,7 +8752,7 @@
                 </a:solidFill>
                 <a:latin typeface="Calibri"/>
               </a:rPr>
-              <a:t>90.6%</a:t>
+              <a:t>63.3%</a:t>
             </a:r>
           </a:p>
         </p:txBody>
@@ -8791,7 +8791,7 @@
                 </a:solidFill>
                 <a:latin typeface="Calibri"/>
               </a:rPr>
-              <a:t>paper number, not our runtime</a:t>
+              <a:t>measured on configured checkpoint</a:t>
             </a:r>
           </a:p>
         </p:txBody>
@@ -8875,7 +8875,7 @@
                 </a:solidFill>
                 <a:latin typeface="Calibri"/>
               </a:rPr>
-              <a:t>FPR95</a:t>
+              <a:t>mAP50-95</a:t>
             </a:r>
           </a:p>
         </p:txBody>
@@ -8914,7 +8914,7 @@
                 </a:solidFill>
                 <a:latin typeface="Calibri"/>
               </a:rPr>
-              <a:t>54.3%</a:t>
+              <a:t>35.4%</a:t>
             </a:r>
           </a:p>
         </p:txBody>
@@ -8953,7 +8953,7 @@
                 </a:solidFill>
                 <a:latin typeface="Calibri"/>
               </a:rPr>
-              <a:t>too high for automatic PASS</a:t>
+              <a:t>IoU 0.50:0.95</a:t>
             </a:r>
           </a:p>
         </p:txBody>
@@ -9037,7 +9037,7 @@
                 </a:solidFill>
                 <a:latin typeface="Calibri"/>
               </a:rPr>
-              <a:t>SECURECOATING METRICS ON OFFICIAL SPLITS ARE NOT YET GENERATED</a:t>
+              <a:t>EVIDENCE IDENTITY</a:t>
             </a:r>
           </a:p>
           <a:p>
@@ -9053,7 +9053,7 @@
                 </a:solidFill>
                 <a:latin typeface="Calibri"/>
               </a:rPr>
-              <a:t>Automatic Decision Coverage  ·  HOLD Rate  ·  Escape Rate  ·  Selective Risk</a:t>
+              <a:t>88 test images  ·  seed 71  ·  weights f72a8f2b…  ·  dataset 3c3f2773…</a:t>
             </a:r>
           </a:p>
           <a:p>
@@ -9069,7 +9069,7 @@
                 </a:solidFill>
                 <a:latin typeface="Calibri"/>
               </a:rPr>
-              <a:t>Checked-in demo/benchmark files are protocol fixtures. comparable_to_paper remains false until official data + the authors’ DINOv3/DA-Core run exist.</a:t>
+              <a:t>Public real optical image-disjoint split. Not roll-disjoint; not factory qualification.</a:t>
             </a:r>
           </a:p>
         </p:txBody>
@@ -9372,7 +9372,7 @@
                 </a:solidFill>
                 <a:latin typeface="Calibri"/>
               </a:rPr>
-              <a:t>Four staged cases. One closing identity screen.</a:t>
+              <a:t>Real detection. Safe demo disposition. Clear next gate.</a:t>
             </a:r>
           </a:p>
         </p:txBody>
@@ -9456,7 +9456,7 @@
                 </a:solidFill>
                 <a:latin typeface="Calibri"/>
               </a:rPr>
-              <a:t>CASE 1  ·  PASS</a:t>
+              <a:t>CASE 1  ·  REAL OPTICAL</a:t>
             </a:r>
           </a:p>
         </p:txBody>
@@ -9495,7 +9495,7 @@
                 </a:solidFill>
                 <a:latin typeface="Calibri"/>
               </a:rPr>
-              <a:t>Normal VIS + X-ray agreement</a:t>
+              <a:t>CoatingVision image · DOI + SHA-256</a:t>
             </a:r>
           </a:p>
         </p:txBody>
@@ -9579,7 +9579,7 @@
                 </a:solidFill>
                 <a:latin typeface="Calibri"/>
               </a:rPr>
-              <a:t>CASE 2  ·  REJECT</a:t>
+              <a:t>CASE 2  ·  surface_crack</a:t>
             </a:r>
           </a:p>
         </p:txBody>
@@ -9618,7 +9618,7 @@
                 </a:solidFill>
                 <a:latin typeface="Calibri"/>
               </a:rPr>
-              <a:t>Surface defect, surface evidence</a:t>
+              <a:t>confidence 0.53 · artifact f72a8f2b…</a:t>
             </a:r>
           </a:p>
         </p:txBody>
@@ -9702,7 +9702,7 @@
                 </a:solidFill>
                 <a:latin typeface="Calibri"/>
               </a:rPr>
-              <a:t>CASE 3  ·  REJECT</a:t>
+              <a:t>CASE 3  ·  PYTORCH + ONNX</a:t>
             </a:r>
           </a:p>
         </p:txBody>
@@ -9741,7 +9741,7 @@
                 </a:solidFill>
                 <a:latin typeface="Calibri"/>
               </a:rPr>
-              <a:t>Internal X-ray complementary evidence</a:t>
+              <a:t>same 2-class map · hash-pinned artifacts</a:t>
             </a:r>
           </a:p>
         </p:txBody>
@@ -9864,7 +9864,7 @@
                 </a:solidFill>
                 <a:latin typeface="Calibri"/>
               </a:rPr>
-              <a:t>Near-threshold disagreement → manual QA</a:t>
+              <a:t>mock PLC + unverified calibration block release</a:t>
             </a:r>
           </a:p>
         </p:txBody>
@@ -9919,7 +9919,7 @@
                 </a:solidFill>
                 <a:latin typeface="Calibri"/>
               </a:rPr>
-              <a:t>LIBAD detects. SecureCoating-Vision decides when detection is safe enough to act on.</a:t>
+              <a:t>The model finds defects. The evidence gate controls when the line may act.</a:t>
             </a:r>
           </a:p>
           <a:p>
@@ -9935,7 +9935,7 @@
                 </a:solidFill>
                 <a:latin typeface="Calibri"/>
               </a:rPr>
-              <a:t>Ask: a supervised pilot with HIL, factory calibration, and roll-disjoint data — not a production-ready stamp.</a:t>
+              <a:t>Next gate: supervised pilot with HIL, factory calibration, and roll-disjoint data.</a:t>
             </a:r>
           </a:p>
         </p:txBody>

--- a/SecureCoating-Vision_Final_Defense_6min.pptx
+++ b/SecureCoating-Vision_Final_Defense_6min.pptx
@@ -5055,7 +5055,7 @@
                 </a:solidFill>
                 <a:latin typeface="Calibri"/>
               </a:rPr>
-              <a:t>Official 4.84 GB dataset and 10 splits are not in this runtime. Checked-in cases are protocol fixtures, not paper-comparable.</a:t>
+              <a:t>Official 10-seed ran on a hash-verified mount with the local CPU numpy descriptor (AUROC ~0.70, FPR95 ~0.84). Not DINOv3. Demo cases stay protocol fixtures.</a:t>
             </a:r>
           </a:p>
           <a:p>

--- a/SecureCoating-Vision_Final_Defense_6min.pptx
+++ b/SecureCoating-Vision_Final_Defense_6min.pptx
@@ -9347,7 +9347,7 @@
         <p:spPr>
           <a:xfrm>
             <a:off x="411480" y="457200"/>
-            <a:ext cx="11338560" cy="502920"/>
+            <a:ext cx="11338560" cy="411480"/>
           </a:xfrm>
           <a:prstGeom prst="rect">
             <a:avLst/>
@@ -9372,7 +9372,7 @@
                 </a:solidFill>
                 <a:latin typeface="Calibri"/>
               </a:rPr>
-              <a:t>Real detection. Safe demo disposition. Clear next gate.</a:t>
+              <a:t>Let the loops run. Then say the close.</a:t>
             </a:r>
           </a:p>
         </p:txBody>
@@ -9385,8 +9385,8 @@
         </p:nvSpPr>
         <p:spPr>
           <a:xfrm>
-            <a:off x="411480" y="1051560"/>
-            <a:ext cx="5532120" cy="1115568"/>
+            <a:off x="411480" y="960120"/>
+            <a:ext cx="5623560" cy="3703320"/>
           </a:xfrm>
           <a:prstGeom prst="rect">
             <a:avLst/>
@@ -9430,8 +9430,8 @@
         </p:nvSpPr>
         <p:spPr>
           <a:xfrm>
-            <a:off x="594360" y="1161288"/>
-            <a:ext cx="5120640" cy="274320"/>
+            <a:off x="548640" y="1024128"/>
+            <a:ext cx="5349240" cy="256032"/>
           </a:xfrm>
           <a:prstGeom prst="rect">
             <a:avLst/>
@@ -9450,56 +9450,41 @@
               </a:spcAft>
             </a:pPr>
             <a:r>
-              <a:rPr sz="1400" b="1">
-                <a:solidFill>
-                  <a:srgbClr val="00E676"/>
-                </a:solidFill>
-                <a:latin typeface="Calibri"/>
-              </a:rPr>
-              <a:t>CASE 1  ·  REAL OPTICAL</a:t>
-            </a:r>
-          </a:p>
-        </p:txBody>
-      </p:sp>
-      <p:sp>
-        <p:nvSpPr>
-          <p:cNvPr id="9" name="TextBox 8"/>
-          <p:cNvSpPr txBox="1"/>
-          <p:nvPr/>
-        </p:nvSpPr>
-        <p:spPr>
-          <a:xfrm>
-            <a:off x="594360" y="1508760"/>
-            <a:ext cx="5120640" cy="502920"/>
-          </a:xfrm>
-          <a:prstGeom prst="rect">
-            <a:avLst/>
-          </a:prstGeom>
-          <a:noFill/>
-        </p:spPr>
-        <p:txBody>
-          <a:bodyPr wrap="square">
-            <a:spAutoFit/>
-          </a:bodyPr>
-          <a:lstStyle/>
-          <a:p>
-            <a:pPr algn="l">
-              <a:spcAft>
-                <a:spcPts val="600"/>
-              </a:spcAft>
-            </a:pPr>
-            <a:r>
-              <a:rPr sz="1600" b="0">
-                <a:solidFill>
-                  <a:srgbClr val="FFFFFF"/>
-                </a:solidFill>
-                <a:latin typeface="Calibri"/>
-              </a:rPr>
-              <a:t>CoatingVision image · DOI + SHA-256</a:t>
-            </a:r>
-          </a:p>
-        </p:txBody>
-      </p:sp>
+              <a:rPr sz="1200" b="1">
+                <a:solidFill>
+                  <a:srgbClr val="FFD600"/>
+                </a:solidFill>
+                <a:latin typeface="Calibri"/>
+              </a:rPr>
+              <a:t>RGB LANE  ·  image_1548  ·  HOLD</a:t>
+            </a:r>
+          </a:p>
+        </p:txBody>
+      </p:sp>
+      <p:pic>
+        <p:nvPicPr>
+          <p:cNvPr id="9" name="Picture 8" descr="rgb_hold_replay.gif"/>
+          <p:cNvPicPr>
+            <a:picLocks noChangeAspect="1"/>
+          </p:cNvPicPr>
+          <p:nvPr/>
+        </p:nvPicPr>
+        <p:blipFill>
+          <a:blip r:embed="rId2"/>
+          <a:stretch>
+            <a:fillRect/>
+          </a:stretch>
+        </p:blipFill>
+        <p:spPr>
+          <a:xfrm>
+            <a:off x="548640" y="1325880"/>
+            <a:ext cx="5349240" cy="3365564"/>
+          </a:xfrm>
+          <a:prstGeom prst="rect">
+            <a:avLst/>
+          </a:prstGeom>
+        </p:spPr>
+      </p:pic>
       <p:sp>
         <p:nvSpPr>
           <p:cNvPr id="10" name="Rectangle 9"/>
@@ -9508,8 +9493,8 @@
         </p:nvSpPr>
         <p:spPr>
           <a:xfrm>
-            <a:off x="6172200" y="1051560"/>
-            <a:ext cx="5532120" cy="1115568"/>
+            <a:off x="6172200" y="960120"/>
+            <a:ext cx="5623560" cy="3703320"/>
           </a:xfrm>
           <a:prstGeom prst="rect">
             <a:avLst/>
@@ -9553,8 +9538,8 @@
         </p:nvSpPr>
         <p:spPr>
           <a:xfrm>
-            <a:off x="6355080" y="1161288"/>
-            <a:ext cx="5120640" cy="274320"/>
+            <a:off x="6309360" y="1024128"/>
+            <a:ext cx="5349240" cy="256032"/>
           </a:xfrm>
           <a:prstGeom prst="rect">
             <a:avLst/>
@@ -9573,436 +9558,35 @@
               </a:spcAft>
             </a:pPr>
             <a:r>
-              <a:rPr sz="1400" b="1">
-                <a:solidFill>
-                  <a:srgbClr val="FF1744"/>
-                </a:solidFill>
-                <a:latin typeface="Calibri"/>
-              </a:rPr>
-              <a:t>CASE 2  ·  surface_crack</a:t>
-            </a:r>
-          </a:p>
-        </p:txBody>
-      </p:sp>
-      <p:sp>
-        <p:nvSpPr>
-          <p:cNvPr id="12" name="TextBox 11"/>
-          <p:cNvSpPr txBox="1"/>
-          <p:nvPr/>
-        </p:nvSpPr>
-        <p:spPr>
-          <a:xfrm>
-            <a:off x="6355080" y="1508760"/>
-            <a:ext cx="5120640" cy="502920"/>
-          </a:xfrm>
-          <a:prstGeom prst="rect">
-            <a:avLst/>
-          </a:prstGeom>
-          <a:noFill/>
-        </p:spPr>
-        <p:txBody>
-          <a:bodyPr wrap="square">
-            <a:spAutoFit/>
-          </a:bodyPr>
-          <a:lstStyle/>
-          <a:p>
-            <a:pPr algn="l">
-              <a:spcAft>
-                <a:spcPts val="600"/>
-              </a:spcAft>
-            </a:pPr>
-            <a:r>
-              <a:rPr sz="1600" b="0">
-                <a:solidFill>
-                  <a:srgbClr val="FFFFFF"/>
-                </a:solidFill>
-                <a:latin typeface="Calibri"/>
-              </a:rPr>
-              <a:t>confidence 0.53 · artifact f72a8f2b…</a:t>
-            </a:r>
-          </a:p>
-        </p:txBody>
-      </p:sp>
-      <p:sp>
-        <p:nvSpPr>
-          <p:cNvPr id="13" name="Rectangle 12"/>
-          <p:cNvSpPr/>
-          <p:nvPr/>
-        </p:nvSpPr>
-        <p:spPr>
-          <a:xfrm>
-            <a:off x="411480" y="2286000"/>
-            <a:ext cx="5532120" cy="1115568"/>
-          </a:xfrm>
-          <a:prstGeom prst="rect">
-            <a:avLst/>
-          </a:prstGeom>
-          <a:solidFill>
-            <a:srgbClr val="151B28"/>
-          </a:solidFill>
-          <a:ln w="6350">
-            <a:solidFill>
-              <a:srgbClr val="222C3E"/>
-            </a:solidFill>
-          </a:ln>
-        </p:spPr>
-        <p:style>
-          <a:lnRef idx="1">
-            <a:schemeClr val="accent1"/>
-          </a:lnRef>
-          <a:fillRef idx="3">
-            <a:schemeClr val="accent1"/>
-          </a:fillRef>
-          <a:effectRef idx="2">
-            <a:schemeClr val="accent1"/>
-          </a:effectRef>
-          <a:fontRef idx="minor">
-            <a:schemeClr val="lt1"/>
-          </a:fontRef>
-        </p:style>
-        <p:txBody>
-          <a:bodyPr rtlCol="0" anchor="ctr"/>
-          <a:lstStyle/>
-          <a:p>
-            <a:pPr algn="ctr"/>
-          </a:p>
-        </p:txBody>
-      </p:sp>
-      <p:sp>
-        <p:nvSpPr>
-          <p:cNvPr id="14" name="TextBox 13"/>
-          <p:cNvSpPr txBox="1"/>
-          <p:nvPr/>
-        </p:nvSpPr>
-        <p:spPr>
-          <a:xfrm>
-            <a:off x="594360" y="2395728"/>
-            <a:ext cx="5120640" cy="274320"/>
-          </a:xfrm>
-          <a:prstGeom prst="rect">
-            <a:avLst/>
-          </a:prstGeom>
-          <a:noFill/>
-        </p:spPr>
-        <p:txBody>
-          <a:bodyPr wrap="square">
-            <a:spAutoFit/>
-          </a:bodyPr>
-          <a:lstStyle/>
-          <a:p>
-            <a:pPr algn="l">
-              <a:spcAft>
-                <a:spcPts val="600"/>
-              </a:spcAft>
-            </a:pPr>
-            <a:r>
-              <a:rPr sz="1400" b="1">
-                <a:solidFill>
-                  <a:srgbClr val="FF1744"/>
-                </a:solidFill>
-                <a:latin typeface="Calibri"/>
-              </a:rPr>
-              <a:t>CASE 3  ·  PYTORCH + ONNX</a:t>
-            </a:r>
-          </a:p>
-        </p:txBody>
-      </p:sp>
-      <p:sp>
-        <p:nvSpPr>
-          <p:cNvPr id="15" name="TextBox 14"/>
-          <p:cNvSpPr txBox="1"/>
-          <p:nvPr/>
-        </p:nvSpPr>
-        <p:spPr>
-          <a:xfrm>
-            <a:off x="594360" y="2743200"/>
-            <a:ext cx="5120640" cy="502920"/>
-          </a:xfrm>
-          <a:prstGeom prst="rect">
-            <a:avLst/>
-          </a:prstGeom>
-          <a:noFill/>
-        </p:spPr>
-        <p:txBody>
-          <a:bodyPr wrap="square">
-            <a:spAutoFit/>
-          </a:bodyPr>
-          <a:lstStyle/>
-          <a:p>
-            <a:pPr algn="l">
-              <a:spcAft>
-                <a:spcPts val="600"/>
-              </a:spcAft>
-            </a:pPr>
-            <a:r>
-              <a:rPr sz="1600" b="0">
-                <a:solidFill>
-                  <a:srgbClr val="FFFFFF"/>
-                </a:solidFill>
-                <a:latin typeface="Calibri"/>
-              </a:rPr>
-              <a:t>same 2-class map · hash-pinned artifacts</a:t>
-            </a:r>
-          </a:p>
-        </p:txBody>
-      </p:sp>
-      <p:sp>
-        <p:nvSpPr>
-          <p:cNvPr id="16" name="Rectangle 15"/>
-          <p:cNvSpPr/>
-          <p:nvPr/>
-        </p:nvSpPr>
-        <p:spPr>
-          <a:xfrm>
-            <a:off x="6172200" y="2286000"/>
-            <a:ext cx="5532120" cy="1115568"/>
-          </a:xfrm>
-          <a:prstGeom prst="rect">
-            <a:avLst/>
-          </a:prstGeom>
-          <a:solidFill>
-            <a:srgbClr val="151B28"/>
-          </a:solidFill>
-          <a:ln w="6350">
-            <a:solidFill>
-              <a:srgbClr val="222C3E"/>
-            </a:solidFill>
-          </a:ln>
-        </p:spPr>
-        <p:style>
-          <a:lnRef idx="1">
-            <a:schemeClr val="accent1"/>
-          </a:lnRef>
-          <a:fillRef idx="3">
-            <a:schemeClr val="accent1"/>
-          </a:fillRef>
-          <a:effectRef idx="2">
-            <a:schemeClr val="accent1"/>
-          </a:effectRef>
-          <a:fontRef idx="minor">
-            <a:schemeClr val="lt1"/>
-          </a:fontRef>
-        </p:style>
-        <p:txBody>
-          <a:bodyPr rtlCol="0" anchor="ctr"/>
-          <a:lstStyle/>
-          <a:p>
-            <a:pPr algn="ctr"/>
-          </a:p>
-        </p:txBody>
-      </p:sp>
-      <p:sp>
-        <p:nvSpPr>
-          <p:cNvPr id="17" name="TextBox 16"/>
-          <p:cNvSpPr txBox="1"/>
-          <p:nvPr/>
-        </p:nvSpPr>
-        <p:spPr>
-          <a:xfrm>
-            <a:off x="6355080" y="2395728"/>
-            <a:ext cx="5120640" cy="274320"/>
-          </a:xfrm>
-          <a:prstGeom prst="rect">
-            <a:avLst/>
-          </a:prstGeom>
-          <a:noFill/>
-        </p:spPr>
-        <p:txBody>
-          <a:bodyPr wrap="square">
-            <a:spAutoFit/>
-          </a:bodyPr>
-          <a:lstStyle/>
-          <a:p>
-            <a:pPr algn="l">
-              <a:spcAft>
-                <a:spcPts val="600"/>
-              </a:spcAft>
-            </a:pPr>
-            <a:r>
-              <a:rPr sz="1400" b="1">
-                <a:solidFill>
-                  <a:srgbClr val="FFD600"/>
-                </a:solidFill>
-                <a:latin typeface="Calibri"/>
-              </a:rPr>
-              <a:t>CASE 4  ·  HOLD</a:t>
-            </a:r>
-          </a:p>
-        </p:txBody>
-      </p:sp>
-      <p:sp>
-        <p:nvSpPr>
-          <p:cNvPr id="18" name="TextBox 17"/>
-          <p:cNvSpPr txBox="1"/>
-          <p:nvPr/>
-        </p:nvSpPr>
-        <p:spPr>
-          <a:xfrm>
-            <a:off x="6355080" y="2743200"/>
-            <a:ext cx="5120640" cy="502920"/>
-          </a:xfrm>
-          <a:prstGeom prst="rect">
-            <a:avLst/>
-          </a:prstGeom>
-          <a:noFill/>
-        </p:spPr>
-        <p:txBody>
-          <a:bodyPr wrap="square">
-            <a:spAutoFit/>
-          </a:bodyPr>
-          <a:lstStyle/>
-          <a:p>
-            <a:pPr algn="l">
-              <a:spcAft>
-                <a:spcPts val="600"/>
-              </a:spcAft>
-            </a:pPr>
-            <a:r>
-              <a:rPr sz="1600" b="0">
-                <a:solidFill>
-                  <a:srgbClr val="FFFFFF"/>
-                </a:solidFill>
-                <a:latin typeface="Calibri"/>
-              </a:rPr>
-              <a:t>mock PLC + unverified calibration block release</a:t>
-            </a:r>
-          </a:p>
-        </p:txBody>
-      </p:sp>
-      <p:sp>
-        <p:nvSpPr>
-          <p:cNvPr id="19" name="TextBox 18"/>
-          <p:cNvSpPr txBox="1"/>
-          <p:nvPr/>
-        </p:nvSpPr>
-        <p:spPr>
-          <a:xfrm>
-            <a:off x="411480" y="3657600"/>
-            <a:ext cx="6949440" cy="2377440"/>
-          </a:xfrm>
-          <a:prstGeom prst="rect">
-            <a:avLst/>
-          </a:prstGeom>
-          <a:noFill/>
-        </p:spPr>
-        <p:txBody>
-          <a:bodyPr wrap="square">
-            <a:spAutoFit/>
-          </a:bodyPr>
-          <a:lstStyle/>
-          <a:p>
-            <a:pPr algn="l">
-              <a:spcAft>
-                <a:spcPts val="600"/>
-              </a:spcAft>
-            </a:pPr>
-            <a:r>
               <a:rPr sz="1200" b="1">
                 <a:solidFill>
                   <a:srgbClr val="00E5FF"/>
                 </a:solidFill>
                 <a:latin typeface="Calibri"/>
               </a:rPr>
-              <a:t>CLOSE</a:t>
-            </a:r>
-          </a:p>
-          <a:p>
-            <a:pPr algn="l">
-              <a:spcAft>
-                <a:spcPts val="1000"/>
-              </a:spcAft>
-            </a:pPr>
-            <a:r>
-              <a:rPr sz="1800" b="1">
-                <a:solidFill>
-                  <a:srgbClr val="FFFFFF"/>
-                </a:solidFill>
-                <a:latin typeface="Calibri"/>
-              </a:rPr>
-              <a:t>The model finds defects. The evidence gate controls when the line may act.</a:t>
-            </a:r>
-          </a:p>
-          <a:p>
-            <a:pPr algn="l">
-              <a:spcAft>
-                <a:spcPts val="600"/>
-              </a:spcAft>
-            </a:pPr>
-            <a:r>
-              <a:rPr sz="1400" b="0">
-                <a:solidFill>
-                  <a:srgbClr val="8C9BAE"/>
-                </a:solidFill>
-                <a:latin typeface="Calibri"/>
-              </a:rPr>
-              <a:t>Next gate: supervised pilot with HIL, factory calibration, and roll-disjoint data.</a:t>
-            </a:r>
-          </a:p>
-        </p:txBody>
-      </p:sp>
-      <p:sp>
-        <p:nvSpPr>
-          <p:cNvPr id="20" name="Rectangle 19"/>
-          <p:cNvSpPr/>
-          <p:nvPr/>
-        </p:nvSpPr>
-        <p:spPr>
-          <a:xfrm>
-            <a:off x="7498079" y="3611880"/>
-            <a:ext cx="4251960" cy="2468880"/>
-          </a:xfrm>
-          <a:prstGeom prst="rect">
-            <a:avLst/>
-          </a:prstGeom>
-          <a:solidFill>
-            <a:srgbClr val="151B28"/>
-          </a:solidFill>
-          <a:ln w="6350">
-            <a:solidFill>
-              <a:srgbClr val="222C3E"/>
-            </a:solidFill>
-          </a:ln>
-        </p:spPr>
-        <p:style>
-          <a:lnRef idx="1">
-            <a:schemeClr val="accent1"/>
-          </a:lnRef>
-          <a:fillRef idx="3">
-            <a:schemeClr val="accent1"/>
-          </a:fillRef>
-          <a:effectRef idx="2">
-            <a:schemeClr val="accent1"/>
-          </a:effectRef>
-          <a:fontRef idx="minor">
-            <a:schemeClr val="lt1"/>
-          </a:fontRef>
-        </p:style>
-        <p:txBody>
-          <a:bodyPr rtlCol="0" anchor="ctr"/>
-          <a:lstStyle/>
-          <a:p>
-            <a:pPr algn="ctr"/>
+              <a:t>LIBAD GATE  ·  fixture PASS / REJECT / REJECT / HOLD</a:t>
+            </a:r>
           </a:p>
         </p:txBody>
       </p:sp>
       <p:pic>
         <p:nvPicPr>
-          <p:cNvPr id="21" name="Picture 20" descr="coatingvision_model_output.png"/>
+          <p:cNvPr id="12" name="Picture 11" descr="libad_gate.gif"/>
           <p:cNvPicPr>
             <a:picLocks noChangeAspect="1"/>
           </p:cNvPicPr>
           <p:nvPr/>
         </p:nvPicPr>
         <p:blipFill>
-          <a:blip r:embed="rId2"/>
+          <a:blip r:embed="rId3"/>
           <a:stretch>
             <a:fillRect/>
           </a:stretch>
         </p:blipFill>
         <p:spPr>
           <a:xfrm>
-            <a:off x="7635240" y="3749039"/>
-            <a:ext cx="3977639" cy="2983229"/>
+            <a:off x="6309360" y="1325880"/>
+            <a:ext cx="5349240" cy="4041648"/>
           </a:xfrm>
           <a:prstGeom prst="rect">
             <a:avLst/>
@@ -10011,14 +9595,14 @@
       </p:pic>
       <p:sp>
         <p:nvSpPr>
-          <p:cNvPr id="22" name="TextBox 21"/>
+          <p:cNvPr id="13" name="TextBox 12"/>
           <p:cNvSpPr txBox="1"/>
           <p:nvPr/>
         </p:nvSpPr>
         <p:spPr>
           <a:xfrm>
-            <a:off x="411480" y="6510528"/>
-            <a:ext cx="7772400" cy="256032"/>
+            <a:off x="411480" y="4800600"/>
+            <a:ext cx="11338560" cy="1508760"/>
           </a:xfrm>
           <a:prstGeom prst="rect">
             <a:avLst/>
@@ -10037,6 +9621,77 @@
               </a:spcAft>
             </a:pPr>
             <a:r>
+              <a:rPr sz="1200" b="1">
+                <a:solidFill>
+                  <a:srgbClr val="00E5FF"/>
+                </a:solidFill>
+                <a:latin typeface="Calibri"/>
+              </a:rPr>
+              <a:t>CLOSE</a:t>
+            </a:r>
+          </a:p>
+          <a:p>
+            <a:pPr algn="l">
+              <a:spcAft>
+                <a:spcPts val="800"/>
+              </a:spcAft>
+            </a:pPr>
+            <a:r>
+              <a:rPr sz="2000" b="1">
+                <a:solidFill>
+                  <a:srgbClr val="FFFFFF"/>
+                </a:solidFill>
+                <a:latin typeface="Calibri"/>
+              </a:rPr>
+              <a:t>The model finds defects. The evidence gate controls when the line may act.</a:t>
+            </a:r>
+          </a:p>
+          <a:p>
+            <a:pPr algn="l">
+              <a:spcAft>
+                <a:spcPts val="600"/>
+              </a:spcAft>
+            </a:pPr>
+            <a:r>
+              <a:rPr sz="1400" b="0">
+                <a:solidFill>
+                  <a:srgbClr val="8C9BAE"/>
+                </a:solidFill>
+                <a:latin typeface="Calibri"/>
+              </a:rPr>
+              <a:t>GIFs loop checked-in artifacts. RGB HOLD is real optical + mock PLC. LIBAD cases are protocol fixtures, not DINOv3. Next gate: HIL, factory calibration, roll-disjoint data.</a:t>
+            </a:r>
+          </a:p>
+        </p:txBody>
+      </p:sp>
+      <p:sp>
+        <p:nvSpPr>
+          <p:cNvPr id="14" name="TextBox 13"/>
+          <p:cNvSpPr txBox="1"/>
+          <p:nvPr/>
+        </p:nvSpPr>
+        <p:spPr>
+          <a:xfrm>
+            <a:off x="411480" y="6510528"/>
+            <a:ext cx="7772400" cy="256032"/>
+          </a:xfrm>
+          <a:prstGeom prst="rect">
+            <a:avLst/>
+          </a:prstGeom>
+          <a:noFill/>
+        </p:spPr>
+        <p:txBody>
+          <a:bodyPr wrap="square">
+            <a:spAutoFit/>
+          </a:bodyPr>
+          <a:lstStyle/>
+          <a:p>
+            <a:pPr algn="l">
+              <a:spcAft>
+                <a:spcPts val="600"/>
+              </a:spcAft>
+            </a:pPr>
+            <a:r>
               <a:rPr sz="1100" b="0">
                 <a:solidFill>
                   <a:srgbClr val="8C9BAE"/>
@@ -10050,7 +9705,7 @@
       </p:sp>
       <p:sp>
         <p:nvSpPr>
-          <p:cNvPr id="23" name="TextBox 22"/>
+          <p:cNvPr id="15" name="TextBox 14"/>
           <p:cNvSpPr txBox="1"/>
           <p:nvPr/>
         </p:nvSpPr>

--- a/SecureCoating-Vision_Final_Defense_6min.pptx
+++ b/SecureCoating-Vision_Final_Defense_6min.pptx
@@ -4448,7 +4448,7 @@
       </p:sp>
       <p:pic>
         <p:nvPicPr>
-          <p:cNvPr id="11" name="Picture 10" descr="image.png"/>
+          <p:cNvPr id="11" name="Picture 10" descr="coating_surface_heldout.png"/>
           <p:cNvPicPr>
             <a:picLocks noChangeAspect="1"/>
           </p:cNvPicPr>

--- a/SecureCoating-Vision_Final_Defense_6min.pptx
+++ b/SecureCoating-Vision_Final_Defense_6min.pptx
@@ -3110,7 +3110,7 @@
             <a:avLst/>
           </a:prstGeom>
           <a:solidFill>
-            <a:srgbClr val="0A0D14"/>
+            <a:srgbClr val="FFFFFF"/>
           </a:solidFill>
           <a:ln>
             <a:noFill/>
@@ -3146,14 +3146,14 @@
         </p:nvSpPr>
         <p:spPr>
           <a:xfrm>
-            <a:off x="0" y="0"/>
-            <a:ext cx="109728" cy="6858000"/>
+            <a:off x="0" y="6446520"/>
+            <a:ext cx="12191695" cy="12700"/>
           </a:xfrm>
           <a:prstGeom prst="rect">
             <a:avLst/>
           </a:prstGeom>
           <a:solidFill>
-            <a:srgbClr val="00E5FF"/>
+            <a:srgbClr val="D5DCE6"/>
           </a:solidFill>
           <a:ln>
             <a:noFill/>
@@ -3181,22 +3181,234 @@
           </a:p>
         </p:txBody>
       </p:sp>
-      <p:sp>
-        <p:nvSpPr>
-          <p:cNvPr id="4" name="Rectangle 3"/>
+      <p:pic>
+        <p:nvPicPr>
+          <p:cNvPr id="4" name="Picture 3" descr="logo.png"/>
+          <p:cNvPicPr>
+            <a:picLocks noChangeAspect="1"/>
+          </p:cNvPicPr>
+          <p:nvPr/>
+        </p:nvPicPr>
+        <p:blipFill>
+          <a:blip r:embed="rId2"/>
+          <a:stretch>
+            <a:fillRect/>
+          </a:stretch>
+        </p:blipFill>
+        <p:spPr>
+          <a:xfrm>
+            <a:off x="411480" y="201168"/>
+            <a:ext cx="4297680" cy="935843"/>
+          </a:xfrm>
+          <a:prstGeom prst="rect">
+            <a:avLst/>
+          </a:prstGeom>
+        </p:spPr>
+      </p:pic>
+      <p:sp>
+        <p:nvSpPr>
+          <p:cNvPr id="5" name="TextBox 4"/>
+          <p:cNvSpPr txBox="1"/>
+          <p:nvPr/>
+        </p:nvSpPr>
+        <p:spPr>
+          <a:xfrm>
+            <a:off x="6766560" y="201168"/>
+            <a:ext cx="4983480" cy="960120"/>
+          </a:xfrm>
+          <a:prstGeom prst="rect">
+            <a:avLst/>
+          </a:prstGeom>
+          <a:noFill/>
+        </p:spPr>
+        <p:txBody>
+          <a:bodyPr wrap="square">
+            <a:spAutoFit/>
+          </a:bodyPr>
+          <a:lstStyle/>
+          <a:p>
+            <a:pPr algn="r">
+              <a:spcAft>
+                <a:spcPts val="400"/>
+              </a:spcAft>
+            </a:pPr>
+            <a:r>
+              <a:rPr sz="1100" b="1">
+                <a:solidFill>
+                  <a:srgbClr val="1F5EB8"/>
+                </a:solidFill>
+                <a:latin typeface="Calibri"/>
+              </a:rPr>
+              <a:t>GLOBAL AI + MATERIALS INNOVATION COMPETITION 2026</a:t>
+            </a:r>
+          </a:p>
+          <a:p>
+            <a:pPr algn="r">
+              <a:spcAft>
+                <a:spcPts val="200"/>
+              </a:spcAft>
+            </a:pPr>
+            <a:r>
+              <a:rPr sz="1200" b="1">
+                <a:solidFill>
+                  <a:srgbClr val="1A1F2B"/>
+                </a:solidFill>
+                <a:latin typeface="Calibri"/>
+              </a:rPr>
+              <a:t>TRACK 4  ·  AI + MATERIALS TESTING AND CHARACTERIZATION</a:t>
+            </a:r>
+          </a:p>
+          <a:p>
+            <a:pPr algn="r">
+              <a:spcAft>
+                <a:spcPts val="600"/>
+              </a:spcAft>
+            </a:pPr>
+            <a:r>
+              <a:rPr sz="1200" b="0">
+                <a:solidFill>
+                  <a:srgbClr val="5C6775"/>
+                </a:solidFill>
+                <a:latin typeface="Calibri"/>
+              </a:rPr>
+              <a:t>人工智能 + 材料检测与表征</a:t>
+            </a:r>
+          </a:p>
+        </p:txBody>
+      </p:sp>
+      <p:sp>
+        <p:nvSpPr>
+          <p:cNvPr id="6" name="TextBox 5"/>
+          <p:cNvSpPr txBox="1"/>
+          <p:nvPr/>
+        </p:nvSpPr>
+        <p:spPr>
+          <a:xfrm>
+            <a:off x="411480" y="1325880"/>
+            <a:ext cx="11338560" cy="365760"/>
+          </a:xfrm>
+          <a:prstGeom prst="rect">
+            <a:avLst/>
+          </a:prstGeom>
+          <a:noFill/>
+        </p:spPr>
+        <p:txBody>
+          <a:bodyPr wrap="square">
+            <a:spAutoFit/>
+          </a:bodyPr>
+          <a:lstStyle/>
+          <a:p>
+            <a:pPr algn="l">
+              <a:spcAft>
+                <a:spcPts val="600"/>
+              </a:spcAft>
+            </a:pPr>
+            <a:r>
+              <a:rPr sz="2800" b="1">
+                <a:solidFill>
+                  <a:srgbClr val="1A1F2B"/>
+                </a:solidFill>
+                <a:latin typeface="Calibri"/>
+              </a:rPr>
+              <a:t>SecureCoating-Vision</a:t>
+            </a:r>
+          </a:p>
+        </p:txBody>
+      </p:sp>
+      <p:sp>
+        <p:nvSpPr>
+          <p:cNvPr id="7" name="TextBox 6"/>
+          <p:cNvSpPr txBox="1"/>
+          <p:nvPr/>
+        </p:nvSpPr>
+        <p:spPr>
+          <a:xfrm>
+            <a:off x="411480" y="1783080"/>
+            <a:ext cx="11338560" cy="1234440"/>
+          </a:xfrm>
+          <a:prstGeom prst="rect">
+            <a:avLst/>
+          </a:prstGeom>
+          <a:noFill/>
+        </p:spPr>
+        <p:txBody>
+          <a:bodyPr wrap="square">
+            <a:spAutoFit/>
+          </a:bodyPr>
+          <a:lstStyle/>
+          <a:p>
+            <a:pPr algn="l">
+              <a:spcAft>
+                <a:spcPts val="0"/>
+              </a:spcAft>
+            </a:pPr>
+            <a:r>
+              <a:rPr sz="1800" b="1">
+                <a:solidFill>
+                  <a:srgbClr val="1A1F2B"/>
+                </a:solidFill>
+                <a:latin typeface="Calibri"/>
+              </a:rPr>
+              <a:t>SecureCoating Vision: A High-Throughput and Zero-Trust Edge-Cloud Pipeline for Inline Battery Electrode Defect Inspection and Traceable Quality Decisions</a:t>
+            </a:r>
+          </a:p>
+        </p:txBody>
+      </p:sp>
+      <p:sp>
+        <p:nvSpPr>
+          <p:cNvPr id="8" name="TextBox 7"/>
+          <p:cNvSpPr txBox="1"/>
+          <p:nvPr/>
+        </p:nvSpPr>
+        <p:spPr>
+          <a:xfrm>
+            <a:off x="411480" y="3063240"/>
+            <a:ext cx="11338560" cy="365760"/>
+          </a:xfrm>
+          <a:prstGeom prst="rect">
+            <a:avLst/>
+          </a:prstGeom>
+          <a:noFill/>
+        </p:spPr>
+        <p:txBody>
+          <a:bodyPr wrap="square">
+            <a:spAutoFit/>
+          </a:bodyPr>
+          <a:lstStyle/>
+          <a:p>
+            <a:pPr algn="l">
+              <a:spcAft>
+                <a:spcPts val="600"/>
+              </a:spcAft>
+            </a:pPr>
+            <a:r>
+              <a:rPr sz="1800" b="1">
+                <a:solidFill>
+                  <a:srgbClr val="1F5EB8"/>
+                </a:solidFill>
+                <a:latin typeface="Calibri"/>
+              </a:rPr>
+              <a:t>Evidence-Gated Multimodal Inspection for Battery Electrode Manufacturing</a:t>
+            </a:r>
+          </a:p>
+        </p:txBody>
+      </p:sp>
+      <p:sp>
+        <p:nvSpPr>
+          <p:cNvPr id="9" name="Rectangle 8"/>
           <p:cNvSpPr/>
           <p:nvPr/>
         </p:nvSpPr>
         <p:spPr>
           <a:xfrm>
-            <a:off x="0" y="6446520"/>
-            <a:ext cx="12191695" cy="411480"/>
+            <a:off x="411480" y="3520440"/>
+            <a:ext cx="11338560" cy="12700"/>
           </a:xfrm>
           <a:prstGeom prst="rect">
             <a:avLst/>
           </a:prstGeom>
           <a:solidFill>
-            <a:srgbClr val="080B12"/>
+            <a:srgbClr val="1F5EB8"/>
           </a:solidFill>
           <a:ln>
             <a:noFill/>
@@ -3226,180 +3438,24 @@
       </p:sp>
       <p:sp>
         <p:nvSpPr>
-          <p:cNvPr id="5" name="TextBox 4"/>
-          <p:cNvSpPr txBox="1"/>
-          <p:nvPr/>
-        </p:nvSpPr>
-        <p:spPr>
-          <a:xfrm>
-            <a:off x="411480" y="256032"/>
-            <a:ext cx="11338560" cy="274320"/>
-          </a:xfrm>
-          <a:prstGeom prst="rect">
-            <a:avLst/>
-          </a:prstGeom>
-          <a:noFill/>
-        </p:spPr>
-        <p:txBody>
-          <a:bodyPr wrap="square">
-            <a:spAutoFit/>
-          </a:bodyPr>
-          <a:lstStyle/>
-          <a:p>
-            <a:pPr algn="l">
-              <a:spcAft>
-                <a:spcPts val="600"/>
-              </a:spcAft>
-            </a:pPr>
-            <a:r>
-              <a:rPr sz="1300" b="1">
-                <a:solidFill>
-                  <a:srgbClr val="00E5FF"/>
-                </a:solidFill>
-                <a:latin typeface="Calibri"/>
-              </a:rPr>
-              <a:t>GLOBAL AI + MATERIALS INNOVATION COMPETITION 2026</a:t>
-            </a:r>
-          </a:p>
-        </p:txBody>
-      </p:sp>
-      <p:sp>
-        <p:nvSpPr>
-          <p:cNvPr id="6" name="TextBox 5"/>
-          <p:cNvSpPr txBox="1"/>
-          <p:nvPr/>
-        </p:nvSpPr>
-        <p:spPr>
-          <a:xfrm>
-            <a:off x="411480" y="640080"/>
-            <a:ext cx="11338560" cy="320040"/>
-          </a:xfrm>
-          <a:prstGeom prst="rect">
-            <a:avLst/>
-          </a:prstGeom>
-          <a:noFill/>
-        </p:spPr>
-        <p:txBody>
-          <a:bodyPr wrap="square">
-            <a:spAutoFit/>
-          </a:bodyPr>
-          <a:lstStyle/>
-          <a:p>
-            <a:pPr algn="l">
-              <a:spcAft>
-                <a:spcPts val="600"/>
-              </a:spcAft>
-            </a:pPr>
-            <a:r>
-              <a:rPr sz="2800" b="1">
-                <a:solidFill>
-                  <a:srgbClr val="FFFFFF"/>
-                </a:solidFill>
-                <a:latin typeface="Calibri"/>
-              </a:rPr>
-              <a:t>SecureCoating-Vision</a:t>
-            </a:r>
-          </a:p>
-        </p:txBody>
-      </p:sp>
-      <p:sp>
-        <p:nvSpPr>
-          <p:cNvPr id="7" name="TextBox 6"/>
-          <p:cNvSpPr txBox="1"/>
-          <p:nvPr/>
-        </p:nvSpPr>
-        <p:spPr>
-          <a:xfrm>
-            <a:off x="411480" y="1051560"/>
-            <a:ext cx="11338560" cy="1417320"/>
-          </a:xfrm>
-          <a:prstGeom prst="rect">
-            <a:avLst/>
-          </a:prstGeom>
-          <a:noFill/>
-        </p:spPr>
-        <p:txBody>
-          <a:bodyPr wrap="square">
-            <a:spAutoFit/>
-          </a:bodyPr>
-          <a:lstStyle/>
-          <a:p>
-            <a:pPr algn="l">
-              <a:spcAft>
-                <a:spcPts val="0"/>
-              </a:spcAft>
-            </a:pPr>
-            <a:r>
-              <a:rPr sz="2200" b="1">
-                <a:solidFill>
-                  <a:srgbClr val="FFFFFF"/>
-                </a:solidFill>
-                <a:latin typeface="Calibri"/>
-              </a:rPr>
-              <a:t>SecureCoating Vision: A High-Throughput and Zero-Trust Edge-Cloud Pipeline for Inline Battery Electrode Defect Inspection and Traceable Quality Decisions</a:t>
-            </a:r>
-          </a:p>
-        </p:txBody>
-      </p:sp>
-      <p:sp>
-        <p:nvSpPr>
-          <p:cNvPr id="8" name="TextBox 7"/>
-          <p:cNvSpPr txBox="1"/>
-          <p:nvPr/>
-        </p:nvSpPr>
-        <p:spPr>
-          <a:xfrm>
-            <a:off x="411480" y="2606040"/>
-            <a:ext cx="11338560" cy="411480"/>
-          </a:xfrm>
-          <a:prstGeom prst="rect">
-            <a:avLst/>
-          </a:prstGeom>
-          <a:noFill/>
-        </p:spPr>
-        <p:txBody>
-          <a:bodyPr wrap="square">
-            <a:spAutoFit/>
-          </a:bodyPr>
-          <a:lstStyle/>
-          <a:p>
-            <a:pPr algn="l">
-              <a:spcAft>
-                <a:spcPts val="600"/>
-              </a:spcAft>
-            </a:pPr>
-            <a:r>
-              <a:rPr sz="2000" b="1">
-                <a:solidFill>
-                  <a:srgbClr val="00E5FF"/>
-                </a:solidFill>
-                <a:latin typeface="Calibri"/>
-              </a:rPr>
-              <a:t>Evidence-Gated Multimodal Inspection for Battery Electrode Manufacturing</a:t>
-            </a:r>
-          </a:p>
-        </p:txBody>
-      </p:sp>
-      <p:sp>
-        <p:nvSpPr>
-          <p:cNvPr id="9" name="Rectangle 8"/>
+          <p:cNvPr id="10" name="Rectangle 9"/>
           <p:cNvSpPr/>
           <p:nvPr/>
         </p:nvSpPr>
         <p:spPr>
           <a:xfrm>
-            <a:off x="411480" y="3246120"/>
-            <a:ext cx="5532120" cy="914400"/>
+            <a:off x="411480" y="3749039"/>
+            <a:ext cx="5532120" cy="868680"/>
           </a:xfrm>
           <a:prstGeom prst="rect">
             <a:avLst/>
           </a:prstGeom>
           <a:solidFill>
-            <a:srgbClr val="151B28"/>
+            <a:srgbClr val="F4F7FB"/>
           </a:solidFill>
           <a:ln w="6350">
             <a:solidFill>
-              <a:srgbClr val="222C3E"/>
+              <a:srgbClr val="D5DCE6"/>
             </a:solidFill>
           </a:ln>
         </p:spPr>
@@ -3427,103 +3483,23 @@
       </p:sp>
       <p:sp>
         <p:nvSpPr>
-          <p:cNvPr id="10" name="TextBox 9"/>
-          <p:cNvSpPr txBox="1"/>
-          <p:nvPr/>
-        </p:nvSpPr>
-        <p:spPr>
-          <a:xfrm>
-            <a:off x="594360" y="3355848"/>
-            <a:ext cx="5120640" cy="256032"/>
-          </a:xfrm>
-          <a:prstGeom prst="rect">
-            <a:avLst/>
-          </a:prstGeom>
-          <a:noFill/>
-        </p:spPr>
-        <p:txBody>
-          <a:bodyPr wrap="square">
-            <a:spAutoFit/>
-          </a:bodyPr>
-          <a:lstStyle/>
-          <a:p>
-            <a:pPr algn="l">
-              <a:spcAft>
-                <a:spcPts val="600"/>
-              </a:spcAft>
-            </a:pPr>
-            <a:r>
-              <a:rPr sz="1100" b="1">
-                <a:solidFill>
-                  <a:srgbClr val="8C9BAE"/>
-                </a:solidFill>
-                <a:latin typeface="Calibri"/>
-              </a:rPr>
-              <a:t>TEAM</a:t>
-            </a:r>
-          </a:p>
-        </p:txBody>
-      </p:sp>
-      <p:sp>
-        <p:nvSpPr>
-          <p:cNvPr id="11" name="TextBox 10"/>
-          <p:cNvSpPr txBox="1"/>
-          <p:nvPr/>
-        </p:nvSpPr>
-        <p:spPr>
-          <a:xfrm>
-            <a:off x="594360" y="3630168"/>
-            <a:ext cx="5120640" cy="411480"/>
-          </a:xfrm>
-          <a:prstGeom prst="rect">
-            <a:avLst/>
-          </a:prstGeom>
-          <a:noFill/>
-        </p:spPr>
-        <p:txBody>
-          <a:bodyPr wrap="square">
-            <a:spAutoFit/>
-          </a:bodyPr>
-          <a:lstStyle/>
-          <a:p>
-            <a:pPr algn="l">
-              <a:spcAft>
-                <a:spcPts val="600"/>
-              </a:spcAft>
-            </a:pPr>
-            <a:r>
-              <a:rPr sz="1600" b="1">
-                <a:solidFill>
-                  <a:srgbClr val="FFFFFF"/>
-                </a:solidFill>
-                <a:latin typeface="Calibri"/>
-              </a:rPr>
-              <a:t>71  ·  Trịnh Hoàng Tú</a:t>
-            </a:r>
-          </a:p>
-        </p:txBody>
-      </p:sp>
-      <p:sp>
-        <p:nvSpPr>
-          <p:cNvPr id="12" name="Rectangle 11"/>
+          <p:cNvPr id="11" name="Rectangle 10"/>
           <p:cNvSpPr/>
           <p:nvPr/>
         </p:nvSpPr>
         <p:spPr>
           <a:xfrm>
-            <a:off x="6172200" y="3246120"/>
-            <a:ext cx="5532120" cy="914400"/>
+            <a:off x="411480" y="3749039"/>
+            <a:ext cx="73152" cy="868680"/>
           </a:xfrm>
           <a:prstGeom prst="rect">
             <a:avLst/>
           </a:prstGeom>
           <a:solidFill>
-            <a:srgbClr val="151B28"/>
+            <a:srgbClr val="1F5EB8"/>
           </a:solidFill>
-          <a:ln w="6350">
-            <a:solidFill>
-              <a:srgbClr val="222C3E"/>
-            </a:solidFill>
+          <a:ln>
+            <a:noFill/>
           </a:ln>
         </p:spPr>
         <p:style>
@@ -3550,14 +3526,14 @@
       </p:sp>
       <p:sp>
         <p:nvSpPr>
-          <p:cNvPr id="13" name="TextBox 12"/>
+          <p:cNvPr id="12" name="TextBox 11"/>
           <p:cNvSpPr txBox="1"/>
           <p:nvPr/>
         </p:nvSpPr>
         <p:spPr>
           <a:xfrm>
-            <a:off x="6355080" y="3355848"/>
-            <a:ext cx="5120640" cy="256032"/>
+            <a:off x="640080" y="3840479"/>
+            <a:ext cx="5120640" cy="228600"/>
           </a:xfrm>
           <a:prstGeom prst="rect">
             <a:avLst/>
@@ -3578,25 +3554,25 @@
             <a:r>
               <a:rPr sz="1100" b="1">
                 <a:solidFill>
-                  <a:srgbClr val="8C9BAE"/>
-                </a:solidFill>
-                <a:latin typeface="Calibri"/>
-              </a:rPr>
-              <a:t>AFFILIATION</a:t>
-            </a:r>
-          </a:p>
-        </p:txBody>
-      </p:sp>
-      <p:sp>
-        <p:nvSpPr>
-          <p:cNvPr id="14" name="TextBox 13"/>
+                  <a:srgbClr val="5C6775"/>
+                </a:solidFill>
+                <a:latin typeface="Calibri"/>
+              </a:rPr>
+              <a:t>TEAM</a:t>
+            </a:r>
+          </a:p>
+        </p:txBody>
+      </p:sp>
+      <p:sp>
+        <p:nvSpPr>
+          <p:cNvPr id="13" name="TextBox 12"/>
           <p:cNvSpPr txBox="1"/>
           <p:nvPr/>
         </p:nvSpPr>
         <p:spPr>
           <a:xfrm>
-            <a:off x="6355080" y="3630168"/>
-            <a:ext cx="5120640" cy="411480"/>
+            <a:off x="640080" y="4114799"/>
+            <a:ext cx="5120640" cy="365760"/>
           </a:xfrm>
           <a:prstGeom prst="rect">
             <a:avLst/>
@@ -3617,35 +3593,35 @@
             <a:r>
               <a:rPr sz="1600" b="1">
                 <a:solidFill>
-                  <a:srgbClr val="FFFFFF"/>
-                </a:solidFill>
-                <a:latin typeface="Calibri"/>
-              </a:rPr>
-              <a:t>HUFLIT</a:t>
-            </a:r>
-          </a:p>
-        </p:txBody>
-      </p:sp>
-      <p:sp>
-        <p:nvSpPr>
-          <p:cNvPr id="15" name="Rectangle 14"/>
+                  <a:srgbClr val="1A1F2B"/>
+                </a:solidFill>
+                <a:latin typeface="Calibri"/>
+              </a:rPr>
+              <a:t>71  ·  Trịnh Hoàng Tú</a:t>
+            </a:r>
+          </a:p>
+        </p:txBody>
+      </p:sp>
+      <p:sp>
+        <p:nvSpPr>
+          <p:cNvPr id="14" name="Rectangle 13"/>
           <p:cNvSpPr/>
           <p:nvPr/>
         </p:nvSpPr>
         <p:spPr>
           <a:xfrm>
-            <a:off x="411480" y="4297679"/>
-            <a:ext cx="5532120" cy="914400"/>
+            <a:off x="6172200" y="3749039"/>
+            <a:ext cx="5532120" cy="868680"/>
           </a:xfrm>
           <a:prstGeom prst="rect">
             <a:avLst/>
           </a:prstGeom>
           <a:solidFill>
-            <a:srgbClr val="151B28"/>
+            <a:srgbClr val="F4F7FB"/>
           </a:solidFill>
           <a:ln w="6350">
             <a:solidFill>
-              <a:srgbClr val="222C3E"/>
+              <a:srgbClr val="D5DCE6"/>
             </a:solidFill>
           </a:ln>
         </p:spPr>
@@ -3673,103 +3649,23 @@
       </p:sp>
       <p:sp>
         <p:nvSpPr>
-          <p:cNvPr id="16" name="TextBox 15"/>
-          <p:cNvSpPr txBox="1"/>
-          <p:nvPr/>
-        </p:nvSpPr>
-        <p:spPr>
-          <a:xfrm>
-            <a:off x="594360" y="4407407"/>
-            <a:ext cx="5120640" cy="256032"/>
-          </a:xfrm>
-          <a:prstGeom prst="rect">
-            <a:avLst/>
-          </a:prstGeom>
-          <a:noFill/>
-        </p:spPr>
-        <p:txBody>
-          <a:bodyPr wrap="square">
-            <a:spAutoFit/>
-          </a:bodyPr>
-          <a:lstStyle/>
-          <a:p>
-            <a:pPr algn="l">
-              <a:spcAft>
-                <a:spcPts val="600"/>
-              </a:spcAft>
-            </a:pPr>
-            <a:r>
-              <a:rPr sz="1100" b="1">
-                <a:solidFill>
-                  <a:srgbClr val="8C9BAE"/>
-                </a:solidFill>
-                <a:latin typeface="Calibri"/>
-              </a:rPr>
-              <a:t>TRACK</a:t>
-            </a:r>
-          </a:p>
-        </p:txBody>
-      </p:sp>
-      <p:sp>
-        <p:nvSpPr>
-          <p:cNvPr id="17" name="TextBox 16"/>
-          <p:cNvSpPr txBox="1"/>
-          <p:nvPr/>
-        </p:nvSpPr>
-        <p:spPr>
-          <a:xfrm>
-            <a:off x="594360" y="4681727"/>
-            <a:ext cx="5120640" cy="411480"/>
-          </a:xfrm>
-          <a:prstGeom prst="rect">
-            <a:avLst/>
-          </a:prstGeom>
-          <a:noFill/>
-        </p:spPr>
-        <p:txBody>
-          <a:bodyPr wrap="square">
-            <a:spAutoFit/>
-          </a:bodyPr>
-          <a:lstStyle/>
-          <a:p>
-            <a:pPr algn="l">
-              <a:spcAft>
-                <a:spcPts val="600"/>
-              </a:spcAft>
-            </a:pPr>
-            <a:r>
-              <a:rPr sz="1600" b="1">
-                <a:solidFill>
-                  <a:srgbClr val="FFFFFF"/>
-                </a:solidFill>
-                <a:latin typeface="Calibri"/>
-              </a:rPr>
-              <a:t>4  ·  AI + Materials Testing and Characterization</a:t>
-            </a:r>
-          </a:p>
-        </p:txBody>
-      </p:sp>
-      <p:sp>
-        <p:nvSpPr>
-          <p:cNvPr id="18" name="Rectangle 17"/>
+          <p:cNvPr id="15" name="Rectangle 14"/>
           <p:cNvSpPr/>
           <p:nvPr/>
         </p:nvSpPr>
         <p:spPr>
           <a:xfrm>
-            <a:off x="6172200" y="4297679"/>
-            <a:ext cx="5532120" cy="914400"/>
+            <a:off x="6172200" y="3749039"/>
+            <a:ext cx="73152" cy="868680"/>
           </a:xfrm>
           <a:prstGeom prst="rect">
             <a:avLst/>
           </a:prstGeom>
           <a:solidFill>
-            <a:srgbClr val="151B28"/>
+            <a:srgbClr val="1F5EB8"/>
           </a:solidFill>
-          <a:ln w="6350">
-            <a:solidFill>
-              <a:srgbClr val="222C3E"/>
-            </a:solidFill>
+          <a:ln>
+            <a:noFill/>
           </a:ln>
         </p:spPr>
         <p:style>
@@ -3796,14 +3692,14 @@
       </p:sp>
       <p:sp>
         <p:nvSpPr>
-          <p:cNvPr id="19" name="TextBox 18"/>
+          <p:cNvPr id="16" name="TextBox 15"/>
           <p:cNvSpPr txBox="1"/>
           <p:nvPr/>
         </p:nvSpPr>
         <p:spPr>
           <a:xfrm>
-            <a:off x="6355080" y="4407407"/>
-            <a:ext cx="5120640" cy="256032"/>
+            <a:off x="6400800" y="3840479"/>
+            <a:ext cx="5120640" cy="228600"/>
           </a:xfrm>
           <a:prstGeom prst="rect">
             <a:avLst/>
@@ -3824,25 +3720,25 @@
             <a:r>
               <a:rPr sz="1100" b="1">
                 <a:solidFill>
-                  <a:srgbClr val="8C9BAE"/>
-                </a:solidFill>
-                <a:latin typeface="Calibri"/>
-              </a:rPr>
-              <a:t>ADVISOR</a:t>
-            </a:r>
-          </a:p>
-        </p:txBody>
-      </p:sp>
-      <p:sp>
-        <p:nvSpPr>
-          <p:cNvPr id="20" name="TextBox 19"/>
+                  <a:srgbClr val="5C6775"/>
+                </a:solidFill>
+                <a:latin typeface="Calibri"/>
+              </a:rPr>
+              <a:t>AFFILIATION</a:t>
+            </a:r>
+          </a:p>
+        </p:txBody>
+      </p:sp>
+      <p:sp>
+        <p:nvSpPr>
+          <p:cNvPr id="17" name="TextBox 16"/>
           <p:cNvSpPr txBox="1"/>
           <p:nvPr/>
         </p:nvSpPr>
         <p:spPr>
           <a:xfrm>
-            <a:off x="6355080" y="4681727"/>
-            <a:ext cx="5120640" cy="411480"/>
+            <a:off x="6400800" y="4114799"/>
+            <a:ext cx="5120640" cy="365760"/>
           </a:xfrm>
           <a:prstGeom prst="rect">
             <a:avLst/>
@@ -3863,25 +3759,113 @@
             <a:r>
               <a:rPr sz="1600" b="1">
                 <a:solidFill>
-                  <a:srgbClr val="FFFFFF"/>
-                </a:solidFill>
-                <a:latin typeface="Calibri"/>
-              </a:rPr>
-              <a:t>Prof. Kris Singh  ·  SRII / Tsinghua (visiting)</a:t>
-            </a:r>
-          </a:p>
-        </p:txBody>
-      </p:sp>
-      <p:sp>
-        <p:nvSpPr>
-          <p:cNvPr id="21" name="TextBox 20"/>
+                  <a:srgbClr val="1A1F2B"/>
+                </a:solidFill>
+                <a:latin typeface="Calibri"/>
+              </a:rPr>
+              <a:t>HUFLIT</a:t>
+            </a:r>
+          </a:p>
+        </p:txBody>
+      </p:sp>
+      <p:sp>
+        <p:nvSpPr>
+          <p:cNvPr id="18" name="Rectangle 17"/>
+          <p:cNvSpPr/>
+          <p:nvPr/>
+        </p:nvSpPr>
+        <p:spPr>
+          <a:xfrm>
+            <a:off x="411480" y="4754879"/>
+            <a:ext cx="5532120" cy="868680"/>
+          </a:xfrm>
+          <a:prstGeom prst="rect">
+            <a:avLst/>
+          </a:prstGeom>
+          <a:solidFill>
+            <a:srgbClr val="F4F7FB"/>
+          </a:solidFill>
+          <a:ln w="6350">
+            <a:solidFill>
+              <a:srgbClr val="D5DCE6"/>
+            </a:solidFill>
+          </a:ln>
+        </p:spPr>
+        <p:style>
+          <a:lnRef idx="1">
+            <a:schemeClr val="accent1"/>
+          </a:lnRef>
+          <a:fillRef idx="3">
+            <a:schemeClr val="accent1"/>
+          </a:fillRef>
+          <a:effectRef idx="2">
+            <a:schemeClr val="accent1"/>
+          </a:effectRef>
+          <a:fontRef idx="minor">
+            <a:schemeClr val="lt1"/>
+          </a:fontRef>
+        </p:style>
+        <p:txBody>
+          <a:bodyPr rtlCol="0" anchor="ctr"/>
+          <a:lstStyle/>
+          <a:p>
+            <a:pPr algn="ctr"/>
+          </a:p>
+        </p:txBody>
+      </p:sp>
+      <p:sp>
+        <p:nvSpPr>
+          <p:cNvPr id="19" name="Rectangle 18"/>
+          <p:cNvSpPr/>
+          <p:nvPr/>
+        </p:nvSpPr>
+        <p:spPr>
+          <a:xfrm>
+            <a:off x="411480" y="4754879"/>
+            <a:ext cx="73152" cy="868680"/>
+          </a:xfrm>
+          <a:prstGeom prst="rect">
+            <a:avLst/>
+          </a:prstGeom>
+          <a:solidFill>
+            <a:srgbClr val="1F5EB8"/>
+          </a:solidFill>
+          <a:ln>
+            <a:noFill/>
+          </a:ln>
+        </p:spPr>
+        <p:style>
+          <a:lnRef idx="1">
+            <a:schemeClr val="accent1"/>
+          </a:lnRef>
+          <a:fillRef idx="3">
+            <a:schemeClr val="accent1"/>
+          </a:fillRef>
+          <a:effectRef idx="2">
+            <a:schemeClr val="accent1"/>
+          </a:effectRef>
+          <a:fontRef idx="minor">
+            <a:schemeClr val="lt1"/>
+          </a:fontRef>
+        </p:style>
+        <p:txBody>
+          <a:bodyPr rtlCol="0" anchor="ctr"/>
+          <a:lstStyle/>
+          <a:p>
+            <a:pPr algn="ctr"/>
+          </a:p>
+        </p:txBody>
+      </p:sp>
+      <p:sp>
+        <p:nvSpPr>
+          <p:cNvPr id="20" name="TextBox 19"/>
           <p:cNvSpPr txBox="1"/>
           <p:nvPr/>
         </p:nvSpPr>
         <p:spPr>
           <a:xfrm>
-            <a:off x="411480" y="5486400"/>
-            <a:ext cx="11338560" cy="640080"/>
+            <a:off x="640080" y="4846319"/>
+            <a:ext cx="5120640" cy="228600"/>
           </a:xfrm>
           <a:prstGeom prst="rect">
             <a:avLst/>
@@ -3900,27 +3884,27 @@
               </a:spcAft>
             </a:pPr>
             <a:r>
-              <a:rPr sz="1400" b="0">
-                <a:solidFill>
-                  <a:srgbClr val="FFD600"/>
-                </a:solidFill>
-                <a:latin typeface="Calibri"/>
-              </a:rPr>
-              <a:t>Evidence: real optical detector + fail-closed decision contract · supervised factory pilot is the next gate.</a:t>
-            </a:r>
-          </a:p>
-        </p:txBody>
-      </p:sp>
-      <p:sp>
-        <p:nvSpPr>
-          <p:cNvPr id="22" name="TextBox 21"/>
+              <a:rPr sz="1100" b="1">
+                <a:solidFill>
+                  <a:srgbClr val="5C6775"/>
+                </a:solidFill>
+                <a:latin typeface="Calibri"/>
+              </a:rPr>
+              <a:t>TRACK</a:t>
+            </a:r>
+          </a:p>
+        </p:txBody>
+      </p:sp>
+      <p:sp>
+        <p:nvSpPr>
+          <p:cNvPr id="21" name="TextBox 20"/>
           <p:cNvSpPr txBox="1"/>
           <p:nvPr/>
         </p:nvSpPr>
         <p:spPr>
           <a:xfrm>
-            <a:off x="411480" y="6510528"/>
-            <a:ext cx="7772400" cy="256032"/>
+            <a:off x="640080" y="5120639"/>
+            <a:ext cx="5120640" cy="365760"/>
           </a:xfrm>
           <a:prstGeom prst="rect">
             <a:avLst/>
@@ -3939,27 +3923,115 @@
               </a:spcAft>
             </a:pPr>
             <a:r>
-              <a:rPr sz="1100" b="0">
-                <a:solidFill>
-                  <a:srgbClr val="8C9BAE"/>
-                </a:solidFill>
-                <a:latin typeface="Calibri"/>
-              </a:rPr>
-              <a:t>Team 71  ·  Trịnh Hoàng Tú  ·  HUFLIT  ·  Track 4</a:t>
-            </a:r>
-          </a:p>
-        </p:txBody>
-      </p:sp>
-      <p:sp>
-        <p:nvSpPr>
-          <p:cNvPr id="23" name="TextBox 22"/>
+              <a:rPr sz="1600" b="1">
+                <a:solidFill>
+                  <a:srgbClr val="1A1F2B"/>
+                </a:solidFill>
+                <a:latin typeface="Calibri"/>
+              </a:rPr>
+              <a:t>4  ·  AI + Materials Testing and Characterization</a:t>
+            </a:r>
+          </a:p>
+        </p:txBody>
+      </p:sp>
+      <p:sp>
+        <p:nvSpPr>
+          <p:cNvPr id="22" name="Rectangle 21"/>
+          <p:cNvSpPr/>
+          <p:nvPr/>
+        </p:nvSpPr>
+        <p:spPr>
+          <a:xfrm>
+            <a:off x="6172200" y="4754879"/>
+            <a:ext cx="5532120" cy="868680"/>
+          </a:xfrm>
+          <a:prstGeom prst="rect">
+            <a:avLst/>
+          </a:prstGeom>
+          <a:solidFill>
+            <a:srgbClr val="F4F7FB"/>
+          </a:solidFill>
+          <a:ln w="6350">
+            <a:solidFill>
+              <a:srgbClr val="D5DCE6"/>
+            </a:solidFill>
+          </a:ln>
+        </p:spPr>
+        <p:style>
+          <a:lnRef idx="1">
+            <a:schemeClr val="accent1"/>
+          </a:lnRef>
+          <a:fillRef idx="3">
+            <a:schemeClr val="accent1"/>
+          </a:fillRef>
+          <a:effectRef idx="2">
+            <a:schemeClr val="accent1"/>
+          </a:effectRef>
+          <a:fontRef idx="minor">
+            <a:schemeClr val="lt1"/>
+          </a:fontRef>
+        </p:style>
+        <p:txBody>
+          <a:bodyPr rtlCol="0" anchor="ctr"/>
+          <a:lstStyle/>
+          <a:p>
+            <a:pPr algn="ctr"/>
+          </a:p>
+        </p:txBody>
+      </p:sp>
+      <p:sp>
+        <p:nvSpPr>
+          <p:cNvPr id="23" name="Rectangle 22"/>
+          <p:cNvSpPr/>
+          <p:nvPr/>
+        </p:nvSpPr>
+        <p:spPr>
+          <a:xfrm>
+            <a:off x="6172200" y="4754879"/>
+            <a:ext cx="73152" cy="868680"/>
+          </a:xfrm>
+          <a:prstGeom prst="rect">
+            <a:avLst/>
+          </a:prstGeom>
+          <a:solidFill>
+            <a:srgbClr val="1F5EB8"/>
+          </a:solidFill>
+          <a:ln>
+            <a:noFill/>
+          </a:ln>
+        </p:spPr>
+        <p:style>
+          <a:lnRef idx="1">
+            <a:schemeClr val="accent1"/>
+          </a:lnRef>
+          <a:fillRef idx="3">
+            <a:schemeClr val="accent1"/>
+          </a:fillRef>
+          <a:effectRef idx="2">
+            <a:schemeClr val="accent1"/>
+          </a:effectRef>
+          <a:fontRef idx="minor">
+            <a:schemeClr val="lt1"/>
+          </a:fontRef>
+        </p:style>
+        <p:txBody>
+          <a:bodyPr rtlCol="0" anchor="ctr"/>
+          <a:lstStyle/>
+          <a:p>
+            <a:pPr algn="ctr"/>
+          </a:p>
+        </p:txBody>
+      </p:sp>
+      <p:sp>
+        <p:nvSpPr>
+          <p:cNvPr id="24" name="TextBox 23"/>
           <p:cNvSpPr txBox="1"/>
           <p:nvPr/>
         </p:nvSpPr>
         <p:spPr>
           <a:xfrm>
-            <a:off x="9692640" y="6510528"/>
-            <a:ext cx="2011680" cy="256032"/>
+            <a:off x="6400800" y="4846319"/>
+            <a:ext cx="5120640" cy="228600"/>
           </a:xfrm>
           <a:prstGeom prst="rect">
             <a:avLst/>
@@ -3972,6 +4044,162 @@
           </a:bodyPr>
           <a:lstStyle/>
           <a:p>
+            <a:pPr algn="l">
+              <a:spcAft>
+                <a:spcPts val="600"/>
+              </a:spcAft>
+            </a:pPr>
+            <a:r>
+              <a:rPr sz="1100" b="1">
+                <a:solidFill>
+                  <a:srgbClr val="5C6775"/>
+                </a:solidFill>
+                <a:latin typeface="Calibri"/>
+              </a:rPr>
+              <a:t>ADVISOR</a:t>
+            </a:r>
+          </a:p>
+        </p:txBody>
+      </p:sp>
+      <p:sp>
+        <p:nvSpPr>
+          <p:cNvPr id="25" name="TextBox 24"/>
+          <p:cNvSpPr txBox="1"/>
+          <p:nvPr/>
+        </p:nvSpPr>
+        <p:spPr>
+          <a:xfrm>
+            <a:off x="6400800" y="5120639"/>
+            <a:ext cx="5120640" cy="365760"/>
+          </a:xfrm>
+          <a:prstGeom prst="rect">
+            <a:avLst/>
+          </a:prstGeom>
+          <a:noFill/>
+        </p:spPr>
+        <p:txBody>
+          <a:bodyPr wrap="square">
+            <a:spAutoFit/>
+          </a:bodyPr>
+          <a:lstStyle/>
+          <a:p>
+            <a:pPr algn="l">
+              <a:spcAft>
+                <a:spcPts val="600"/>
+              </a:spcAft>
+            </a:pPr>
+            <a:r>
+              <a:rPr sz="1600" b="1">
+                <a:solidFill>
+                  <a:srgbClr val="1A1F2B"/>
+                </a:solidFill>
+                <a:latin typeface="Calibri"/>
+              </a:rPr>
+              <a:t>Prof. Kris Singh  ·  SRII / Tsinghua (visiting)</a:t>
+            </a:r>
+          </a:p>
+        </p:txBody>
+      </p:sp>
+      <p:sp>
+        <p:nvSpPr>
+          <p:cNvPr id="26" name="TextBox 25"/>
+          <p:cNvSpPr txBox="1"/>
+          <p:nvPr/>
+        </p:nvSpPr>
+        <p:spPr>
+          <a:xfrm>
+            <a:off x="411480" y="5852160"/>
+            <a:ext cx="11338560" cy="457200"/>
+          </a:xfrm>
+          <a:prstGeom prst="rect">
+            <a:avLst/>
+          </a:prstGeom>
+          <a:noFill/>
+        </p:spPr>
+        <p:txBody>
+          <a:bodyPr wrap="square">
+            <a:spAutoFit/>
+          </a:bodyPr>
+          <a:lstStyle/>
+          <a:p>
+            <a:pPr algn="l">
+              <a:spcAft>
+                <a:spcPts val="600"/>
+              </a:spcAft>
+            </a:pPr>
+            <a:r>
+              <a:rPr sz="1400" b="0">
+                <a:solidFill>
+                  <a:srgbClr val="5C6775"/>
+                </a:solidFill>
+                <a:latin typeface="Calibri"/>
+              </a:rPr>
+              <a:t>Decision objective: prove a defensible inline inspection architecture. Supervised factory pilot is the next gate.</a:t>
+            </a:r>
+          </a:p>
+        </p:txBody>
+      </p:sp>
+      <p:sp>
+        <p:nvSpPr>
+          <p:cNvPr id="27" name="TextBox 26"/>
+          <p:cNvSpPr txBox="1"/>
+          <p:nvPr/>
+        </p:nvSpPr>
+        <p:spPr>
+          <a:xfrm>
+            <a:off x="411480" y="6510528"/>
+            <a:ext cx="7772400" cy="256032"/>
+          </a:xfrm>
+          <a:prstGeom prst="rect">
+            <a:avLst/>
+          </a:prstGeom>
+          <a:noFill/>
+        </p:spPr>
+        <p:txBody>
+          <a:bodyPr wrap="square">
+            <a:spAutoFit/>
+          </a:bodyPr>
+          <a:lstStyle/>
+          <a:p>
+            <a:pPr algn="l">
+              <a:spcAft>
+                <a:spcPts val="600"/>
+              </a:spcAft>
+            </a:pPr>
+            <a:r>
+              <a:rPr sz="1100" b="0">
+                <a:solidFill>
+                  <a:srgbClr val="5C6775"/>
+                </a:solidFill>
+                <a:latin typeface="Calibri"/>
+              </a:rPr>
+              <a:t>Team 71  ·  Trịnh Hoàng Tú  ·  HUFLIT  ·  Track 4</a:t>
+            </a:r>
+          </a:p>
+        </p:txBody>
+      </p:sp>
+      <p:sp>
+        <p:nvSpPr>
+          <p:cNvPr id="28" name="TextBox 27"/>
+          <p:cNvSpPr txBox="1"/>
+          <p:nvPr/>
+        </p:nvSpPr>
+        <p:spPr>
+          <a:xfrm>
+            <a:off x="9692640" y="6510528"/>
+            <a:ext cx="2011680" cy="256032"/>
+          </a:xfrm>
+          <a:prstGeom prst="rect">
+            <a:avLst/>
+          </a:prstGeom>
+          <a:noFill/>
+        </p:spPr>
+        <p:txBody>
+          <a:bodyPr wrap="square">
+            <a:spAutoFit/>
+          </a:bodyPr>
+          <a:lstStyle/>
+          <a:p>
             <a:pPr algn="r">
               <a:spcAft>
                 <a:spcPts val="600"/>
@@ -3980,7 +4208,7 @@
             <a:r>
               <a:rPr sz="1100" b="1">
                 <a:solidFill>
-                  <a:srgbClr val="8C9BAE"/>
+                  <a:srgbClr val="5C6775"/>
                 </a:solidFill>
                 <a:latin typeface="Calibri"/>
               </a:rPr>
@@ -4022,7 +4250,7 @@
             <a:avLst/>
           </a:prstGeom>
           <a:solidFill>
-            <a:srgbClr val="0A0D14"/>
+            <a:srgbClr val="FFFFFF"/>
           </a:solidFill>
           <a:ln>
             <a:noFill/>
@@ -4058,14 +4286,14 @@
         </p:nvSpPr>
         <p:spPr>
           <a:xfrm>
-            <a:off x="0" y="0"/>
-            <a:ext cx="109728" cy="6858000"/>
+            <a:off x="0" y="6446520"/>
+            <a:ext cx="12191695" cy="12700"/>
           </a:xfrm>
           <a:prstGeom prst="rect">
             <a:avLst/>
           </a:prstGeom>
           <a:solidFill>
-            <a:srgbClr val="00E5FF"/>
+            <a:srgbClr val="D5DCE6"/>
           </a:solidFill>
           <a:ln>
             <a:noFill/>
@@ -4095,23 +4323,174 @@
       </p:sp>
       <p:sp>
         <p:nvSpPr>
-          <p:cNvPr id="4" name="Rectangle 3"/>
+          <p:cNvPr id="4" name="TextBox 3"/>
+          <p:cNvSpPr txBox="1"/>
+          <p:nvPr/>
+        </p:nvSpPr>
+        <p:spPr>
+          <a:xfrm>
+            <a:off x="411480" y="201168"/>
+            <a:ext cx="11338560" cy="292608"/>
+          </a:xfrm>
+          <a:prstGeom prst="rect">
+            <a:avLst/>
+          </a:prstGeom>
+          <a:noFill/>
+        </p:spPr>
+        <p:txBody>
+          <a:bodyPr wrap="square">
+            <a:spAutoFit/>
+          </a:bodyPr>
+          <a:lstStyle/>
+          <a:p>
+            <a:pPr algn="l">
+              <a:spcAft>
+                <a:spcPts val="600"/>
+              </a:spcAft>
+            </a:pPr>
+            <a:r>
+              <a:rPr sz="1200" b="1">
+                <a:solidFill>
+                  <a:srgbClr val="1F5EB8"/>
+                </a:solidFill>
+                <a:latin typeface="Calibri"/>
+              </a:rPr>
+              <a:t>02    |    0:35–1:15</a:t>
+            </a:r>
+          </a:p>
+        </p:txBody>
+      </p:sp>
+      <p:sp>
+        <p:nvSpPr>
+          <p:cNvPr id="5" name="TextBox 4"/>
+          <p:cNvSpPr txBox="1"/>
+          <p:nvPr/>
+        </p:nvSpPr>
+        <p:spPr>
+          <a:xfrm>
+            <a:off x="411480" y="457200"/>
+            <a:ext cx="6766560" cy="1005840"/>
+          </a:xfrm>
+          <a:prstGeom prst="rect">
+            <a:avLst/>
+          </a:prstGeom>
+          <a:noFill/>
+        </p:spPr>
+        <p:txBody>
+          <a:bodyPr wrap="square">
+            <a:spAutoFit/>
+          </a:bodyPr>
+          <a:lstStyle/>
+          <a:p>
+            <a:pPr algn="l">
+              <a:spcAft>
+                <a:spcPts val="600"/>
+              </a:spcAft>
+            </a:pPr>
+            <a:r>
+              <a:rPr sz="2800" b="1">
+                <a:solidFill>
+                  <a:srgbClr val="1A1F2B"/>
+                </a:solidFill>
+                <a:latin typeface="Calibri"/>
+              </a:rPr>
+              <a:t>The defect is tiny. An automatic PASS is not.</a:t>
+            </a:r>
+          </a:p>
+        </p:txBody>
+      </p:sp>
+      <p:sp>
+        <p:nvSpPr>
+          <p:cNvPr id="6" name="TextBox 5"/>
+          <p:cNvSpPr txBox="1"/>
+          <p:nvPr/>
+        </p:nvSpPr>
+        <p:spPr>
+          <a:xfrm>
+            <a:off x="411480" y="1554480"/>
+            <a:ext cx="6766560" cy="2194560"/>
+          </a:xfrm>
+          <a:prstGeom prst="rect">
+            <a:avLst/>
+          </a:prstGeom>
+          <a:noFill/>
+        </p:spPr>
+        <p:txBody>
+          <a:bodyPr wrap="square">
+            <a:spAutoFit/>
+          </a:bodyPr>
+          <a:lstStyle/>
+          <a:p>
+            <a:pPr algn="l">
+              <a:spcAft>
+                <a:spcPts val="1000"/>
+              </a:spcAft>
+            </a:pPr>
+            <a:r>
+              <a:rPr sz="1800" b="0">
+                <a:solidFill>
+                  <a:srgbClr val="1A1F2B"/>
+                </a:solidFill>
+                <a:latin typeface="Calibri"/>
+              </a:rPr>
+              <a:t>Electrode coating defects become scrap, rework, or untraceable cell risk.</a:t>
+            </a:r>
+          </a:p>
+          <a:p>
+            <a:pPr algn="l">
+              <a:spcAft>
+                <a:spcPts val="1000"/>
+              </a:spcAft>
+            </a:pPr>
+            <a:r>
+              <a:rPr sz="1600" b="0">
+                <a:solidFill>
+                  <a:srgbClr val="5C6775"/>
+                </a:solidFill>
+                <a:latin typeface="Calibri"/>
+              </a:rPr>
+              <a:t>A detector that ranks anomalies well can still be unsafe to act on if sensors disagree, calibration is unverified, or the PLC does not acknowledge.</a:t>
+            </a:r>
+          </a:p>
+          <a:p>
+            <a:pPr algn="l">
+              <a:spcAft>
+                <a:spcPts val="600"/>
+              </a:spcAft>
+            </a:pPr>
+            <a:r>
+              <a:rPr sz="1600" b="1">
+                <a:solidFill>
+                  <a:srgbClr val="1F5EB8"/>
+                </a:solidFill>
+                <a:latin typeface="Calibri"/>
+              </a:rPr>
+              <a:t>Academic detection answers how to detect. A factory needs when a detection is safe enough to act on.</a:t>
+            </a:r>
+          </a:p>
+        </p:txBody>
+      </p:sp>
+      <p:sp>
+        <p:nvSpPr>
+          <p:cNvPr id="7" name="Rectangle 6"/>
           <p:cNvSpPr/>
           <p:nvPr/>
         </p:nvSpPr>
         <p:spPr>
           <a:xfrm>
-            <a:off x="0" y="6446520"/>
-            <a:ext cx="12191695" cy="411480"/>
+            <a:off x="411480" y="3931920"/>
+            <a:ext cx="6766560" cy="2194560"/>
           </a:xfrm>
           <a:prstGeom prst="rect">
             <a:avLst/>
           </a:prstGeom>
           <a:solidFill>
-            <a:srgbClr val="080B12"/>
+            <a:srgbClr val="F4F7FB"/>
           </a:solidFill>
-          <a:ln>
-            <a:noFill/>
+          <a:ln w="6350">
+            <a:solidFill>
+              <a:srgbClr val="D5DCE6"/>
+            </a:solidFill>
           </a:ln>
         </p:spPr>
         <p:style>
@@ -4138,155 +4517,6 @@
       </p:sp>
       <p:sp>
         <p:nvSpPr>
-          <p:cNvPr id="5" name="TextBox 4"/>
-          <p:cNvSpPr txBox="1"/>
-          <p:nvPr/>
-        </p:nvSpPr>
-        <p:spPr>
-          <a:xfrm>
-            <a:off x="411480" y="201168"/>
-            <a:ext cx="11338560" cy="292608"/>
-          </a:xfrm>
-          <a:prstGeom prst="rect">
-            <a:avLst/>
-          </a:prstGeom>
-          <a:noFill/>
-        </p:spPr>
-        <p:txBody>
-          <a:bodyPr wrap="square">
-            <a:spAutoFit/>
-          </a:bodyPr>
-          <a:lstStyle/>
-          <a:p>
-            <a:pPr algn="l">
-              <a:spcAft>
-                <a:spcPts val="600"/>
-              </a:spcAft>
-            </a:pPr>
-            <a:r>
-              <a:rPr sz="1200" b="1">
-                <a:solidFill>
-                  <a:srgbClr val="00E5FF"/>
-                </a:solidFill>
-                <a:latin typeface="Calibri"/>
-              </a:rPr>
-              <a:t>02    0:35–1:15</a:t>
-            </a:r>
-          </a:p>
-        </p:txBody>
-      </p:sp>
-      <p:sp>
-        <p:nvSpPr>
-          <p:cNvPr id="6" name="TextBox 5"/>
-          <p:cNvSpPr txBox="1"/>
-          <p:nvPr/>
-        </p:nvSpPr>
-        <p:spPr>
-          <a:xfrm>
-            <a:off x="411480" y="457200"/>
-            <a:ext cx="6766560" cy="1005840"/>
-          </a:xfrm>
-          <a:prstGeom prst="rect">
-            <a:avLst/>
-          </a:prstGeom>
-          <a:noFill/>
-        </p:spPr>
-        <p:txBody>
-          <a:bodyPr wrap="square">
-            <a:spAutoFit/>
-          </a:bodyPr>
-          <a:lstStyle/>
-          <a:p>
-            <a:pPr algn="l">
-              <a:spcAft>
-                <a:spcPts val="600"/>
-              </a:spcAft>
-            </a:pPr>
-            <a:r>
-              <a:rPr sz="2800" b="1">
-                <a:solidFill>
-                  <a:srgbClr val="FFFFFF"/>
-                </a:solidFill>
-                <a:latin typeface="Calibri"/>
-              </a:rPr>
-              <a:t>The defect is tiny. An automatic PASS is not.</a:t>
-            </a:r>
-          </a:p>
-        </p:txBody>
-      </p:sp>
-      <p:sp>
-        <p:nvSpPr>
-          <p:cNvPr id="7" name="TextBox 6"/>
-          <p:cNvSpPr txBox="1"/>
-          <p:nvPr/>
-        </p:nvSpPr>
-        <p:spPr>
-          <a:xfrm>
-            <a:off x="411480" y="1554480"/>
-            <a:ext cx="6766560" cy="2194560"/>
-          </a:xfrm>
-          <a:prstGeom prst="rect">
-            <a:avLst/>
-          </a:prstGeom>
-          <a:noFill/>
-        </p:spPr>
-        <p:txBody>
-          <a:bodyPr wrap="square">
-            <a:spAutoFit/>
-          </a:bodyPr>
-          <a:lstStyle/>
-          <a:p>
-            <a:pPr algn="l">
-              <a:spcAft>
-                <a:spcPts val="1000"/>
-              </a:spcAft>
-            </a:pPr>
-            <a:r>
-              <a:rPr sz="1800" b="0">
-                <a:solidFill>
-                  <a:srgbClr val="FFFFFF"/>
-                </a:solidFill>
-                <a:latin typeface="Calibri"/>
-              </a:rPr>
-              <a:t>Electrode coating defects become scrap, rework, or untraceable cell risk.</a:t>
-            </a:r>
-          </a:p>
-          <a:p>
-            <a:pPr algn="l">
-              <a:spcAft>
-                <a:spcPts val="1000"/>
-              </a:spcAft>
-            </a:pPr>
-            <a:r>
-              <a:rPr sz="1600" b="0">
-                <a:solidFill>
-                  <a:srgbClr val="8C9BAE"/>
-                </a:solidFill>
-                <a:latin typeface="Calibri"/>
-              </a:rPr>
-              <a:t>A detector that ranks anomalies well can still be unsafe to act on if sensors disagree, calibration is unverified, or the PLC does not acknowledge.</a:t>
-            </a:r>
-          </a:p>
-          <a:p>
-            <a:pPr algn="l">
-              <a:spcAft>
-                <a:spcPts val="600"/>
-              </a:spcAft>
-            </a:pPr>
-            <a:r>
-              <a:rPr sz="1600" b="1">
-                <a:solidFill>
-                  <a:srgbClr val="00E5FF"/>
-                </a:solidFill>
-                <a:latin typeface="Calibri"/>
-              </a:rPr>
-              <a:t>Academic detection answers how to detect. A factory needs when a detection is safe enough to act on.</a:t>
-            </a:r>
-          </a:p>
-        </p:txBody>
-      </p:sp>
-      <p:sp>
-        <p:nvSpPr>
           <p:cNvPr id="8" name="Rectangle 7"/>
           <p:cNvSpPr/>
           <p:nvPr/>
@@ -4294,18 +4524,16 @@
         <p:spPr>
           <a:xfrm>
             <a:off x="411480" y="3931920"/>
-            <a:ext cx="6766560" cy="2194560"/>
+            <a:ext cx="73152" cy="2194560"/>
           </a:xfrm>
           <a:prstGeom prst="rect">
             <a:avLst/>
           </a:prstGeom>
           <a:solidFill>
-            <a:srgbClr val="151B28"/>
+            <a:srgbClr val="1F5EB8"/>
           </a:solidFill>
-          <a:ln w="6350">
-            <a:solidFill>
-              <a:srgbClr val="222C3E"/>
-            </a:solidFill>
+          <a:ln>
+            <a:noFill/>
           </a:ln>
         </p:spPr>
         <p:style>
@@ -4360,7 +4588,7 @@
             <a:r>
               <a:rPr sz="1200" b="1">
                 <a:solidFill>
-                  <a:srgbClr val="FF1744"/>
+                  <a:srgbClr val="C8102E"/>
                 </a:solidFill>
                 <a:latin typeface="Calibri"/>
               </a:rPr>
@@ -4376,7 +4604,7 @@
             <a:r>
               <a:rPr sz="1800" b="1">
                 <a:solidFill>
-                  <a:srgbClr val="FFFFFF"/>
+                  <a:srgbClr val="1A1F2B"/>
                 </a:solidFill>
                 <a:latin typeface="Calibri"/>
               </a:rPr>
@@ -4392,7 +4620,7 @@
             <a:r>
               <a:rPr sz="1400" b="0">
                 <a:solidFill>
-                  <a:srgbClr val="8C9BAE"/>
+                  <a:srgbClr val="5C6775"/>
                 </a:solidFill>
                 <a:latin typeface="Calibri"/>
               </a:rPr>
@@ -4416,11 +4644,11 @@
             <a:avLst/>
           </a:prstGeom>
           <a:solidFill>
-            <a:srgbClr val="151B28"/>
+            <a:srgbClr val="F4F7FB"/>
           </a:solidFill>
           <a:ln w="6350">
             <a:solidFill>
-              <a:srgbClr val="222C3E"/>
+              <a:srgbClr val="D5DCE6"/>
             </a:solidFill>
           </a:ln>
         </p:spPr>
@@ -4500,7 +4728,7 @@
             <a:r>
               <a:rPr sz="1200" b="0">
                 <a:solidFill>
-                  <a:srgbClr val="8C9BAE"/>
+                  <a:srgbClr val="5C6775"/>
                 </a:solidFill>
                 <a:latin typeface="Calibri"/>
               </a:rPr>
@@ -4539,7 +4767,7 @@
             <a:r>
               <a:rPr sz="1100" b="0">
                 <a:solidFill>
-                  <a:srgbClr val="8C9BAE"/>
+                  <a:srgbClr val="5C6775"/>
                 </a:solidFill>
                 <a:latin typeface="Calibri"/>
               </a:rPr>
@@ -4578,7 +4806,7 @@
             <a:r>
               <a:rPr sz="1100" b="1">
                 <a:solidFill>
-                  <a:srgbClr val="8C9BAE"/>
+                  <a:srgbClr val="5C6775"/>
                 </a:solidFill>
                 <a:latin typeface="Calibri"/>
               </a:rPr>
@@ -4620,7 +4848,7 @@
             <a:avLst/>
           </a:prstGeom>
           <a:solidFill>
-            <a:srgbClr val="0A0D14"/>
+            <a:srgbClr val="FFFFFF"/>
           </a:solidFill>
           <a:ln>
             <a:noFill/>
@@ -4656,14 +4884,14 @@
         </p:nvSpPr>
         <p:spPr>
           <a:xfrm>
-            <a:off x="0" y="0"/>
-            <a:ext cx="109728" cy="6858000"/>
+            <a:off x="0" y="6446520"/>
+            <a:ext cx="12191695" cy="12700"/>
           </a:xfrm>
           <a:prstGeom prst="rect">
             <a:avLst/>
           </a:prstGeom>
           <a:solidFill>
-            <a:srgbClr val="00E5FF"/>
+            <a:srgbClr val="D5DCE6"/>
           </a:solidFill>
           <a:ln>
             <a:noFill/>
@@ -4693,23 +4921,103 @@
       </p:sp>
       <p:sp>
         <p:nvSpPr>
-          <p:cNvPr id="4" name="Rectangle 3"/>
+          <p:cNvPr id="4" name="TextBox 3"/>
+          <p:cNvSpPr txBox="1"/>
+          <p:nvPr/>
+        </p:nvSpPr>
+        <p:spPr>
+          <a:xfrm>
+            <a:off x="411480" y="201168"/>
+            <a:ext cx="11338560" cy="292608"/>
+          </a:xfrm>
+          <a:prstGeom prst="rect">
+            <a:avLst/>
+          </a:prstGeom>
+          <a:noFill/>
+        </p:spPr>
+        <p:txBody>
+          <a:bodyPr wrap="square">
+            <a:spAutoFit/>
+          </a:bodyPr>
+          <a:lstStyle/>
+          <a:p>
+            <a:pPr algn="l">
+              <a:spcAft>
+                <a:spcPts val="600"/>
+              </a:spcAft>
+            </a:pPr>
+            <a:r>
+              <a:rPr sz="1200" b="1">
+                <a:solidFill>
+                  <a:srgbClr val="1F5EB8"/>
+                </a:solidFill>
+                <a:latin typeface="Calibri"/>
+              </a:rPr>
+              <a:t>03    |    1:15–2:00</a:t>
+            </a:r>
+          </a:p>
+        </p:txBody>
+      </p:sp>
+      <p:sp>
+        <p:nvSpPr>
+          <p:cNvPr id="5" name="TextBox 4"/>
+          <p:cNvSpPr txBox="1"/>
+          <p:nvPr/>
+        </p:nvSpPr>
+        <p:spPr>
+          <a:xfrm>
+            <a:off x="411480" y="457200"/>
+            <a:ext cx="11338560" cy="640080"/>
+          </a:xfrm>
+          <a:prstGeom prst="rect">
+            <a:avLst/>
+          </a:prstGeom>
+          <a:noFill/>
+        </p:spPr>
+        <p:txBody>
+          <a:bodyPr wrap="square">
+            <a:spAutoFit/>
+          </a:bodyPr>
+          <a:lstStyle/>
+          <a:p>
+            <a:pPr algn="l">
+              <a:spcAft>
+                <a:spcPts val="600"/>
+              </a:spcAft>
+            </a:pPr>
+            <a:r>
+              <a:rPr sz="2800" b="1">
+                <a:solidFill>
+                  <a:srgbClr val="1A1F2B"/>
+                </a:solidFill>
+                <a:latin typeface="Calibri"/>
+              </a:rPr>
+              <a:t>Two evidence lanes. One fail-closed contract.</a:t>
+            </a:r>
+          </a:p>
+        </p:txBody>
+      </p:sp>
+      <p:sp>
+        <p:nvSpPr>
+          <p:cNvPr id="6" name="Rectangle 5"/>
           <p:cNvSpPr/>
           <p:nvPr/>
         </p:nvSpPr>
         <p:spPr>
           <a:xfrm>
-            <a:off x="0" y="6446520"/>
-            <a:ext cx="12191695" cy="411480"/>
+            <a:off x="411480" y="1280160"/>
+            <a:ext cx="5532120" cy="4846320"/>
           </a:xfrm>
           <a:prstGeom prst="rect">
             <a:avLst/>
           </a:prstGeom>
           <a:solidFill>
-            <a:srgbClr val="080B12"/>
+            <a:srgbClr val="F4F7FB"/>
           </a:solidFill>
-          <a:ln>
-            <a:noFill/>
+          <a:ln w="6350">
+            <a:solidFill>
+              <a:srgbClr val="D5DCE6"/>
+            </a:solidFill>
           </a:ln>
         </p:spPr>
         <p:style>
@@ -4736,84 +5044,6 @@
       </p:sp>
       <p:sp>
         <p:nvSpPr>
-          <p:cNvPr id="5" name="TextBox 4"/>
-          <p:cNvSpPr txBox="1"/>
-          <p:nvPr/>
-        </p:nvSpPr>
-        <p:spPr>
-          <a:xfrm>
-            <a:off x="411480" y="201168"/>
-            <a:ext cx="11338560" cy="292608"/>
-          </a:xfrm>
-          <a:prstGeom prst="rect">
-            <a:avLst/>
-          </a:prstGeom>
-          <a:noFill/>
-        </p:spPr>
-        <p:txBody>
-          <a:bodyPr wrap="square">
-            <a:spAutoFit/>
-          </a:bodyPr>
-          <a:lstStyle/>
-          <a:p>
-            <a:pPr algn="l">
-              <a:spcAft>
-                <a:spcPts val="600"/>
-              </a:spcAft>
-            </a:pPr>
-            <a:r>
-              <a:rPr sz="1200" b="1">
-                <a:solidFill>
-                  <a:srgbClr val="00E5FF"/>
-                </a:solidFill>
-                <a:latin typeface="Calibri"/>
-              </a:rPr>
-              <a:t>03    1:15–2:00</a:t>
-            </a:r>
-          </a:p>
-        </p:txBody>
-      </p:sp>
-      <p:sp>
-        <p:nvSpPr>
-          <p:cNvPr id="6" name="TextBox 5"/>
-          <p:cNvSpPr txBox="1"/>
-          <p:nvPr/>
-        </p:nvSpPr>
-        <p:spPr>
-          <a:xfrm>
-            <a:off x="411480" y="457200"/>
-            <a:ext cx="11338560" cy="640080"/>
-          </a:xfrm>
-          <a:prstGeom prst="rect">
-            <a:avLst/>
-          </a:prstGeom>
-          <a:noFill/>
-        </p:spPr>
-        <p:txBody>
-          <a:bodyPr wrap="square">
-            <a:spAutoFit/>
-          </a:bodyPr>
-          <a:lstStyle/>
-          <a:p>
-            <a:pPr algn="l">
-              <a:spcAft>
-                <a:spcPts val="600"/>
-              </a:spcAft>
-            </a:pPr>
-            <a:r>
-              <a:rPr sz="2800" b="1">
-                <a:solidFill>
-                  <a:srgbClr val="FFFFFF"/>
-                </a:solidFill>
-                <a:latin typeface="Calibri"/>
-              </a:rPr>
-              <a:t>Two evidence lanes. One fail-closed contract.</a:t>
-            </a:r>
-          </a:p>
-        </p:txBody>
-      </p:sp>
-      <p:sp>
-        <p:nvSpPr>
           <p:cNvPr id="7" name="Rectangle 6"/>
           <p:cNvSpPr/>
           <p:nvPr/>
@@ -4821,18 +5051,16 @@
         <p:spPr>
           <a:xfrm>
             <a:off x="411480" y="1280160"/>
-            <a:ext cx="5532120" cy="4846320"/>
+            <a:ext cx="73152" cy="4846320"/>
           </a:xfrm>
           <a:prstGeom prst="rect">
             <a:avLst/>
           </a:prstGeom>
           <a:solidFill>
-            <a:srgbClr val="151B28"/>
+            <a:srgbClr val="1F5EB8"/>
           </a:solidFill>
-          <a:ln w="6350">
-            <a:solidFill>
-              <a:srgbClr val="222C3E"/>
-            </a:solidFill>
+          <a:ln>
+            <a:noFill/>
           </a:ln>
         </p:spPr>
         <p:style>
@@ -4887,7 +5115,7 @@
             <a:r>
               <a:rPr sz="1200" b="1">
                 <a:solidFill>
-                  <a:srgbClr val="00E676"/>
+                  <a:srgbClr val="0F7B45"/>
                 </a:solidFill>
                 <a:latin typeface="Calibri"/>
               </a:rPr>
@@ -4903,7 +5131,7 @@
             <a:r>
               <a:rPr sz="2200" b="1">
                 <a:solidFill>
-                  <a:srgbClr val="FFFFFF"/>
+                  <a:srgbClr val="1A1F2B"/>
                 </a:solidFill>
                 <a:latin typeface="Calibri"/>
               </a:rPr>
@@ -4919,7 +5147,7 @@
             <a:r>
               <a:rPr sz="1500" b="0">
                 <a:solidFill>
-                  <a:srgbClr val="8C9BAE"/>
+                  <a:srgbClr val="5C6775"/>
                 </a:solidFill>
                 <a:latin typeface="Calibri"/>
               </a:rPr>
@@ -4935,7 +5163,7 @@
             <a:r>
               <a:rPr sz="1500" b="0">
                 <a:solidFill>
-                  <a:srgbClr val="FFD600"/>
+                  <a:srgbClr val="C47B00"/>
                 </a:solidFill>
                 <a:latin typeface="Calibri"/>
               </a:rPr>
@@ -4959,11 +5187,11 @@
             <a:avLst/>
           </a:prstGeom>
           <a:solidFill>
-            <a:srgbClr val="151B28"/>
+            <a:srgbClr val="F4F7FB"/>
           </a:solidFill>
           <a:ln w="6350">
             <a:solidFill>
-              <a:srgbClr val="222C3E"/>
+              <a:srgbClr val="D5DCE6"/>
             </a:solidFill>
           </a:ln>
         </p:spPr>
@@ -4991,7 +5219,50 @@
       </p:sp>
       <p:sp>
         <p:nvSpPr>
-          <p:cNvPr id="10" name="TextBox 9"/>
+          <p:cNvPr id="10" name="Rectangle 9"/>
+          <p:cNvSpPr/>
+          <p:nvPr/>
+        </p:nvSpPr>
+        <p:spPr>
+          <a:xfrm>
+            <a:off x="6217920" y="1280160"/>
+            <a:ext cx="73152" cy="4846320"/>
+          </a:xfrm>
+          <a:prstGeom prst="rect">
+            <a:avLst/>
+          </a:prstGeom>
+          <a:solidFill>
+            <a:srgbClr val="1F5EB8"/>
+          </a:solidFill>
+          <a:ln>
+            <a:noFill/>
+          </a:ln>
+        </p:spPr>
+        <p:style>
+          <a:lnRef idx="1">
+            <a:schemeClr val="accent1"/>
+          </a:lnRef>
+          <a:fillRef idx="3">
+            <a:schemeClr val="accent1"/>
+          </a:fillRef>
+          <a:effectRef idx="2">
+            <a:schemeClr val="accent1"/>
+          </a:effectRef>
+          <a:fontRef idx="minor">
+            <a:schemeClr val="lt1"/>
+          </a:fontRef>
+        </p:style>
+        <p:txBody>
+          <a:bodyPr rtlCol="0" anchor="ctr"/>
+          <a:lstStyle/>
+          <a:p>
+            <a:pPr algn="ctr"/>
+          </a:p>
+        </p:txBody>
+      </p:sp>
+      <p:sp>
+        <p:nvSpPr>
+          <p:cNvPr id="11" name="TextBox 10"/>
           <p:cNvSpPr txBox="1"/>
           <p:nvPr/>
         </p:nvSpPr>
@@ -5019,7 +5290,7 @@
             <a:r>
               <a:rPr sz="1200" b="1">
                 <a:solidFill>
-                  <a:srgbClr val="00E5FF"/>
+                  <a:srgbClr val="1F5EB8"/>
                 </a:solidFill>
                 <a:latin typeface="Calibri"/>
               </a:rPr>
@@ -5035,7 +5306,7 @@
             <a:r>
               <a:rPr sz="2200" b="1">
                 <a:solidFill>
-                  <a:srgbClr val="FFFFFF"/>
+                  <a:srgbClr val="1A1F2B"/>
                 </a:solidFill>
                 <a:latin typeface="Calibri"/>
               </a:rPr>
@@ -5051,7 +5322,7 @@
             <a:r>
               <a:rPr sz="1500" b="0">
                 <a:solidFill>
-                  <a:srgbClr val="8C9BAE"/>
+                  <a:srgbClr val="5C6775"/>
                 </a:solidFill>
                 <a:latin typeface="Calibri"/>
               </a:rPr>
@@ -5067,7 +5338,7 @@
             <a:r>
               <a:rPr sz="1500" b="0">
                 <a:solidFill>
-                  <a:srgbClr val="00E5FF"/>
+                  <a:srgbClr val="1F5EB8"/>
                 </a:solidFill>
                 <a:latin typeface="Calibri"/>
               </a:rPr>
@@ -5078,7 +5349,7 @@
       </p:sp>
       <p:sp>
         <p:nvSpPr>
-          <p:cNvPr id="11" name="TextBox 10"/>
+          <p:cNvPr id="12" name="TextBox 11"/>
           <p:cNvSpPr txBox="1"/>
           <p:nvPr/>
         </p:nvSpPr>
@@ -5106,7 +5377,7 @@
             <a:r>
               <a:rPr sz="1100" b="0">
                 <a:solidFill>
-                  <a:srgbClr val="8C9BAE"/>
+                  <a:srgbClr val="5C6775"/>
                 </a:solidFill>
                 <a:latin typeface="Calibri"/>
               </a:rPr>
@@ -5117,7 +5388,7 @@
       </p:sp>
       <p:sp>
         <p:nvSpPr>
-          <p:cNvPr id="12" name="TextBox 11"/>
+          <p:cNvPr id="13" name="TextBox 12"/>
           <p:cNvSpPr txBox="1"/>
           <p:nvPr/>
         </p:nvSpPr>
@@ -5145,7 +5416,7 @@
             <a:r>
               <a:rPr sz="1100" b="1">
                 <a:solidFill>
-                  <a:srgbClr val="8C9BAE"/>
+                  <a:srgbClr val="5C6775"/>
                 </a:solidFill>
                 <a:latin typeface="Calibri"/>
               </a:rPr>
@@ -5187,7 +5458,7 @@
             <a:avLst/>
           </a:prstGeom>
           <a:solidFill>
-            <a:srgbClr val="0A0D14"/>
+            <a:srgbClr val="FFFFFF"/>
           </a:solidFill>
           <a:ln>
             <a:noFill/>
@@ -5223,14 +5494,14 @@
         </p:nvSpPr>
         <p:spPr>
           <a:xfrm>
-            <a:off x="0" y="0"/>
-            <a:ext cx="109728" cy="6858000"/>
+            <a:off x="0" y="6446520"/>
+            <a:ext cx="12191695" cy="12700"/>
           </a:xfrm>
           <a:prstGeom prst="rect">
             <a:avLst/>
           </a:prstGeom>
           <a:solidFill>
-            <a:srgbClr val="00E5FF"/>
+            <a:srgbClr val="D5DCE6"/>
           </a:solidFill>
           <a:ln>
             <a:noFill/>
@@ -5260,23 +5531,103 @@
       </p:sp>
       <p:sp>
         <p:nvSpPr>
-          <p:cNvPr id="4" name="Rectangle 3"/>
+          <p:cNvPr id="4" name="TextBox 3"/>
+          <p:cNvSpPr txBox="1"/>
+          <p:nvPr/>
+        </p:nvSpPr>
+        <p:spPr>
+          <a:xfrm>
+            <a:off x="411480" y="201168"/>
+            <a:ext cx="11338560" cy="292608"/>
+          </a:xfrm>
+          <a:prstGeom prst="rect">
+            <a:avLst/>
+          </a:prstGeom>
+          <a:noFill/>
+        </p:spPr>
+        <p:txBody>
+          <a:bodyPr wrap="square">
+            <a:spAutoFit/>
+          </a:bodyPr>
+          <a:lstStyle/>
+          <a:p>
+            <a:pPr algn="l">
+              <a:spcAft>
+                <a:spcPts val="600"/>
+              </a:spcAft>
+            </a:pPr>
+            <a:r>
+              <a:rPr sz="1200" b="1">
+                <a:solidFill>
+                  <a:srgbClr val="1F5EB8"/>
+                </a:solidFill>
+                <a:latin typeface="Calibri"/>
+              </a:rPr>
+              <a:t>04    |    2:00–2:45</a:t>
+            </a:r>
+          </a:p>
+        </p:txBody>
+      </p:sp>
+      <p:sp>
+        <p:nvSpPr>
+          <p:cNvPr id="5" name="TextBox 4"/>
+          <p:cNvSpPr txBox="1"/>
+          <p:nvPr/>
+        </p:nvSpPr>
+        <p:spPr>
+          <a:xfrm>
+            <a:off x="411480" y="457200"/>
+            <a:ext cx="11338560" cy="640080"/>
+          </a:xfrm>
+          <a:prstGeom prst="rect">
+            <a:avLst/>
+          </a:prstGeom>
+          <a:noFill/>
+        </p:spPr>
+        <p:txBody>
+          <a:bodyPr wrap="square">
+            <a:spAutoFit/>
+          </a:bodyPr>
+          <a:lstStyle/>
+          <a:p>
+            <a:pPr algn="l">
+              <a:spcAft>
+                <a:spcPts val="600"/>
+              </a:spcAft>
+            </a:pPr>
+            <a:r>
+              <a:rPr sz="2800" b="1">
+                <a:solidFill>
+                  <a:srgbClr val="1A1F2B"/>
+                </a:solidFill>
+                <a:latin typeface="Calibri"/>
+              </a:rPr>
+              <a:t>Model output cannot self-release the line.</a:t>
+            </a:r>
+          </a:p>
+        </p:txBody>
+      </p:sp>
+      <p:sp>
+        <p:nvSpPr>
+          <p:cNvPr id="6" name="Rectangle 5"/>
           <p:cNvSpPr/>
           <p:nvPr/>
         </p:nvSpPr>
         <p:spPr>
           <a:xfrm>
-            <a:off x="0" y="6446520"/>
-            <a:ext cx="12191695" cy="411480"/>
+            <a:off x="411480" y="1280160"/>
+            <a:ext cx="3657600" cy="2194560"/>
           </a:xfrm>
           <a:prstGeom prst="rect">
             <a:avLst/>
           </a:prstGeom>
           <a:solidFill>
-            <a:srgbClr val="080B12"/>
+            <a:srgbClr val="F4F7FB"/>
           </a:solidFill>
-          <a:ln>
-            <a:noFill/>
+          <a:ln w="6350">
+            <a:solidFill>
+              <a:srgbClr val="D5DCE6"/>
+            </a:solidFill>
           </a:ln>
         </p:spPr>
         <p:style>
@@ -5303,84 +5654,6 @@
       </p:sp>
       <p:sp>
         <p:nvSpPr>
-          <p:cNvPr id="5" name="TextBox 4"/>
-          <p:cNvSpPr txBox="1"/>
-          <p:nvPr/>
-        </p:nvSpPr>
-        <p:spPr>
-          <a:xfrm>
-            <a:off x="411480" y="201168"/>
-            <a:ext cx="11338560" cy="292608"/>
-          </a:xfrm>
-          <a:prstGeom prst="rect">
-            <a:avLst/>
-          </a:prstGeom>
-          <a:noFill/>
-        </p:spPr>
-        <p:txBody>
-          <a:bodyPr wrap="square">
-            <a:spAutoFit/>
-          </a:bodyPr>
-          <a:lstStyle/>
-          <a:p>
-            <a:pPr algn="l">
-              <a:spcAft>
-                <a:spcPts val="600"/>
-              </a:spcAft>
-            </a:pPr>
-            <a:r>
-              <a:rPr sz="1200" b="1">
-                <a:solidFill>
-                  <a:srgbClr val="00E5FF"/>
-                </a:solidFill>
-                <a:latin typeface="Calibri"/>
-              </a:rPr>
-              <a:t>04    2:00–2:45</a:t>
-            </a:r>
-          </a:p>
-        </p:txBody>
-      </p:sp>
-      <p:sp>
-        <p:nvSpPr>
-          <p:cNvPr id="6" name="TextBox 5"/>
-          <p:cNvSpPr txBox="1"/>
-          <p:nvPr/>
-        </p:nvSpPr>
-        <p:spPr>
-          <a:xfrm>
-            <a:off x="411480" y="457200"/>
-            <a:ext cx="11338560" cy="640080"/>
-          </a:xfrm>
-          <a:prstGeom prst="rect">
-            <a:avLst/>
-          </a:prstGeom>
-          <a:noFill/>
-        </p:spPr>
-        <p:txBody>
-          <a:bodyPr wrap="square">
-            <a:spAutoFit/>
-          </a:bodyPr>
-          <a:lstStyle/>
-          <a:p>
-            <a:pPr algn="l">
-              <a:spcAft>
-                <a:spcPts val="600"/>
-              </a:spcAft>
-            </a:pPr>
-            <a:r>
-              <a:rPr sz="2800" b="1">
-                <a:solidFill>
-                  <a:srgbClr val="FFFFFF"/>
-                </a:solidFill>
-                <a:latin typeface="Calibri"/>
-              </a:rPr>
-              <a:t>Model output cannot self-release the line.</a:t>
-            </a:r>
-          </a:p>
-        </p:txBody>
-      </p:sp>
-      <p:sp>
-        <p:nvSpPr>
           <p:cNvPr id="7" name="Rectangle 6"/>
           <p:cNvSpPr/>
           <p:nvPr/>
@@ -5388,18 +5661,16 @@
         <p:spPr>
           <a:xfrm>
             <a:off x="411480" y="1280160"/>
-            <a:ext cx="3657600" cy="2194560"/>
+            <a:ext cx="73152" cy="2194560"/>
           </a:xfrm>
           <a:prstGeom prst="rect">
             <a:avLst/>
           </a:prstGeom>
           <a:solidFill>
-            <a:srgbClr val="151B28"/>
+            <a:srgbClr val="1F5EB8"/>
           </a:solidFill>
-          <a:ln w="6350">
-            <a:solidFill>
-              <a:srgbClr val="222C3E"/>
-            </a:solidFill>
+          <a:ln>
+            <a:noFill/>
           </a:ln>
         </p:spPr>
         <p:style>
@@ -5454,7 +5725,7 @@
             <a:r>
               <a:rPr sz="2600" b="1">
                 <a:solidFill>
-                  <a:srgbClr val="00E676"/>
+                  <a:srgbClr val="0F7B45"/>
                 </a:solidFill>
                 <a:latin typeface="Calibri"/>
               </a:rPr>
@@ -5493,7 +5764,7 @@
             <a:r>
               <a:rPr sz="1500" b="0">
                 <a:solidFill>
-                  <a:srgbClr val="FFFFFF"/>
+                  <a:srgbClr val="1A1F2B"/>
                 </a:solidFill>
                 <a:latin typeface="Calibri"/>
               </a:rPr>
@@ -5517,11 +5788,11 @@
             <a:avLst/>
           </a:prstGeom>
           <a:solidFill>
-            <a:srgbClr val="151B28"/>
+            <a:srgbClr val="F4F7FB"/>
           </a:solidFill>
           <a:ln w="6350">
             <a:solidFill>
-              <a:srgbClr val="222C3E"/>
+              <a:srgbClr val="D5DCE6"/>
             </a:solidFill>
           </a:ln>
         </p:spPr>
@@ -5549,103 +5820,23 @@
       </p:sp>
       <p:sp>
         <p:nvSpPr>
-          <p:cNvPr id="11" name="TextBox 10"/>
-          <p:cNvSpPr txBox="1"/>
-          <p:nvPr/>
-        </p:nvSpPr>
-        <p:spPr>
-          <a:xfrm>
-            <a:off x="4434840" y="1417320"/>
-            <a:ext cx="3291840" cy="411480"/>
-          </a:xfrm>
-          <a:prstGeom prst="rect">
-            <a:avLst/>
-          </a:prstGeom>
-          <a:noFill/>
-        </p:spPr>
-        <p:txBody>
-          <a:bodyPr wrap="square">
-            <a:spAutoFit/>
-          </a:bodyPr>
-          <a:lstStyle/>
-          <a:p>
-            <a:pPr algn="l">
-              <a:spcAft>
-                <a:spcPts val="600"/>
-              </a:spcAft>
-            </a:pPr>
-            <a:r>
-              <a:rPr sz="2600" b="1">
-                <a:solidFill>
-                  <a:srgbClr val="FF1744"/>
-                </a:solidFill>
-                <a:latin typeface="Calibri"/>
-              </a:rPr>
-              <a:t>REJECT</a:t>
-            </a:r>
-          </a:p>
-        </p:txBody>
-      </p:sp>
-      <p:sp>
-        <p:nvSpPr>
-          <p:cNvPr id="12" name="TextBox 11"/>
-          <p:cNvSpPr txBox="1"/>
-          <p:nvPr/>
-        </p:nvSpPr>
-        <p:spPr>
-          <a:xfrm>
-            <a:off x="4434840" y="1965960"/>
-            <a:ext cx="3291840" cy="1280160"/>
-          </a:xfrm>
-          <a:prstGeom prst="rect">
-            <a:avLst/>
-          </a:prstGeom>
-          <a:noFill/>
-        </p:spPr>
-        <p:txBody>
-          <a:bodyPr wrap="square">
-            <a:spAutoFit/>
-          </a:bodyPr>
-          <a:lstStyle/>
-          <a:p>
-            <a:pPr algn="l">
-              <a:spcAft>
-                <a:spcPts val="600"/>
-              </a:spcAft>
-            </a:pPr>
-            <a:r>
-              <a:rPr sz="1500" b="0">
-                <a:solidFill>
-                  <a:srgbClr val="FFFFFF"/>
-                </a:solidFill>
-                <a:latin typeface="Calibri"/>
-              </a:rPr>
-              <a:t>Evidence supports a defect and the communication contract completes.</a:t>
-            </a:r>
-          </a:p>
-        </p:txBody>
-      </p:sp>
-      <p:sp>
-        <p:nvSpPr>
-          <p:cNvPr id="13" name="Rectangle 12"/>
+          <p:cNvPr id="11" name="Rectangle 10"/>
           <p:cNvSpPr/>
           <p:nvPr/>
         </p:nvSpPr>
         <p:spPr>
           <a:xfrm>
-            <a:off x="8092440" y="1280160"/>
-            <a:ext cx="3657600" cy="2194560"/>
+            <a:off x="4251960" y="1280160"/>
+            <a:ext cx="73152" cy="2194560"/>
           </a:xfrm>
           <a:prstGeom prst="rect">
             <a:avLst/>
           </a:prstGeom>
           <a:solidFill>
-            <a:srgbClr val="151B28"/>
+            <a:srgbClr val="1F5EB8"/>
           </a:solidFill>
-          <a:ln w="6350">
-            <a:solidFill>
-              <a:srgbClr val="222C3E"/>
-            </a:solidFill>
+          <a:ln>
+            <a:noFill/>
           </a:ln>
         </p:spPr>
         <p:style>
@@ -5672,13 +5863,13 @@
       </p:sp>
       <p:sp>
         <p:nvSpPr>
-          <p:cNvPr id="14" name="TextBox 13"/>
+          <p:cNvPr id="12" name="TextBox 11"/>
           <p:cNvSpPr txBox="1"/>
           <p:nvPr/>
         </p:nvSpPr>
         <p:spPr>
           <a:xfrm>
-            <a:off x="8275320" y="1417320"/>
+            <a:off x="4434840" y="1417320"/>
             <a:ext cx="3291840" cy="411480"/>
           </a:xfrm>
           <a:prstGeom prst="rect">
@@ -5700,24 +5891,24 @@
             <a:r>
               <a:rPr sz="2600" b="1">
                 <a:solidFill>
-                  <a:srgbClr val="FFD600"/>
-                </a:solidFill>
-                <a:latin typeface="Calibri"/>
-              </a:rPr>
-              <a:t>HOLD</a:t>
-            </a:r>
-          </a:p>
-        </p:txBody>
-      </p:sp>
-      <p:sp>
-        <p:nvSpPr>
-          <p:cNvPr id="15" name="TextBox 14"/>
+                  <a:srgbClr val="C8102E"/>
+                </a:solidFill>
+                <a:latin typeface="Calibri"/>
+              </a:rPr>
+              <a:t>REJECT</a:t>
+            </a:r>
+          </a:p>
+        </p:txBody>
+      </p:sp>
+      <p:sp>
+        <p:nvSpPr>
+          <p:cNvPr id="13" name="TextBox 12"/>
           <p:cNvSpPr txBox="1"/>
           <p:nvPr/>
         </p:nvSpPr>
         <p:spPr>
           <a:xfrm>
-            <a:off x="8275320" y="1965960"/>
+            <a:off x="4434840" y="1965960"/>
             <a:ext cx="3291840" cy="1280160"/>
           </a:xfrm>
           <a:prstGeom prst="rect">
@@ -5739,35 +5930,35 @@
             <a:r>
               <a:rPr sz="1500" b="0">
                 <a:solidFill>
-                  <a:srgbClr val="FFFFFF"/>
-                </a:solidFill>
-                <a:latin typeface="Calibri"/>
-              </a:rPr>
-              <a:t>Disagreement, stale/missing sensor, timeout, unverified calibration, DB fault, or unconfirmed PLC.</a:t>
-            </a:r>
-          </a:p>
-        </p:txBody>
-      </p:sp>
-      <p:sp>
-        <p:nvSpPr>
-          <p:cNvPr id="16" name="Rectangle 15"/>
+                  <a:srgbClr val="1A1F2B"/>
+                </a:solidFill>
+                <a:latin typeface="Calibri"/>
+              </a:rPr>
+              <a:t>Evidence supports a defect and the communication contract completes.</a:t>
+            </a:r>
+          </a:p>
+        </p:txBody>
+      </p:sp>
+      <p:sp>
+        <p:nvSpPr>
+          <p:cNvPr id="14" name="Rectangle 13"/>
           <p:cNvSpPr/>
           <p:nvPr/>
         </p:nvSpPr>
         <p:spPr>
           <a:xfrm>
-            <a:off x="411480" y="3703320"/>
-            <a:ext cx="11338560" cy="2423160"/>
+            <a:off x="8092440" y="1280160"/>
+            <a:ext cx="3657600" cy="2194560"/>
           </a:xfrm>
           <a:prstGeom prst="rect">
             <a:avLst/>
           </a:prstGeom>
           <a:solidFill>
-            <a:srgbClr val="151B28"/>
+            <a:srgbClr val="F4F7FB"/>
           </a:solidFill>
           <a:ln w="6350">
             <a:solidFill>
-              <a:srgbClr val="222C3E"/>
+              <a:srgbClr val="D5DCE6"/>
             </a:solidFill>
           </a:ln>
         </p:spPr>
@@ -5795,14 +5986,57 @@
       </p:sp>
       <p:sp>
         <p:nvSpPr>
-          <p:cNvPr id="17" name="TextBox 16"/>
+          <p:cNvPr id="15" name="Rectangle 14"/>
+          <p:cNvSpPr/>
+          <p:nvPr/>
+        </p:nvSpPr>
+        <p:spPr>
+          <a:xfrm>
+            <a:off x="8092440" y="1280160"/>
+            <a:ext cx="73152" cy="2194560"/>
+          </a:xfrm>
+          <a:prstGeom prst="rect">
+            <a:avLst/>
+          </a:prstGeom>
+          <a:solidFill>
+            <a:srgbClr val="1F5EB8"/>
+          </a:solidFill>
+          <a:ln>
+            <a:noFill/>
+          </a:ln>
+        </p:spPr>
+        <p:style>
+          <a:lnRef idx="1">
+            <a:schemeClr val="accent1"/>
+          </a:lnRef>
+          <a:fillRef idx="3">
+            <a:schemeClr val="accent1"/>
+          </a:fillRef>
+          <a:effectRef idx="2">
+            <a:schemeClr val="accent1"/>
+          </a:effectRef>
+          <a:fontRef idx="minor">
+            <a:schemeClr val="lt1"/>
+          </a:fontRef>
+        </p:style>
+        <p:txBody>
+          <a:bodyPr rtlCol="0" anchor="ctr"/>
+          <a:lstStyle/>
+          <a:p>
+            <a:pPr algn="ctr"/>
+          </a:p>
+        </p:txBody>
+      </p:sp>
+      <p:sp>
+        <p:nvSpPr>
+          <p:cNvPr id="16" name="TextBox 15"/>
           <p:cNvSpPr txBox="1"/>
           <p:nvPr/>
         </p:nvSpPr>
         <p:spPr>
           <a:xfrm>
-            <a:off x="640080" y="3840480"/>
-            <a:ext cx="10972800" cy="2103120"/>
+            <a:off x="8275320" y="1417320"/>
+            <a:ext cx="3291840" cy="411480"/>
           </a:xfrm>
           <a:prstGeom prst="rect">
             <a:avLst/>
@@ -5821,59 +6055,27 @@
               </a:spcAft>
             </a:pPr>
             <a:r>
-              <a:rPr sz="1200" b="1">
-                <a:solidFill>
-                  <a:srgbClr val="00E5FF"/>
-                </a:solidFill>
-                <a:latin typeface="Calibri"/>
-              </a:rPr>
-              <a:t>INDUSTRIAL MEANING</a:t>
-            </a:r>
-          </a:p>
-          <a:p>
-            <a:pPr algn="l">
-              <a:spcAft>
-                <a:spcPts val="1000"/>
-              </a:spcAft>
-            </a:pPr>
-            <a:r>
-              <a:rPr sz="2000" b="1">
-                <a:solidFill>
-                  <a:srgbClr val="FFFFFF"/>
-                </a:solidFill>
-                <a:latin typeface="Calibri"/>
-              </a:rPr>
-              <a:t>Uncertainty becomes a controlled operational state, not a hidden false-positive rate.</a:t>
-            </a:r>
-          </a:p>
-          <a:p>
-            <a:pPr algn="l">
-              <a:spcAft>
-                <a:spcPts val="600"/>
-              </a:spcAft>
-            </a:pPr>
-            <a:r>
-              <a:rPr sz="1500" b="0">
-                <a:solidFill>
-                  <a:srgbClr val="8C9BAE"/>
-                </a:solidFill>
-                <a:latin typeface="Calibri"/>
-              </a:rPr>
-              <a:t>Software E-stop latches local interlock and requests PLC channels. It is not a safety-rated hardwired stop.</a:t>
-            </a:r>
-          </a:p>
-        </p:txBody>
-      </p:sp>
-      <p:sp>
-        <p:nvSpPr>
-          <p:cNvPr id="18" name="TextBox 17"/>
+              <a:rPr sz="2600" b="1">
+                <a:solidFill>
+                  <a:srgbClr val="C47B00"/>
+                </a:solidFill>
+                <a:latin typeface="Calibri"/>
+              </a:rPr>
+              <a:t>HOLD</a:t>
+            </a:r>
+          </a:p>
+        </p:txBody>
+      </p:sp>
+      <p:sp>
+        <p:nvSpPr>
+          <p:cNvPr id="17" name="TextBox 16"/>
           <p:cNvSpPr txBox="1"/>
           <p:nvPr/>
         </p:nvSpPr>
         <p:spPr>
           <a:xfrm>
-            <a:off x="411480" y="6510528"/>
-            <a:ext cx="7772400" cy="256032"/>
+            <a:off x="8275320" y="1965960"/>
+            <a:ext cx="3291840" cy="1280160"/>
           </a:xfrm>
           <a:prstGeom prst="rect">
             <a:avLst/>
@@ -5892,27 +6094,115 @@
               </a:spcAft>
             </a:pPr>
             <a:r>
-              <a:rPr sz="1100" b="0">
-                <a:solidFill>
-                  <a:srgbClr val="8C9BAE"/>
-                </a:solidFill>
-                <a:latin typeface="Calibri"/>
-              </a:rPr>
-              <a:t>Team 71  ·  Trịnh Hoàng Tú  ·  HUFLIT  ·  Track 4</a:t>
-            </a:r>
-          </a:p>
-        </p:txBody>
-      </p:sp>
-      <p:sp>
-        <p:nvSpPr>
-          <p:cNvPr id="19" name="TextBox 18"/>
+              <a:rPr sz="1500" b="0">
+                <a:solidFill>
+                  <a:srgbClr val="1A1F2B"/>
+                </a:solidFill>
+                <a:latin typeface="Calibri"/>
+              </a:rPr>
+              <a:t>Disagreement, stale/missing sensor, timeout, unverified calibration, DB fault, or unconfirmed PLC.</a:t>
+            </a:r>
+          </a:p>
+        </p:txBody>
+      </p:sp>
+      <p:sp>
+        <p:nvSpPr>
+          <p:cNvPr id="18" name="Rectangle 17"/>
+          <p:cNvSpPr/>
+          <p:nvPr/>
+        </p:nvSpPr>
+        <p:spPr>
+          <a:xfrm>
+            <a:off x="411480" y="3703320"/>
+            <a:ext cx="11338560" cy="2423160"/>
+          </a:xfrm>
+          <a:prstGeom prst="rect">
+            <a:avLst/>
+          </a:prstGeom>
+          <a:solidFill>
+            <a:srgbClr val="F4F7FB"/>
+          </a:solidFill>
+          <a:ln w="6350">
+            <a:solidFill>
+              <a:srgbClr val="D5DCE6"/>
+            </a:solidFill>
+          </a:ln>
+        </p:spPr>
+        <p:style>
+          <a:lnRef idx="1">
+            <a:schemeClr val="accent1"/>
+          </a:lnRef>
+          <a:fillRef idx="3">
+            <a:schemeClr val="accent1"/>
+          </a:fillRef>
+          <a:effectRef idx="2">
+            <a:schemeClr val="accent1"/>
+          </a:effectRef>
+          <a:fontRef idx="minor">
+            <a:schemeClr val="lt1"/>
+          </a:fontRef>
+        </p:style>
+        <p:txBody>
+          <a:bodyPr rtlCol="0" anchor="ctr"/>
+          <a:lstStyle/>
+          <a:p>
+            <a:pPr algn="ctr"/>
+          </a:p>
+        </p:txBody>
+      </p:sp>
+      <p:sp>
+        <p:nvSpPr>
+          <p:cNvPr id="19" name="Rectangle 18"/>
+          <p:cNvSpPr/>
+          <p:nvPr/>
+        </p:nvSpPr>
+        <p:spPr>
+          <a:xfrm>
+            <a:off x="411480" y="3703320"/>
+            <a:ext cx="73152" cy="2423160"/>
+          </a:xfrm>
+          <a:prstGeom prst="rect">
+            <a:avLst/>
+          </a:prstGeom>
+          <a:solidFill>
+            <a:srgbClr val="1F5EB8"/>
+          </a:solidFill>
+          <a:ln>
+            <a:noFill/>
+          </a:ln>
+        </p:spPr>
+        <p:style>
+          <a:lnRef idx="1">
+            <a:schemeClr val="accent1"/>
+          </a:lnRef>
+          <a:fillRef idx="3">
+            <a:schemeClr val="accent1"/>
+          </a:fillRef>
+          <a:effectRef idx="2">
+            <a:schemeClr val="accent1"/>
+          </a:effectRef>
+          <a:fontRef idx="minor">
+            <a:schemeClr val="lt1"/>
+          </a:fontRef>
+        </p:style>
+        <p:txBody>
+          <a:bodyPr rtlCol="0" anchor="ctr"/>
+          <a:lstStyle/>
+          <a:p>
+            <a:pPr algn="ctr"/>
+          </a:p>
+        </p:txBody>
+      </p:sp>
+      <p:sp>
+        <p:nvSpPr>
+          <p:cNvPr id="20" name="TextBox 19"/>
           <p:cNvSpPr txBox="1"/>
           <p:nvPr/>
         </p:nvSpPr>
         <p:spPr>
           <a:xfrm>
-            <a:off x="9692640" y="6510528"/>
-            <a:ext cx="2011680" cy="256032"/>
+            <a:off x="640080" y="3840480"/>
+            <a:ext cx="10972800" cy="2103120"/>
           </a:xfrm>
           <a:prstGeom prst="rect">
             <a:avLst/>
@@ -5925,6 +6215,116 @@
           </a:bodyPr>
           <a:lstStyle/>
           <a:p>
+            <a:pPr algn="l">
+              <a:spcAft>
+                <a:spcPts val="600"/>
+              </a:spcAft>
+            </a:pPr>
+            <a:r>
+              <a:rPr sz="1200" b="1">
+                <a:solidFill>
+                  <a:srgbClr val="1F5EB8"/>
+                </a:solidFill>
+                <a:latin typeface="Calibri"/>
+              </a:rPr>
+              <a:t>INDUSTRIAL MEANING</a:t>
+            </a:r>
+          </a:p>
+          <a:p>
+            <a:pPr algn="l">
+              <a:spcAft>
+                <a:spcPts val="1000"/>
+              </a:spcAft>
+            </a:pPr>
+            <a:r>
+              <a:rPr sz="2000" b="1">
+                <a:solidFill>
+                  <a:srgbClr val="1A1F2B"/>
+                </a:solidFill>
+                <a:latin typeface="Calibri"/>
+              </a:rPr>
+              <a:t>Uncertainty becomes a controlled operational state, not a hidden false-positive rate.</a:t>
+            </a:r>
+          </a:p>
+          <a:p>
+            <a:pPr algn="l">
+              <a:spcAft>
+                <a:spcPts val="600"/>
+              </a:spcAft>
+            </a:pPr>
+            <a:r>
+              <a:rPr sz="1500" b="0">
+                <a:solidFill>
+                  <a:srgbClr val="5C6775"/>
+                </a:solidFill>
+                <a:latin typeface="Calibri"/>
+              </a:rPr>
+              <a:t>Software E-stop latches local interlock and requests PLC channels. It is not a safety-rated hardwired stop.</a:t>
+            </a:r>
+          </a:p>
+        </p:txBody>
+      </p:sp>
+      <p:sp>
+        <p:nvSpPr>
+          <p:cNvPr id="21" name="TextBox 20"/>
+          <p:cNvSpPr txBox="1"/>
+          <p:nvPr/>
+        </p:nvSpPr>
+        <p:spPr>
+          <a:xfrm>
+            <a:off x="411480" y="6510528"/>
+            <a:ext cx="7772400" cy="256032"/>
+          </a:xfrm>
+          <a:prstGeom prst="rect">
+            <a:avLst/>
+          </a:prstGeom>
+          <a:noFill/>
+        </p:spPr>
+        <p:txBody>
+          <a:bodyPr wrap="square">
+            <a:spAutoFit/>
+          </a:bodyPr>
+          <a:lstStyle/>
+          <a:p>
+            <a:pPr algn="l">
+              <a:spcAft>
+                <a:spcPts val="600"/>
+              </a:spcAft>
+            </a:pPr>
+            <a:r>
+              <a:rPr sz="1100" b="0">
+                <a:solidFill>
+                  <a:srgbClr val="5C6775"/>
+                </a:solidFill>
+                <a:latin typeface="Calibri"/>
+              </a:rPr>
+              <a:t>Team 71  ·  Trịnh Hoàng Tú  ·  HUFLIT  ·  Track 4</a:t>
+            </a:r>
+          </a:p>
+        </p:txBody>
+      </p:sp>
+      <p:sp>
+        <p:nvSpPr>
+          <p:cNvPr id="22" name="TextBox 21"/>
+          <p:cNvSpPr txBox="1"/>
+          <p:nvPr/>
+        </p:nvSpPr>
+        <p:spPr>
+          <a:xfrm>
+            <a:off x="9692640" y="6510528"/>
+            <a:ext cx="2011680" cy="256032"/>
+          </a:xfrm>
+          <a:prstGeom prst="rect">
+            <a:avLst/>
+          </a:prstGeom>
+          <a:noFill/>
+        </p:spPr>
+        <p:txBody>
+          <a:bodyPr wrap="square">
+            <a:spAutoFit/>
+          </a:bodyPr>
+          <a:lstStyle/>
+          <a:p>
             <a:pPr algn="r">
               <a:spcAft>
                 <a:spcPts val="600"/>
@@ -5933,7 +6333,7 @@
             <a:r>
               <a:rPr sz="1100" b="1">
                 <a:solidFill>
-                  <a:srgbClr val="8C9BAE"/>
+                  <a:srgbClr val="5C6775"/>
                 </a:solidFill>
                 <a:latin typeface="Calibri"/>
               </a:rPr>
@@ -5975,7 +6375,7 @@
             <a:avLst/>
           </a:prstGeom>
           <a:solidFill>
-            <a:srgbClr val="0A0D14"/>
+            <a:srgbClr val="FFFFFF"/>
           </a:solidFill>
           <a:ln>
             <a:noFill/>
@@ -6011,14 +6411,14 @@
         </p:nvSpPr>
         <p:spPr>
           <a:xfrm>
-            <a:off x="0" y="0"/>
-            <a:ext cx="109728" cy="6858000"/>
+            <a:off x="0" y="6446520"/>
+            <a:ext cx="12191695" cy="12700"/>
           </a:xfrm>
           <a:prstGeom prst="rect">
             <a:avLst/>
           </a:prstGeom>
           <a:solidFill>
-            <a:srgbClr val="00E5FF"/>
+            <a:srgbClr val="D5DCE6"/>
           </a:solidFill>
           <a:ln>
             <a:noFill/>
@@ -6048,23 +6448,103 @@
       </p:sp>
       <p:sp>
         <p:nvSpPr>
-          <p:cNvPr id="4" name="Rectangle 3"/>
+          <p:cNvPr id="4" name="TextBox 3"/>
+          <p:cNvSpPr txBox="1"/>
+          <p:nvPr/>
+        </p:nvSpPr>
+        <p:spPr>
+          <a:xfrm>
+            <a:off x="411480" y="201168"/>
+            <a:ext cx="11338560" cy="292608"/>
+          </a:xfrm>
+          <a:prstGeom prst="rect">
+            <a:avLst/>
+          </a:prstGeom>
+          <a:noFill/>
+        </p:spPr>
+        <p:txBody>
+          <a:bodyPr wrap="square">
+            <a:spAutoFit/>
+          </a:bodyPr>
+          <a:lstStyle/>
+          <a:p>
+            <a:pPr algn="l">
+              <a:spcAft>
+                <a:spcPts val="600"/>
+              </a:spcAft>
+            </a:pPr>
+            <a:r>
+              <a:rPr sz="1200" b="1">
+                <a:solidFill>
+                  <a:srgbClr val="1F5EB8"/>
+                </a:solidFill>
+                <a:latin typeface="Calibri"/>
+              </a:rPr>
+              <a:t>05    |    2:45–3:35</a:t>
+            </a:r>
+          </a:p>
+        </p:txBody>
+      </p:sp>
+      <p:sp>
+        <p:nvSpPr>
+          <p:cNvPr id="5" name="TextBox 4"/>
+          <p:cNvSpPr txBox="1"/>
+          <p:nvPr/>
+        </p:nvSpPr>
+        <p:spPr>
+          <a:xfrm>
+            <a:off x="411480" y="457200"/>
+            <a:ext cx="11338560" cy="640080"/>
+          </a:xfrm>
+          <a:prstGeom prst="rect">
+            <a:avLst/>
+          </a:prstGeom>
+          <a:noFill/>
+        </p:spPr>
+        <p:txBody>
+          <a:bodyPr wrap="square">
+            <a:spAutoFit/>
+          </a:bodyPr>
+          <a:lstStyle/>
+          <a:p>
+            <a:pPr algn="l">
+              <a:spcAft>
+                <a:spcPts val="600"/>
+              </a:spcAft>
+            </a:pPr>
+            <a:r>
+              <a:rPr sz="2600" b="1">
+                <a:solidFill>
+                  <a:srgbClr val="1A1F2B"/>
+                </a:solidFill>
+                <a:latin typeface="Calibri"/>
+              </a:rPr>
+              <a:t>Readiness is visible before any line decision.</a:t>
+            </a:r>
+          </a:p>
+        </p:txBody>
+      </p:sp>
+      <p:sp>
+        <p:nvSpPr>
+          <p:cNvPr id="6" name="Rectangle 5"/>
           <p:cNvSpPr/>
           <p:nvPr/>
         </p:nvSpPr>
         <p:spPr>
           <a:xfrm>
-            <a:off x="0" y="6446520"/>
-            <a:ext cx="12191695" cy="411480"/>
+            <a:off x="411480" y="1188720"/>
+            <a:ext cx="7498079" cy="1115568"/>
           </a:xfrm>
           <a:prstGeom prst="rect">
             <a:avLst/>
           </a:prstGeom>
           <a:solidFill>
-            <a:srgbClr val="080B12"/>
+            <a:srgbClr val="F4F7FB"/>
           </a:solidFill>
-          <a:ln>
-            <a:noFill/>
+          <a:ln w="6350">
+            <a:solidFill>
+              <a:srgbClr val="D5DCE6"/>
+            </a:solidFill>
           </a:ln>
         </p:spPr>
         <p:style>
@@ -6091,84 +6571,6 @@
       </p:sp>
       <p:sp>
         <p:nvSpPr>
-          <p:cNvPr id="5" name="TextBox 4"/>
-          <p:cNvSpPr txBox="1"/>
-          <p:nvPr/>
-        </p:nvSpPr>
-        <p:spPr>
-          <a:xfrm>
-            <a:off x="411480" y="201168"/>
-            <a:ext cx="11338560" cy="292608"/>
-          </a:xfrm>
-          <a:prstGeom prst="rect">
-            <a:avLst/>
-          </a:prstGeom>
-          <a:noFill/>
-        </p:spPr>
-        <p:txBody>
-          <a:bodyPr wrap="square">
-            <a:spAutoFit/>
-          </a:bodyPr>
-          <a:lstStyle/>
-          <a:p>
-            <a:pPr algn="l">
-              <a:spcAft>
-                <a:spcPts val="600"/>
-              </a:spcAft>
-            </a:pPr>
-            <a:r>
-              <a:rPr sz="1200" b="1">
-                <a:solidFill>
-                  <a:srgbClr val="00E5FF"/>
-                </a:solidFill>
-                <a:latin typeface="Calibri"/>
-              </a:rPr>
-              <a:t>05    2:45–3:35</a:t>
-            </a:r>
-          </a:p>
-        </p:txBody>
-      </p:sp>
-      <p:sp>
-        <p:nvSpPr>
-          <p:cNvPr id="6" name="TextBox 5"/>
-          <p:cNvSpPr txBox="1"/>
-          <p:nvPr/>
-        </p:nvSpPr>
-        <p:spPr>
-          <a:xfrm>
-            <a:off x="411480" y="457200"/>
-            <a:ext cx="11338560" cy="640080"/>
-          </a:xfrm>
-          <a:prstGeom prst="rect">
-            <a:avLst/>
-          </a:prstGeom>
-          <a:noFill/>
-        </p:spPr>
-        <p:txBody>
-          <a:bodyPr wrap="square">
-            <a:spAutoFit/>
-          </a:bodyPr>
-          <a:lstStyle/>
-          <a:p>
-            <a:pPr algn="l">
-              <a:spcAft>
-                <a:spcPts val="600"/>
-              </a:spcAft>
-            </a:pPr>
-            <a:r>
-              <a:rPr sz="2600" b="1">
-                <a:solidFill>
-                  <a:srgbClr val="FFFFFF"/>
-                </a:solidFill>
-                <a:latin typeface="Calibri"/>
-              </a:rPr>
-              <a:t>Readiness is visible before any line decision.</a:t>
-            </a:r>
-          </a:p>
-        </p:txBody>
-      </p:sp>
-      <p:sp>
-        <p:nvSpPr>
           <p:cNvPr id="7" name="Rectangle 6"/>
           <p:cNvSpPr/>
           <p:nvPr/>
@@ -6176,18 +6578,16 @@
         <p:spPr>
           <a:xfrm>
             <a:off x="411480" y="1188720"/>
-            <a:ext cx="7498079" cy="1115568"/>
+            <a:ext cx="73152" cy="1115568"/>
           </a:xfrm>
           <a:prstGeom prst="rect">
             <a:avLst/>
           </a:prstGeom>
           <a:solidFill>
-            <a:srgbClr val="151B28"/>
+            <a:srgbClr val="1F5EB8"/>
           </a:solidFill>
-          <a:ln w="6350">
-            <a:solidFill>
-              <a:srgbClr val="222C3E"/>
-            </a:solidFill>
+          <a:ln>
+            <a:noFill/>
           </a:ln>
         </p:spPr>
         <p:style>
@@ -6242,7 +6642,7 @@
             <a:r>
               <a:rPr sz="1600" b="1">
                 <a:solidFill>
-                  <a:srgbClr val="00E5FF"/>
+                  <a:srgbClr val="1F5EB8"/>
                 </a:solidFill>
                 <a:latin typeface="Calibri"/>
               </a:rPr>
@@ -6281,7 +6681,7 @@
             <a:r>
               <a:rPr sz="1400" b="0">
                 <a:solidFill>
-                  <a:srgbClr val="FFFFFF"/>
+                  <a:srgbClr val="1A1F2B"/>
                 </a:solidFill>
                 <a:latin typeface="Calibri"/>
               </a:rPr>
@@ -6305,11 +6705,11 @@
             <a:avLst/>
           </a:prstGeom>
           <a:solidFill>
-            <a:srgbClr val="151B28"/>
+            <a:srgbClr val="F4F7FB"/>
           </a:solidFill>
           <a:ln w="6350">
             <a:solidFill>
-              <a:srgbClr val="222C3E"/>
+              <a:srgbClr val="D5DCE6"/>
             </a:solidFill>
           </a:ln>
         </p:spPr>
@@ -6337,103 +6737,23 @@
       </p:sp>
       <p:sp>
         <p:nvSpPr>
-          <p:cNvPr id="11" name="TextBox 10"/>
-          <p:cNvSpPr txBox="1"/>
-          <p:nvPr/>
-        </p:nvSpPr>
-        <p:spPr>
-          <a:xfrm>
-            <a:off x="594360" y="2532888"/>
-            <a:ext cx="7132320" cy="292608"/>
-          </a:xfrm>
-          <a:prstGeom prst="rect">
-            <a:avLst/>
-          </a:prstGeom>
-          <a:noFill/>
-        </p:spPr>
-        <p:txBody>
-          <a:bodyPr wrap="square">
-            <a:spAutoFit/>
-          </a:bodyPr>
-          <a:lstStyle/>
-          <a:p>
-            <a:pPr algn="l">
-              <a:spcAft>
-                <a:spcPts val="600"/>
-              </a:spcAft>
-            </a:pPr>
-            <a:r>
-              <a:rPr sz="1600" b="1">
-                <a:solidFill>
-                  <a:srgbClr val="00E5FF"/>
-                </a:solidFill>
-                <a:latin typeface="Calibri"/>
-              </a:rPr>
-              <a:t>DIAGNOSE</a:t>
-            </a:r>
-          </a:p>
-        </p:txBody>
-      </p:sp>
-      <p:sp>
-        <p:nvSpPr>
-          <p:cNvPr id="12" name="TextBox 11"/>
-          <p:cNvSpPr txBox="1"/>
-          <p:nvPr/>
-        </p:nvSpPr>
-        <p:spPr>
-          <a:xfrm>
-            <a:off x="594360" y="2862072"/>
-            <a:ext cx="7132320" cy="548640"/>
-          </a:xfrm>
-          <a:prstGeom prst="rect">
-            <a:avLst/>
-          </a:prstGeom>
-          <a:noFill/>
-        </p:spPr>
-        <p:txBody>
-          <a:bodyPr wrap="square">
-            <a:spAutoFit/>
-          </a:bodyPr>
-          <a:lstStyle/>
-          <a:p>
-            <a:pPr algn="l">
-              <a:spcAft>
-                <a:spcPts val="600"/>
-              </a:spcAft>
-            </a:pPr>
-            <a:r>
-              <a:rPr sz="1400" b="0">
-                <a:solidFill>
-                  <a:srgbClr val="FFFFFF"/>
-                </a:solidFill>
-                <a:latin typeface="Calibri"/>
-              </a:rPr>
-              <a:t>Simulation, mock PLC, or unverified calibration makes the authoritative disposition HOLD_REQUIRED.</a:t>
-            </a:r>
-          </a:p>
-        </p:txBody>
-      </p:sp>
-      <p:sp>
-        <p:nvSpPr>
-          <p:cNvPr id="13" name="Rectangle 12"/>
+          <p:cNvPr id="11" name="Rectangle 10"/>
           <p:cNvSpPr/>
           <p:nvPr/>
         </p:nvSpPr>
         <p:spPr>
           <a:xfrm>
-            <a:off x="411480" y="3657600"/>
-            <a:ext cx="7498079" cy="1115568"/>
+            <a:off x="411480" y="2423160"/>
+            <a:ext cx="73152" cy="1115568"/>
           </a:xfrm>
           <a:prstGeom prst="rect">
             <a:avLst/>
           </a:prstGeom>
           <a:solidFill>
-            <a:srgbClr val="151B28"/>
+            <a:srgbClr val="1F5EB8"/>
           </a:solidFill>
-          <a:ln w="6350">
-            <a:solidFill>
-              <a:srgbClr val="222C3E"/>
-            </a:solidFill>
+          <a:ln>
+            <a:noFill/>
           </a:ln>
         </p:spPr>
         <p:style>
@@ -6460,13 +6780,13 @@
       </p:sp>
       <p:sp>
         <p:nvSpPr>
-          <p:cNvPr id="14" name="TextBox 13"/>
+          <p:cNvPr id="12" name="TextBox 11"/>
           <p:cNvSpPr txBox="1"/>
           <p:nvPr/>
         </p:nvSpPr>
         <p:spPr>
           <a:xfrm>
-            <a:off x="594360" y="3767328"/>
+            <a:off x="594360" y="2532888"/>
             <a:ext cx="7132320" cy="292608"/>
           </a:xfrm>
           <a:prstGeom prst="rect">
@@ -6488,24 +6808,24 @@
             <a:r>
               <a:rPr sz="1600" b="1">
                 <a:solidFill>
-                  <a:srgbClr val="00E5FF"/>
-                </a:solidFill>
-                <a:latin typeface="Calibri"/>
-              </a:rPr>
-              <a:t>TRACEABILITY</a:t>
-            </a:r>
-          </a:p>
-        </p:txBody>
-      </p:sp>
-      <p:sp>
-        <p:nvSpPr>
-          <p:cNvPr id="15" name="TextBox 14"/>
+                  <a:srgbClr val="1F5EB8"/>
+                </a:solidFill>
+                <a:latin typeface="Calibri"/>
+              </a:rPr>
+              <a:t>DIAGNOSE</a:t>
+            </a:r>
+          </a:p>
+        </p:txBody>
+      </p:sp>
+      <p:sp>
+        <p:nvSpPr>
+          <p:cNvPr id="13" name="TextBox 12"/>
           <p:cNvSpPr txBox="1"/>
           <p:nvPr/>
         </p:nvSpPr>
         <p:spPr>
           <a:xfrm>
-            <a:off x="594360" y="4096512"/>
+            <a:off x="594360" y="2862072"/>
             <a:ext cx="7132320" cy="548640"/>
           </a:xfrm>
           <a:prstGeom prst="rect">
@@ -6527,35 +6847,35 @@
             <a:r>
               <a:rPr sz="1400" b="0">
                 <a:solidFill>
-                  <a:srgbClr val="FFFFFF"/>
-                </a:solidFill>
-                <a:latin typeface="Calibri"/>
-              </a:rPr>
-              <a:t>Roll ledger, certificate HMAC, control-audit log. Missing data renders as NO DATA, not 0%.</a:t>
-            </a:r>
-          </a:p>
-        </p:txBody>
-      </p:sp>
-      <p:sp>
-        <p:nvSpPr>
-          <p:cNvPr id="16" name="Rectangle 15"/>
+                  <a:srgbClr val="1A1F2B"/>
+                </a:solidFill>
+                <a:latin typeface="Calibri"/>
+              </a:rPr>
+              <a:t>Simulation, mock PLC, or unverified calibration makes the authoritative disposition HOLD_REQUIRED.</a:t>
+            </a:r>
+          </a:p>
+        </p:txBody>
+      </p:sp>
+      <p:sp>
+        <p:nvSpPr>
+          <p:cNvPr id="14" name="Rectangle 13"/>
           <p:cNvSpPr/>
           <p:nvPr/>
         </p:nvSpPr>
         <p:spPr>
           <a:xfrm>
-            <a:off x="8092440" y="1188720"/>
-            <a:ext cx="3657600" cy="4892040"/>
+            <a:off x="411480" y="3657600"/>
+            <a:ext cx="7498079" cy="1115568"/>
           </a:xfrm>
           <a:prstGeom prst="rect">
             <a:avLst/>
           </a:prstGeom>
           <a:solidFill>
-            <a:srgbClr val="151B28"/>
+            <a:srgbClr val="F4F7FB"/>
           </a:solidFill>
           <a:ln w="6350">
             <a:solidFill>
-              <a:srgbClr val="222C3E"/>
+              <a:srgbClr val="D5DCE6"/>
             </a:solidFill>
           </a:ln>
         </p:spPr>
@@ -6583,14 +6903,57 @@
       </p:sp>
       <p:sp>
         <p:nvSpPr>
-          <p:cNvPr id="17" name="TextBox 16"/>
+          <p:cNvPr id="15" name="Rectangle 14"/>
+          <p:cNvSpPr/>
+          <p:nvPr/>
+        </p:nvSpPr>
+        <p:spPr>
+          <a:xfrm>
+            <a:off x="411480" y="3657600"/>
+            <a:ext cx="73152" cy="1115568"/>
+          </a:xfrm>
+          <a:prstGeom prst="rect">
+            <a:avLst/>
+          </a:prstGeom>
+          <a:solidFill>
+            <a:srgbClr val="1F5EB8"/>
+          </a:solidFill>
+          <a:ln>
+            <a:noFill/>
+          </a:ln>
+        </p:spPr>
+        <p:style>
+          <a:lnRef idx="1">
+            <a:schemeClr val="accent1"/>
+          </a:lnRef>
+          <a:fillRef idx="3">
+            <a:schemeClr val="accent1"/>
+          </a:fillRef>
+          <a:effectRef idx="2">
+            <a:schemeClr val="accent1"/>
+          </a:effectRef>
+          <a:fontRef idx="minor">
+            <a:schemeClr val="lt1"/>
+          </a:fontRef>
+        </p:style>
+        <p:txBody>
+          <a:bodyPr rtlCol="0" anchor="ctr"/>
+          <a:lstStyle/>
+          <a:p>
+            <a:pPr algn="ctr"/>
+          </a:p>
+        </p:txBody>
+      </p:sp>
+      <p:sp>
+        <p:nvSpPr>
+          <p:cNvPr id="16" name="TextBox 15"/>
           <p:cNvSpPr txBox="1"/>
           <p:nvPr/>
         </p:nvSpPr>
         <p:spPr>
           <a:xfrm>
-            <a:off x="8275320" y="1325880"/>
-            <a:ext cx="3291840" cy="4572000"/>
+            <a:off x="594360" y="3767328"/>
+            <a:ext cx="7132320" cy="292608"/>
           </a:xfrm>
           <a:prstGeom prst="rect">
             <a:avLst/>
@@ -6609,139 +6972,27 @@
               </a:spcAft>
             </a:pPr>
             <a:r>
-              <a:rPr sz="1200" b="1">
-                <a:solidFill>
-                  <a:srgbClr val="FF1744"/>
-                </a:solidFill>
-                <a:latin typeface="Calibri"/>
-              </a:rPr>
-              <a:t>NOT IN PRODUCTION</a:t>
-            </a:r>
-          </a:p>
-          <a:p>
-            <a:pPr algn="l">
-              <a:spcAft>
-                <a:spcPts val="400"/>
-              </a:spcAft>
-            </a:pPr>
-            <a:r>
               <a:rPr sz="1600" b="1">
                 <a:solidFill>
-                  <a:srgbClr val="FFFFFF"/>
-                </a:solidFill>
-                <a:latin typeface="Calibri"/>
-              </a:rPr>
-              <a:t>Recipe sliders</a:t>
-            </a:r>
-          </a:p>
-          <a:p>
-            <a:pPr algn="l">
-              <a:spcAft>
-                <a:spcPts val="400"/>
-              </a:spcAft>
-            </a:pPr>
-            <a:r>
-              <a:rPr sz="1600" b="1">
-                <a:solidFill>
-                  <a:srgbClr val="FFFFFF"/>
-                </a:solidFill>
-                <a:latin typeface="Calibri"/>
-              </a:rPr>
-              <a:t>Defect injection</a:t>
-            </a:r>
-          </a:p>
-          <a:p>
-            <a:pPr algn="l">
-              <a:spcAft>
-                <a:spcPts val="400"/>
-              </a:spcAft>
-            </a:pPr>
-            <a:r>
-              <a:rPr sz="1600" b="1">
-                <a:solidFill>
-                  <a:srgbClr val="FFFFFF"/>
-                </a:solidFill>
-                <a:latin typeface="Calibri"/>
-              </a:rPr>
-              <a:t>7-stage simulator</a:t>
-            </a:r>
-          </a:p>
-          <a:p>
-            <a:pPr algn="l">
-              <a:spcAft>
-                <a:spcPts val="400"/>
-              </a:spcAft>
-            </a:pPr>
-            <a:r>
-              <a:rPr sz="1600" b="1">
-                <a:solidFill>
-                  <a:srgbClr val="FFFFFF"/>
-                </a:solidFill>
-                <a:latin typeface="Calibri"/>
-              </a:rPr>
-              <a:t>LIBAD 90s demo</a:t>
-            </a:r>
-          </a:p>
-          <a:p>
-            <a:pPr algn="l">
-              <a:spcAft>
-                <a:spcPts val="1200"/>
-              </a:spcAft>
-            </a:pPr>
-            <a:r>
-              <a:rPr sz="1600" b="1">
-                <a:solidFill>
-                  <a:srgbClr val="FFFFFF"/>
-                </a:solidFill>
-                <a:latin typeface="Calibri"/>
-              </a:rPr>
-              <a:t>Send offset to PLC</a:t>
-            </a:r>
-          </a:p>
-          <a:p>
-            <a:pPr algn="l">
-              <a:spcAft>
-                <a:spcPts val="600"/>
-              </a:spcAft>
-            </a:pPr>
-            <a:r>
-              <a:rPr sz="1300" b="0">
-                <a:solidFill>
-                  <a:srgbClr val="8C9BAE"/>
-                </a:solidFill>
-                <a:latin typeface="Calibri"/>
-              </a:rPr>
-              <a:t>Sandbox-only features stay isolated from the operating surface.</a:t>
-            </a:r>
-          </a:p>
-          <a:p>
-            <a:pPr algn="l">
-              <a:spcAft>
-                <a:spcPts val="600"/>
-              </a:spcAft>
-            </a:pPr>
-            <a:r>
-              <a:rPr sz="1400" b="1">
-                <a:solidFill>
-                  <a:srgbClr val="00E5FF"/>
-                </a:solidFill>
-                <a:latin typeface="Calibri"/>
-              </a:rPr>
-              <a:t>Control = confirm-audit only.</a:t>
-            </a:r>
-          </a:p>
-        </p:txBody>
-      </p:sp>
-      <p:sp>
-        <p:nvSpPr>
-          <p:cNvPr id="18" name="TextBox 17"/>
+                  <a:srgbClr val="1F5EB8"/>
+                </a:solidFill>
+                <a:latin typeface="Calibri"/>
+              </a:rPr>
+              <a:t>TRACEABILITY</a:t>
+            </a:r>
+          </a:p>
+        </p:txBody>
+      </p:sp>
+      <p:sp>
+        <p:nvSpPr>
+          <p:cNvPr id="17" name="TextBox 16"/>
           <p:cNvSpPr txBox="1"/>
           <p:nvPr/>
         </p:nvSpPr>
         <p:spPr>
           <a:xfrm>
-            <a:off x="411480" y="6510528"/>
-            <a:ext cx="7772400" cy="256032"/>
+            <a:off x="594360" y="4096512"/>
+            <a:ext cx="7132320" cy="548640"/>
           </a:xfrm>
           <a:prstGeom prst="rect">
             <a:avLst/>
@@ -6760,27 +7011,115 @@
               </a:spcAft>
             </a:pPr>
             <a:r>
-              <a:rPr sz="1100" b="0">
-                <a:solidFill>
-                  <a:srgbClr val="8C9BAE"/>
-                </a:solidFill>
-                <a:latin typeface="Calibri"/>
-              </a:rPr>
-              <a:t>Team 71  ·  Trịnh Hoàng Tú  ·  HUFLIT  ·  Track 4</a:t>
-            </a:r>
-          </a:p>
-        </p:txBody>
-      </p:sp>
-      <p:sp>
-        <p:nvSpPr>
-          <p:cNvPr id="19" name="TextBox 18"/>
+              <a:rPr sz="1400" b="0">
+                <a:solidFill>
+                  <a:srgbClr val="1A1F2B"/>
+                </a:solidFill>
+                <a:latin typeface="Calibri"/>
+              </a:rPr>
+              <a:t>Roll ledger, certificate HMAC, control-audit log. Missing data renders as NO DATA, not 0%.</a:t>
+            </a:r>
+          </a:p>
+        </p:txBody>
+      </p:sp>
+      <p:sp>
+        <p:nvSpPr>
+          <p:cNvPr id="18" name="Rectangle 17"/>
+          <p:cNvSpPr/>
+          <p:nvPr/>
+        </p:nvSpPr>
+        <p:spPr>
+          <a:xfrm>
+            <a:off x="8092440" y="1188720"/>
+            <a:ext cx="3657600" cy="4892040"/>
+          </a:xfrm>
+          <a:prstGeom prst="rect">
+            <a:avLst/>
+          </a:prstGeom>
+          <a:solidFill>
+            <a:srgbClr val="F4F7FB"/>
+          </a:solidFill>
+          <a:ln w="6350">
+            <a:solidFill>
+              <a:srgbClr val="D5DCE6"/>
+            </a:solidFill>
+          </a:ln>
+        </p:spPr>
+        <p:style>
+          <a:lnRef idx="1">
+            <a:schemeClr val="accent1"/>
+          </a:lnRef>
+          <a:fillRef idx="3">
+            <a:schemeClr val="accent1"/>
+          </a:fillRef>
+          <a:effectRef idx="2">
+            <a:schemeClr val="accent1"/>
+          </a:effectRef>
+          <a:fontRef idx="minor">
+            <a:schemeClr val="lt1"/>
+          </a:fontRef>
+        </p:style>
+        <p:txBody>
+          <a:bodyPr rtlCol="0" anchor="ctr"/>
+          <a:lstStyle/>
+          <a:p>
+            <a:pPr algn="ctr"/>
+          </a:p>
+        </p:txBody>
+      </p:sp>
+      <p:sp>
+        <p:nvSpPr>
+          <p:cNvPr id="19" name="Rectangle 18"/>
+          <p:cNvSpPr/>
+          <p:nvPr/>
+        </p:nvSpPr>
+        <p:spPr>
+          <a:xfrm>
+            <a:off x="8092440" y="1188720"/>
+            <a:ext cx="73152" cy="4892040"/>
+          </a:xfrm>
+          <a:prstGeom prst="rect">
+            <a:avLst/>
+          </a:prstGeom>
+          <a:solidFill>
+            <a:srgbClr val="1F5EB8"/>
+          </a:solidFill>
+          <a:ln>
+            <a:noFill/>
+          </a:ln>
+        </p:spPr>
+        <p:style>
+          <a:lnRef idx="1">
+            <a:schemeClr val="accent1"/>
+          </a:lnRef>
+          <a:fillRef idx="3">
+            <a:schemeClr val="accent1"/>
+          </a:fillRef>
+          <a:effectRef idx="2">
+            <a:schemeClr val="accent1"/>
+          </a:effectRef>
+          <a:fontRef idx="minor">
+            <a:schemeClr val="lt1"/>
+          </a:fontRef>
+        </p:style>
+        <p:txBody>
+          <a:bodyPr rtlCol="0" anchor="ctr"/>
+          <a:lstStyle/>
+          <a:p>
+            <a:pPr algn="ctr"/>
+          </a:p>
+        </p:txBody>
+      </p:sp>
+      <p:sp>
+        <p:nvSpPr>
+          <p:cNvPr id="20" name="TextBox 19"/>
           <p:cNvSpPr txBox="1"/>
           <p:nvPr/>
         </p:nvSpPr>
         <p:spPr>
           <a:xfrm>
-            <a:off x="9692640" y="6510528"/>
-            <a:ext cx="2011680" cy="256032"/>
+            <a:off x="8275320" y="1325880"/>
+            <a:ext cx="3291840" cy="4572000"/>
           </a:xfrm>
           <a:prstGeom prst="rect">
             <a:avLst/>
@@ -6793,6 +7132,196 @@
           </a:bodyPr>
           <a:lstStyle/>
           <a:p>
+            <a:pPr algn="l">
+              <a:spcAft>
+                <a:spcPts val="600"/>
+              </a:spcAft>
+            </a:pPr>
+            <a:r>
+              <a:rPr sz="1200" b="1">
+                <a:solidFill>
+                  <a:srgbClr val="C8102E"/>
+                </a:solidFill>
+                <a:latin typeface="Calibri"/>
+              </a:rPr>
+              <a:t>NOT IN PRODUCTION</a:t>
+            </a:r>
+          </a:p>
+          <a:p>
+            <a:pPr algn="l">
+              <a:spcAft>
+                <a:spcPts val="400"/>
+              </a:spcAft>
+            </a:pPr>
+            <a:r>
+              <a:rPr sz="1600" b="1">
+                <a:solidFill>
+                  <a:srgbClr val="1A1F2B"/>
+                </a:solidFill>
+                <a:latin typeface="Calibri"/>
+              </a:rPr>
+              <a:t>Recipe sliders</a:t>
+            </a:r>
+          </a:p>
+          <a:p>
+            <a:pPr algn="l">
+              <a:spcAft>
+                <a:spcPts val="400"/>
+              </a:spcAft>
+            </a:pPr>
+            <a:r>
+              <a:rPr sz="1600" b="1">
+                <a:solidFill>
+                  <a:srgbClr val="1A1F2B"/>
+                </a:solidFill>
+                <a:latin typeface="Calibri"/>
+              </a:rPr>
+              <a:t>Defect injection</a:t>
+            </a:r>
+          </a:p>
+          <a:p>
+            <a:pPr algn="l">
+              <a:spcAft>
+                <a:spcPts val="400"/>
+              </a:spcAft>
+            </a:pPr>
+            <a:r>
+              <a:rPr sz="1600" b="1">
+                <a:solidFill>
+                  <a:srgbClr val="1A1F2B"/>
+                </a:solidFill>
+                <a:latin typeface="Calibri"/>
+              </a:rPr>
+              <a:t>7-stage simulator</a:t>
+            </a:r>
+          </a:p>
+          <a:p>
+            <a:pPr algn="l">
+              <a:spcAft>
+                <a:spcPts val="400"/>
+              </a:spcAft>
+            </a:pPr>
+            <a:r>
+              <a:rPr sz="1600" b="1">
+                <a:solidFill>
+                  <a:srgbClr val="1A1F2B"/>
+                </a:solidFill>
+                <a:latin typeface="Calibri"/>
+              </a:rPr>
+              <a:t>LIBAD 90s demo</a:t>
+            </a:r>
+          </a:p>
+          <a:p>
+            <a:pPr algn="l">
+              <a:spcAft>
+                <a:spcPts val="1200"/>
+              </a:spcAft>
+            </a:pPr>
+            <a:r>
+              <a:rPr sz="1600" b="1">
+                <a:solidFill>
+                  <a:srgbClr val="1A1F2B"/>
+                </a:solidFill>
+                <a:latin typeface="Calibri"/>
+              </a:rPr>
+              <a:t>Send offset to PLC</a:t>
+            </a:r>
+          </a:p>
+          <a:p>
+            <a:pPr algn="l">
+              <a:spcAft>
+                <a:spcPts val="600"/>
+              </a:spcAft>
+            </a:pPr>
+            <a:r>
+              <a:rPr sz="1300" b="0">
+                <a:solidFill>
+                  <a:srgbClr val="5C6775"/>
+                </a:solidFill>
+                <a:latin typeface="Calibri"/>
+              </a:rPr>
+              <a:t>Sandbox-only features stay isolated from the operating surface.</a:t>
+            </a:r>
+          </a:p>
+          <a:p>
+            <a:pPr algn="l">
+              <a:spcAft>
+                <a:spcPts val="600"/>
+              </a:spcAft>
+            </a:pPr>
+            <a:r>
+              <a:rPr sz="1400" b="1">
+                <a:solidFill>
+                  <a:srgbClr val="1F5EB8"/>
+                </a:solidFill>
+                <a:latin typeface="Calibri"/>
+              </a:rPr>
+              <a:t>Control = confirm-audit only.</a:t>
+            </a:r>
+          </a:p>
+        </p:txBody>
+      </p:sp>
+      <p:sp>
+        <p:nvSpPr>
+          <p:cNvPr id="21" name="TextBox 20"/>
+          <p:cNvSpPr txBox="1"/>
+          <p:nvPr/>
+        </p:nvSpPr>
+        <p:spPr>
+          <a:xfrm>
+            <a:off x="411480" y="6510528"/>
+            <a:ext cx="7772400" cy="256032"/>
+          </a:xfrm>
+          <a:prstGeom prst="rect">
+            <a:avLst/>
+          </a:prstGeom>
+          <a:noFill/>
+        </p:spPr>
+        <p:txBody>
+          <a:bodyPr wrap="square">
+            <a:spAutoFit/>
+          </a:bodyPr>
+          <a:lstStyle/>
+          <a:p>
+            <a:pPr algn="l">
+              <a:spcAft>
+                <a:spcPts val="600"/>
+              </a:spcAft>
+            </a:pPr>
+            <a:r>
+              <a:rPr sz="1100" b="0">
+                <a:solidFill>
+                  <a:srgbClr val="5C6775"/>
+                </a:solidFill>
+                <a:latin typeface="Calibri"/>
+              </a:rPr>
+              <a:t>Team 71  ·  Trịnh Hoàng Tú  ·  HUFLIT  ·  Track 4</a:t>
+            </a:r>
+          </a:p>
+        </p:txBody>
+      </p:sp>
+      <p:sp>
+        <p:nvSpPr>
+          <p:cNvPr id="22" name="TextBox 21"/>
+          <p:cNvSpPr txBox="1"/>
+          <p:nvPr/>
+        </p:nvSpPr>
+        <p:spPr>
+          <a:xfrm>
+            <a:off x="9692640" y="6510528"/>
+            <a:ext cx="2011680" cy="256032"/>
+          </a:xfrm>
+          <a:prstGeom prst="rect">
+            <a:avLst/>
+          </a:prstGeom>
+          <a:noFill/>
+        </p:spPr>
+        <p:txBody>
+          <a:bodyPr wrap="square">
+            <a:spAutoFit/>
+          </a:bodyPr>
+          <a:lstStyle/>
+          <a:p>
             <a:pPr algn="r">
               <a:spcAft>
                 <a:spcPts val="600"/>
@@ -6801,7 +7330,7 @@
             <a:r>
               <a:rPr sz="1100" b="1">
                 <a:solidFill>
-                  <a:srgbClr val="8C9BAE"/>
+                  <a:srgbClr val="5C6775"/>
                 </a:solidFill>
                 <a:latin typeface="Calibri"/>
               </a:rPr>
@@ -6843,7 +7372,7 @@
             <a:avLst/>
           </a:prstGeom>
           <a:solidFill>
-            <a:srgbClr val="0A0D14"/>
+            <a:srgbClr val="FFFFFF"/>
           </a:solidFill>
           <a:ln>
             <a:noFill/>
@@ -6879,14 +7408,14 @@
         </p:nvSpPr>
         <p:spPr>
           <a:xfrm>
-            <a:off x="0" y="0"/>
-            <a:ext cx="109728" cy="6858000"/>
+            <a:off x="0" y="6446520"/>
+            <a:ext cx="12191695" cy="12700"/>
           </a:xfrm>
           <a:prstGeom prst="rect">
             <a:avLst/>
           </a:prstGeom>
           <a:solidFill>
-            <a:srgbClr val="00E5FF"/>
+            <a:srgbClr val="D5DCE6"/>
           </a:solidFill>
           <a:ln>
             <a:noFill/>
@@ -6916,23 +7445,103 @@
       </p:sp>
       <p:sp>
         <p:nvSpPr>
-          <p:cNvPr id="4" name="Rectangle 3"/>
+          <p:cNvPr id="4" name="TextBox 3"/>
+          <p:cNvSpPr txBox="1"/>
+          <p:nvPr/>
+        </p:nvSpPr>
+        <p:spPr>
+          <a:xfrm>
+            <a:off x="411480" y="201168"/>
+            <a:ext cx="11338560" cy="292608"/>
+          </a:xfrm>
+          <a:prstGeom prst="rect">
+            <a:avLst/>
+          </a:prstGeom>
+          <a:noFill/>
+        </p:spPr>
+        <p:txBody>
+          <a:bodyPr wrap="square">
+            <a:spAutoFit/>
+          </a:bodyPr>
+          <a:lstStyle/>
+          <a:p>
+            <a:pPr algn="l">
+              <a:spcAft>
+                <a:spcPts val="600"/>
+              </a:spcAft>
+            </a:pPr>
+            <a:r>
+              <a:rPr sz="1200" b="1">
+                <a:solidFill>
+                  <a:srgbClr val="1F5EB8"/>
+                </a:solidFill>
+                <a:latin typeface="Calibri"/>
+              </a:rPr>
+              <a:t>06    |    3:35–4:20</a:t>
+            </a:r>
+          </a:p>
+        </p:txBody>
+      </p:sp>
+      <p:sp>
+        <p:nvSpPr>
+          <p:cNvPr id="5" name="TextBox 4"/>
+          <p:cNvSpPr txBox="1"/>
+          <p:nvPr/>
+        </p:nvSpPr>
+        <p:spPr>
+          <a:xfrm>
+            <a:off x="411480" y="457200"/>
+            <a:ext cx="11338560" cy="640080"/>
+          </a:xfrm>
+          <a:prstGeom prst="rect">
+            <a:avLst/>
+          </a:prstGeom>
+          <a:noFill/>
+        </p:spPr>
+        <p:txBody>
+          <a:bodyPr wrap="square">
+            <a:spAutoFit/>
+          </a:bodyPr>
+          <a:lstStyle/>
+          <a:p>
+            <a:pPr algn="l">
+              <a:spcAft>
+                <a:spcPts val="600"/>
+              </a:spcAft>
+            </a:pPr>
+            <a:r>
+              <a:rPr sz="2800" b="1">
+                <a:solidFill>
+                  <a:srgbClr val="1A1F2B"/>
+                </a:solidFill>
+                <a:latin typeface="Calibri"/>
+              </a:rPr>
+              <a:t>Trace first. Command second. ACK or HOLD.</a:t>
+            </a:r>
+          </a:p>
+        </p:txBody>
+      </p:sp>
+      <p:sp>
+        <p:nvSpPr>
+          <p:cNvPr id="6" name="Rectangle 5"/>
           <p:cNvSpPr/>
           <p:nvPr/>
         </p:nvSpPr>
         <p:spPr>
           <a:xfrm>
-            <a:off x="0" y="6446520"/>
-            <a:ext cx="12191695" cy="411480"/>
+            <a:off x="411480" y="1280160"/>
+            <a:ext cx="3657600" cy="2057400"/>
           </a:xfrm>
           <a:prstGeom prst="rect">
             <a:avLst/>
           </a:prstGeom>
           <a:solidFill>
-            <a:srgbClr val="080B12"/>
+            <a:srgbClr val="F4F7FB"/>
           </a:solidFill>
-          <a:ln>
-            <a:noFill/>
+          <a:ln w="6350">
+            <a:solidFill>
+              <a:srgbClr val="D5DCE6"/>
+            </a:solidFill>
           </a:ln>
         </p:spPr>
         <p:style>
@@ -6959,84 +7568,6 @@
       </p:sp>
       <p:sp>
         <p:nvSpPr>
-          <p:cNvPr id="5" name="TextBox 4"/>
-          <p:cNvSpPr txBox="1"/>
-          <p:nvPr/>
-        </p:nvSpPr>
-        <p:spPr>
-          <a:xfrm>
-            <a:off x="411480" y="201168"/>
-            <a:ext cx="11338560" cy="292608"/>
-          </a:xfrm>
-          <a:prstGeom prst="rect">
-            <a:avLst/>
-          </a:prstGeom>
-          <a:noFill/>
-        </p:spPr>
-        <p:txBody>
-          <a:bodyPr wrap="square">
-            <a:spAutoFit/>
-          </a:bodyPr>
-          <a:lstStyle/>
-          <a:p>
-            <a:pPr algn="l">
-              <a:spcAft>
-                <a:spcPts val="600"/>
-              </a:spcAft>
-            </a:pPr>
-            <a:r>
-              <a:rPr sz="1200" b="1">
-                <a:solidFill>
-                  <a:srgbClr val="00E5FF"/>
-                </a:solidFill>
-                <a:latin typeface="Calibri"/>
-              </a:rPr>
-              <a:t>06    3:35–4:20</a:t>
-            </a:r>
-          </a:p>
-        </p:txBody>
-      </p:sp>
-      <p:sp>
-        <p:nvSpPr>
-          <p:cNvPr id="6" name="TextBox 5"/>
-          <p:cNvSpPr txBox="1"/>
-          <p:nvPr/>
-        </p:nvSpPr>
-        <p:spPr>
-          <a:xfrm>
-            <a:off x="411480" y="457200"/>
-            <a:ext cx="11338560" cy="640080"/>
-          </a:xfrm>
-          <a:prstGeom prst="rect">
-            <a:avLst/>
-          </a:prstGeom>
-          <a:noFill/>
-        </p:spPr>
-        <p:txBody>
-          <a:bodyPr wrap="square">
-            <a:spAutoFit/>
-          </a:bodyPr>
-          <a:lstStyle/>
-          <a:p>
-            <a:pPr algn="l">
-              <a:spcAft>
-                <a:spcPts val="600"/>
-              </a:spcAft>
-            </a:pPr>
-            <a:r>
-              <a:rPr sz="2800" b="1">
-                <a:solidFill>
-                  <a:srgbClr val="FFFFFF"/>
-                </a:solidFill>
-                <a:latin typeface="Calibri"/>
-              </a:rPr>
-              <a:t>Trace first. Command second. ACK or HOLD.</a:t>
-            </a:r>
-          </a:p>
-        </p:txBody>
-      </p:sp>
-      <p:sp>
-        <p:nvSpPr>
           <p:cNvPr id="7" name="Rectangle 6"/>
           <p:cNvSpPr/>
           <p:nvPr/>
@@ -7044,18 +7575,16 @@
         <p:spPr>
           <a:xfrm>
             <a:off x="411480" y="1280160"/>
-            <a:ext cx="3657600" cy="2057400"/>
+            <a:ext cx="73152" cy="2057400"/>
           </a:xfrm>
           <a:prstGeom prst="rect">
             <a:avLst/>
           </a:prstGeom>
           <a:solidFill>
-            <a:srgbClr val="151B28"/>
+            <a:srgbClr val="1F5EB8"/>
           </a:solidFill>
-          <a:ln w="6350">
-            <a:solidFill>
-              <a:srgbClr val="222C3E"/>
-            </a:solidFill>
+          <a:ln>
+            <a:noFill/>
           </a:ln>
         </p:spPr>
         <p:style>
@@ -7110,7 +7639,7 @@
             <a:r>
               <a:rPr sz="1400" b="1">
                 <a:solidFill>
-                  <a:srgbClr val="00E5FF"/>
+                  <a:srgbClr val="1F5EB8"/>
                 </a:solidFill>
                 <a:latin typeface="Calibri"/>
               </a:rPr>
@@ -7149,7 +7678,7 @@
             <a:r>
               <a:rPr sz="2200" b="1">
                 <a:solidFill>
-                  <a:srgbClr val="FFFFFF"/>
+                  <a:srgbClr val="1A1F2B"/>
                 </a:solidFill>
                 <a:latin typeface="Calibri"/>
               </a:rPr>
@@ -7188,7 +7717,7 @@
             <a:r>
               <a:rPr sz="1500" b="0">
                 <a:solidFill>
-                  <a:srgbClr val="8C9BAE"/>
+                  <a:srgbClr val="5C6775"/>
                 </a:solidFill>
                 <a:latin typeface="Calibri"/>
               </a:rPr>
@@ -7212,11 +7741,11 @@
             <a:avLst/>
           </a:prstGeom>
           <a:solidFill>
-            <a:srgbClr val="151B28"/>
+            <a:srgbClr val="F4F7FB"/>
           </a:solidFill>
           <a:ln w="6350">
             <a:solidFill>
-              <a:srgbClr val="222C3E"/>
+              <a:srgbClr val="D5DCE6"/>
             </a:solidFill>
           </a:ln>
         </p:spPr>
@@ -7244,142 +7773,23 @@
       </p:sp>
       <p:sp>
         <p:nvSpPr>
-          <p:cNvPr id="12" name="TextBox 11"/>
-          <p:cNvSpPr txBox="1"/>
-          <p:nvPr/>
-        </p:nvSpPr>
-        <p:spPr>
-          <a:xfrm>
-            <a:off x="4434840" y="1444752"/>
-            <a:ext cx="3291840" cy="320040"/>
-          </a:xfrm>
-          <a:prstGeom prst="rect">
-            <a:avLst/>
-          </a:prstGeom>
-          <a:noFill/>
-        </p:spPr>
-        <p:txBody>
-          <a:bodyPr wrap="square">
-            <a:spAutoFit/>
-          </a:bodyPr>
-          <a:lstStyle/>
-          <a:p>
-            <a:pPr algn="l">
-              <a:spcAft>
-                <a:spcPts val="600"/>
-              </a:spcAft>
-            </a:pPr>
-            <a:r>
-              <a:rPr sz="1400" b="1">
-                <a:solidFill>
-                  <a:srgbClr val="00E5FF"/>
-                </a:solidFill>
-                <a:latin typeface="Calibri"/>
-              </a:rPr>
-              <a:t>2</a:t>
-            </a:r>
-          </a:p>
-        </p:txBody>
-      </p:sp>
-      <p:sp>
-        <p:nvSpPr>
-          <p:cNvPr id="13" name="TextBox 12"/>
-          <p:cNvSpPr txBox="1"/>
-          <p:nvPr/>
-        </p:nvSpPr>
-        <p:spPr>
-          <a:xfrm>
-            <a:off x="4434840" y="1783080"/>
-            <a:ext cx="3291840" cy="411480"/>
-          </a:xfrm>
-          <a:prstGeom prst="rect">
-            <a:avLst/>
-          </a:prstGeom>
-          <a:noFill/>
-        </p:spPr>
-        <p:txBody>
-          <a:bodyPr wrap="square">
-            <a:spAutoFit/>
-          </a:bodyPr>
-          <a:lstStyle/>
-          <a:p>
-            <a:pPr algn="l">
-              <a:spcAft>
-                <a:spcPts val="600"/>
-              </a:spcAft>
-            </a:pPr>
-            <a:r>
-              <a:rPr sz="2200" b="1">
-                <a:solidFill>
-                  <a:srgbClr val="FFFFFF"/>
-                </a:solidFill>
-                <a:latin typeface="Calibri"/>
-              </a:rPr>
-              <a:t>PENDING</a:t>
-            </a:r>
-          </a:p>
-        </p:txBody>
-      </p:sp>
-      <p:sp>
-        <p:nvSpPr>
-          <p:cNvPr id="14" name="TextBox 13"/>
-          <p:cNvSpPr txBox="1"/>
-          <p:nvPr/>
-        </p:nvSpPr>
-        <p:spPr>
-          <a:xfrm>
-            <a:off x="4434840" y="2331720"/>
-            <a:ext cx="3291840" cy="731520"/>
-          </a:xfrm>
-          <a:prstGeom prst="rect">
-            <a:avLst/>
-          </a:prstGeom>
-          <a:noFill/>
-        </p:spPr>
-        <p:txBody>
-          <a:bodyPr wrap="square">
-            <a:spAutoFit/>
-          </a:bodyPr>
-          <a:lstStyle/>
-          <a:p>
-            <a:pPr algn="l">
-              <a:spcAft>
-                <a:spcPts val="600"/>
-              </a:spcAft>
-            </a:pPr>
-            <a:r>
-              <a:rPr sz="1500" b="0">
-                <a:solidFill>
-                  <a:srgbClr val="8C9BAE"/>
-                </a:solidFill>
-                <a:latin typeface="Calibri"/>
-              </a:rPr>
-              <a:t>SQLite claims (batch, part)</a:t>
-            </a:r>
-          </a:p>
-        </p:txBody>
-      </p:sp>
-      <p:sp>
-        <p:nvSpPr>
-          <p:cNvPr id="15" name="Rectangle 14"/>
+          <p:cNvPr id="12" name="Rectangle 11"/>
           <p:cNvSpPr/>
           <p:nvPr/>
         </p:nvSpPr>
         <p:spPr>
           <a:xfrm>
-            <a:off x="8092440" y="1280160"/>
-            <a:ext cx="3657600" cy="2057400"/>
+            <a:off x="4251960" y="1280160"/>
+            <a:ext cx="73152" cy="2057400"/>
           </a:xfrm>
           <a:prstGeom prst="rect">
             <a:avLst/>
           </a:prstGeom>
           <a:solidFill>
-            <a:srgbClr val="151B28"/>
+            <a:srgbClr val="1F5EB8"/>
           </a:solidFill>
-          <a:ln w="6350">
-            <a:solidFill>
-              <a:srgbClr val="222C3E"/>
-            </a:solidFill>
+          <a:ln>
+            <a:noFill/>
           </a:ln>
         </p:spPr>
         <p:style>
@@ -7406,13 +7816,13 @@
       </p:sp>
       <p:sp>
         <p:nvSpPr>
-          <p:cNvPr id="16" name="TextBox 15"/>
+          <p:cNvPr id="13" name="TextBox 12"/>
           <p:cNvSpPr txBox="1"/>
           <p:nvPr/>
         </p:nvSpPr>
         <p:spPr>
           <a:xfrm>
-            <a:off x="8275320" y="1444752"/>
+            <a:off x="4434840" y="1444752"/>
             <a:ext cx="3291840" cy="320040"/>
           </a:xfrm>
           <a:prstGeom prst="rect">
@@ -7434,24 +7844,24 @@
             <a:r>
               <a:rPr sz="1400" b="1">
                 <a:solidFill>
-                  <a:srgbClr val="00E5FF"/>
-                </a:solidFill>
-                <a:latin typeface="Calibri"/>
-              </a:rPr>
-              <a:t>3</a:t>
-            </a:r>
-          </a:p>
-        </p:txBody>
-      </p:sp>
-      <p:sp>
-        <p:nvSpPr>
-          <p:cNvPr id="17" name="TextBox 16"/>
+                  <a:srgbClr val="1F5EB8"/>
+                </a:solidFill>
+                <a:latin typeface="Calibri"/>
+              </a:rPr>
+              <a:t>2</a:t>
+            </a:r>
+          </a:p>
+        </p:txBody>
+      </p:sp>
+      <p:sp>
+        <p:nvSpPr>
+          <p:cNvPr id="14" name="TextBox 13"/>
           <p:cNvSpPr txBox="1"/>
           <p:nvPr/>
         </p:nvSpPr>
         <p:spPr>
           <a:xfrm>
-            <a:off x="8275320" y="1783080"/>
+            <a:off x="4434840" y="1783080"/>
             <a:ext cx="3291840" cy="411480"/>
           </a:xfrm>
           <a:prstGeom prst="rect">
@@ -7473,24 +7883,24 @@
             <a:r>
               <a:rPr sz="2200" b="1">
                 <a:solidFill>
-                  <a:srgbClr val="FFFFFF"/>
-                </a:solidFill>
-                <a:latin typeface="Calibri"/>
-              </a:rPr>
-              <a:t>PLC</a:t>
-            </a:r>
-          </a:p>
-        </p:txBody>
-      </p:sp>
-      <p:sp>
-        <p:nvSpPr>
-          <p:cNvPr id="18" name="TextBox 17"/>
+                  <a:srgbClr val="1A1F2B"/>
+                </a:solidFill>
+                <a:latin typeface="Calibri"/>
+              </a:rPr>
+              <a:t>PENDING</a:t>
+            </a:r>
+          </a:p>
+        </p:txBody>
+      </p:sp>
+      <p:sp>
+        <p:nvSpPr>
+          <p:cNvPr id="15" name="TextBox 14"/>
           <p:cNvSpPr txBox="1"/>
           <p:nvPr/>
         </p:nvSpPr>
         <p:spPr>
           <a:xfrm>
-            <a:off x="8275320" y="2331720"/>
+            <a:off x="4434840" y="2331720"/>
             <a:ext cx="3291840" cy="731520"/>
           </a:xfrm>
           <a:prstGeom prst="rect">
@@ -7512,35 +7922,35 @@
             <a:r>
               <a:rPr sz="1500" b="0">
                 <a:solidFill>
-                  <a:srgbClr val="8C9BAE"/>
-                </a:solidFill>
-                <a:latin typeface="Calibri"/>
-              </a:rPr>
-              <a:t>One command owner + ACK sequence</a:t>
-            </a:r>
-          </a:p>
-        </p:txBody>
-      </p:sp>
-      <p:sp>
-        <p:nvSpPr>
-          <p:cNvPr id="19" name="Rectangle 18"/>
+                  <a:srgbClr val="5C6775"/>
+                </a:solidFill>
+                <a:latin typeface="Calibri"/>
+              </a:rPr>
+              <a:t>SQLite claims (batch, part)</a:t>
+            </a:r>
+          </a:p>
+        </p:txBody>
+      </p:sp>
+      <p:sp>
+        <p:nvSpPr>
+          <p:cNvPr id="16" name="Rectangle 15"/>
           <p:cNvSpPr/>
           <p:nvPr/>
         </p:nvSpPr>
         <p:spPr>
           <a:xfrm>
-            <a:off x="411480" y="3566160"/>
+            <a:off x="8092440" y="1280160"/>
             <a:ext cx="3657600" cy="2057400"/>
           </a:xfrm>
           <a:prstGeom prst="rect">
             <a:avLst/>
           </a:prstGeom>
           <a:solidFill>
-            <a:srgbClr val="151B28"/>
+            <a:srgbClr val="F4F7FB"/>
           </a:solidFill>
           <a:ln w="6350">
             <a:solidFill>
-              <a:srgbClr val="222C3E"/>
+              <a:srgbClr val="D5DCE6"/>
             </a:solidFill>
           </a:ln>
         </p:spPr>
@@ -7568,142 +7978,23 @@
       </p:sp>
       <p:sp>
         <p:nvSpPr>
-          <p:cNvPr id="20" name="TextBox 19"/>
-          <p:cNvSpPr txBox="1"/>
-          <p:nvPr/>
-        </p:nvSpPr>
-        <p:spPr>
-          <a:xfrm>
-            <a:off x="594360" y="3730752"/>
-            <a:ext cx="3291840" cy="320040"/>
-          </a:xfrm>
-          <a:prstGeom prst="rect">
-            <a:avLst/>
-          </a:prstGeom>
-          <a:noFill/>
-        </p:spPr>
-        <p:txBody>
-          <a:bodyPr wrap="square">
-            <a:spAutoFit/>
-          </a:bodyPr>
-          <a:lstStyle/>
-          <a:p>
-            <a:pPr algn="l">
-              <a:spcAft>
-                <a:spcPts val="600"/>
-              </a:spcAft>
-            </a:pPr>
-            <a:r>
-              <a:rPr sz="1400" b="1">
-                <a:solidFill>
-                  <a:srgbClr val="00E5FF"/>
-                </a:solidFill>
-                <a:latin typeface="Calibri"/>
-              </a:rPr>
-              <a:t>4</a:t>
-            </a:r>
-          </a:p>
-        </p:txBody>
-      </p:sp>
-      <p:sp>
-        <p:nvSpPr>
-          <p:cNvPr id="21" name="TextBox 20"/>
-          <p:cNvSpPr txBox="1"/>
-          <p:nvPr/>
-        </p:nvSpPr>
-        <p:spPr>
-          <a:xfrm>
-            <a:off x="594360" y="4069080"/>
-            <a:ext cx="3291840" cy="411480"/>
-          </a:xfrm>
-          <a:prstGeom prst="rect">
-            <a:avLst/>
-          </a:prstGeom>
-          <a:noFill/>
-        </p:spPr>
-        <p:txBody>
-          <a:bodyPr wrap="square">
-            <a:spAutoFit/>
-          </a:bodyPr>
-          <a:lstStyle/>
-          <a:p>
-            <a:pPr algn="l">
-              <a:spcAft>
-                <a:spcPts val="600"/>
-              </a:spcAft>
-            </a:pPr>
-            <a:r>
-              <a:rPr sz="2200" b="1">
-                <a:solidFill>
-                  <a:srgbClr val="FFFFFF"/>
-                </a:solidFill>
-                <a:latin typeface="Calibri"/>
-              </a:rPr>
-              <a:t>Finalize</a:t>
-            </a:r>
-          </a:p>
-        </p:txBody>
-      </p:sp>
-      <p:sp>
-        <p:nvSpPr>
-          <p:cNvPr id="22" name="TextBox 21"/>
-          <p:cNvSpPr txBox="1"/>
-          <p:nvPr/>
-        </p:nvSpPr>
-        <p:spPr>
-          <a:xfrm>
-            <a:off x="594360" y="4617720"/>
-            <a:ext cx="3291840" cy="731520"/>
-          </a:xfrm>
-          <a:prstGeom prst="rect">
-            <a:avLst/>
-          </a:prstGeom>
-          <a:noFill/>
-        </p:spPr>
-        <p:txBody>
-          <a:bodyPr wrap="square">
-            <a:spAutoFit/>
-          </a:bodyPr>
-          <a:lstStyle/>
-          <a:p>
-            <a:pPr algn="l">
-              <a:spcAft>
-                <a:spcPts val="600"/>
-              </a:spcAft>
-            </a:pPr>
-            <a:r>
-              <a:rPr sz="1500" b="0">
-                <a:solidFill>
-                  <a:srgbClr val="8C9BAE"/>
-                </a:solidFill>
-                <a:latin typeface="Calibri"/>
-              </a:rPr>
-              <a:t>PASS/REJECT, or HOLD if ACK fails</a:t>
-            </a:r>
-          </a:p>
-        </p:txBody>
-      </p:sp>
-      <p:sp>
-        <p:nvSpPr>
-          <p:cNvPr id="23" name="Rectangle 22"/>
+          <p:cNvPr id="17" name="Rectangle 16"/>
           <p:cNvSpPr/>
           <p:nvPr/>
         </p:nvSpPr>
         <p:spPr>
           <a:xfrm>
-            <a:off x="4251960" y="3566160"/>
-            <a:ext cx="3657600" cy="2057400"/>
+            <a:off x="8092440" y="1280160"/>
+            <a:ext cx="73152" cy="2057400"/>
           </a:xfrm>
           <a:prstGeom prst="rect">
             <a:avLst/>
           </a:prstGeom>
           <a:solidFill>
-            <a:srgbClr val="151B28"/>
+            <a:srgbClr val="1F5EB8"/>
           </a:solidFill>
-          <a:ln w="6350">
-            <a:solidFill>
-              <a:srgbClr val="222C3E"/>
-            </a:solidFill>
+          <a:ln>
+            <a:noFill/>
           </a:ln>
         </p:spPr>
         <p:style>
@@ -7730,13 +8021,13 @@
       </p:sp>
       <p:sp>
         <p:nvSpPr>
-          <p:cNvPr id="24" name="TextBox 23"/>
+          <p:cNvPr id="18" name="TextBox 17"/>
           <p:cNvSpPr txBox="1"/>
           <p:nvPr/>
         </p:nvSpPr>
         <p:spPr>
           <a:xfrm>
-            <a:off x="4434840" y="3730752"/>
+            <a:off x="8275320" y="1444752"/>
             <a:ext cx="3291840" cy="320040"/>
           </a:xfrm>
           <a:prstGeom prst="rect">
@@ -7758,24 +8049,24 @@
             <a:r>
               <a:rPr sz="1400" b="1">
                 <a:solidFill>
-                  <a:srgbClr val="00E5FF"/>
-                </a:solidFill>
-                <a:latin typeface="Calibri"/>
-              </a:rPr>
-              <a:t>5</a:t>
-            </a:r>
-          </a:p>
-        </p:txBody>
-      </p:sp>
-      <p:sp>
-        <p:nvSpPr>
-          <p:cNvPr id="25" name="TextBox 24"/>
+                  <a:srgbClr val="1F5EB8"/>
+                </a:solidFill>
+                <a:latin typeface="Calibri"/>
+              </a:rPr>
+              <a:t>3</a:t>
+            </a:r>
+          </a:p>
+        </p:txBody>
+      </p:sp>
+      <p:sp>
+        <p:nvSpPr>
+          <p:cNvPr id="19" name="TextBox 18"/>
           <p:cNvSpPr txBox="1"/>
           <p:nvPr/>
         </p:nvSpPr>
         <p:spPr>
           <a:xfrm>
-            <a:off x="4434840" y="4069080"/>
+            <a:off x="8275320" y="1783080"/>
             <a:ext cx="3291840" cy="411480"/>
           </a:xfrm>
           <a:prstGeom prst="rect">
@@ -7797,24 +8088,24 @@
             <a:r>
               <a:rPr sz="2200" b="1">
                 <a:solidFill>
-                  <a:srgbClr val="FFFFFF"/>
-                </a:solidFill>
-                <a:latin typeface="Calibri"/>
-              </a:rPr>
-              <a:t>Certificate</a:t>
-            </a:r>
-          </a:p>
-        </p:txBody>
-      </p:sp>
-      <p:sp>
-        <p:nvSpPr>
-          <p:cNvPr id="26" name="TextBox 25"/>
+                  <a:srgbClr val="1A1F2B"/>
+                </a:solidFill>
+                <a:latin typeface="Calibri"/>
+              </a:rPr>
+              <a:t>PLC</a:t>
+            </a:r>
+          </a:p>
+        </p:txBody>
+      </p:sp>
+      <p:sp>
+        <p:nvSpPr>
+          <p:cNvPr id="20" name="TextBox 19"/>
           <p:cNvSpPr txBox="1"/>
           <p:nvPr/>
         </p:nvSpPr>
         <p:spPr>
           <a:xfrm>
-            <a:off x="4434840" y="4617720"/>
+            <a:off x="8275320" y="2331720"/>
             <a:ext cx="3291840" cy="731520"/>
           </a:xfrm>
           <a:prstGeom prst="rect">
@@ -7836,35 +8127,35 @@
             <a:r>
               <a:rPr sz="1500" b="0">
                 <a:solidFill>
-                  <a:srgbClr val="8C9BAE"/>
-                </a:solidFill>
-                <a:latin typeface="Calibri"/>
-              </a:rPr>
-              <a:t>HMAC-SHA256 over canonical payload</a:t>
-            </a:r>
-          </a:p>
-        </p:txBody>
-      </p:sp>
-      <p:sp>
-        <p:nvSpPr>
-          <p:cNvPr id="27" name="Rectangle 26"/>
+                  <a:srgbClr val="5C6775"/>
+                </a:solidFill>
+                <a:latin typeface="Calibri"/>
+              </a:rPr>
+              <a:t>One command owner + ACK sequence</a:t>
+            </a:r>
+          </a:p>
+        </p:txBody>
+      </p:sp>
+      <p:sp>
+        <p:nvSpPr>
+          <p:cNvPr id="21" name="Rectangle 20"/>
           <p:cNvSpPr/>
           <p:nvPr/>
         </p:nvSpPr>
         <p:spPr>
           <a:xfrm>
-            <a:off x="8092440" y="3566160"/>
+            <a:off x="411480" y="3566160"/>
             <a:ext cx="3657600" cy="2057400"/>
           </a:xfrm>
           <a:prstGeom prst="rect">
             <a:avLst/>
           </a:prstGeom>
           <a:solidFill>
-            <a:srgbClr val="151B28"/>
+            <a:srgbClr val="F4F7FB"/>
           </a:solidFill>
           <a:ln w="6350">
             <a:solidFill>
-              <a:srgbClr val="222C3E"/>
+              <a:srgbClr val="D5DCE6"/>
             </a:solidFill>
           </a:ln>
         </p:spPr>
@@ -7892,13 +8183,56 @@
       </p:sp>
       <p:sp>
         <p:nvSpPr>
-          <p:cNvPr id="28" name="TextBox 27"/>
+          <p:cNvPr id="22" name="Rectangle 21"/>
+          <p:cNvSpPr/>
+          <p:nvPr/>
+        </p:nvSpPr>
+        <p:spPr>
+          <a:xfrm>
+            <a:off x="411480" y="3566160"/>
+            <a:ext cx="73152" cy="2057400"/>
+          </a:xfrm>
+          <a:prstGeom prst="rect">
+            <a:avLst/>
+          </a:prstGeom>
+          <a:solidFill>
+            <a:srgbClr val="1F5EB8"/>
+          </a:solidFill>
+          <a:ln>
+            <a:noFill/>
+          </a:ln>
+        </p:spPr>
+        <p:style>
+          <a:lnRef idx="1">
+            <a:schemeClr val="accent1"/>
+          </a:lnRef>
+          <a:fillRef idx="3">
+            <a:schemeClr val="accent1"/>
+          </a:fillRef>
+          <a:effectRef idx="2">
+            <a:schemeClr val="accent1"/>
+          </a:effectRef>
+          <a:fontRef idx="minor">
+            <a:schemeClr val="lt1"/>
+          </a:fontRef>
+        </p:style>
+        <p:txBody>
+          <a:bodyPr rtlCol="0" anchor="ctr"/>
+          <a:lstStyle/>
+          <a:p>
+            <a:pPr algn="ctr"/>
+          </a:p>
+        </p:txBody>
+      </p:sp>
+      <p:sp>
+        <p:nvSpPr>
+          <p:cNvPr id="23" name="TextBox 22"/>
           <p:cNvSpPr txBox="1"/>
           <p:nvPr/>
         </p:nvSpPr>
         <p:spPr>
           <a:xfrm>
-            <a:off x="8275320" y="3730752"/>
+            <a:off x="594360" y="3730752"/>
             <a:ext cx="3291840" cy="320040"/>
           </a:xfrm>
           <a:prstGeom prst="rect">
@@ -7920,24 +8254,24 @@
             <a:r>
               <a:rPr sz="1400" b="1">
                 <a:solidFill>
-                  <a:srgbClr val="00E5FF"/>
-                </a:solidFill>
-                <a:latin typeface="Calibri"/>
-              </a:rPr>
-              <a:t>6</a:t>
-            </a:r>
-          </a:p>
-        </p:txBody>
-      </p:sp>
-      <p:sp>
-        <p:nvSpPr>
-          <p:cNvPr id="29" name="TextBox 28"/>
+                  <a:srgbClr val="1F5EB8"/>
+                </a:solidFill>
+                <a:latin typeface="Calibri"/>
+              </a:rPr>
+              <a:t>4</a:t>
+            </a:r>
+          </a:p>
+        </p:txBody>
+      </p:sp>
+      <p:sp>
+        <p:nvSpPr>
+          <p:cNvPr id="24" name="TextBox 23"/>
           <p:cNvSpPr txBox="1"/>
           <p:nvPr/>
         </p:nvSpPr>
         <p:spPr>
           <a:xfrm>
-            <a:off x="8275320" y="4069080"/>
+            <a:off x="594360" y="4069080"/>
             <a:ext cx="3291840" cy="411480"/>
           </a:xfrm>
           <a:prstGeom prst="rect">
@@ -7959,24 +8293,24 @@
             <a:r>
               <a:rPr sz="2200" b="1">
                 <a:solidFill>
-                  <a:srgbClr val="FFFFFF"/>
-                </a:solidFill>
-                <a:latin typeface="Calibri"/>
-              </a:rPr>
-              <a:t>Audit</a:t>
-            </a:r>
-          </a:p>
-        </p:txBody>
-      </p:sp>
-      <p:sp>
-        <p:nvSpPr>
-          <p:cNvPr id="30" name="TextBox 29"/>
+                  <a:srgbClr val="1A1F2B"/>
+                </a:solidFill>
+                <a:latin typeface="Calibri"/>
+              </a:rPr>
+              <a:t>Finalize</a:t>
+            </a:r>
+          </a:p>
+        </p:txBody>
+      </p:sp>
+      <p:sp>
+        <p:nvSpPr>
+          <p:cNvPr id="25" name="TextBox 24"/>
           <p:cNvSpPr txBox="1"/>
           <p:nvPr/>
         </p:nvSpPr>
         <p:spPr>
           <a:xfrm>
-            <a:off x="8275320" y="4617720"/>
+            <a:off x="594360" y="4617720"/>
             <a:ext cx="3291840" cy="731520"/>
           </a:xfrm>
           <a:prstGeom prst="rect">
@@ -7998,25 +8332,113 @@
             <a:r>
               <a:rPr sz="1500" b="0">
                 <a:solidFill>
-                  <a:srgbClr val="8C9BAE"/>
-                </a:solidFill>
-                <a:latin typeface="Calibri"/>
-              </a:rPr>
-              <a:t>Operator confirm phrase is durable</a:t>
-            </a:r>
-          </a:p>
-        </p:txBody>
-      </p:sp>
-      <p:sp>
-        <p:nvSpPr>
-          <p:cNvPr id="31" name="TextBox 30"/>
+                  <a:srgbClr val="5C6775"/>
+                </a:solidFill>
+                <a:latin typeface="Calibri"/>
+              </a:rPr>
+              <a:t>PASS/REJECT, or HOLD if ACK fails</a:t>
+            </a:r>
+          </a:p>
+        </p:txBody>
+      </p:sp>
+      <p:sp>
+        <p:nvSpPr>
+          <p:cNvPr id="26" name="Rectangle 25"/>
+          <p:cNvSpPr/>
+          <p:nvPr/>
+        </p:nvSpPr>
+        <p:spPr>
+          <a:xfrm>
+            <a:off x="4251960" y="3566160"/>
+            <a:ext cx="3657600" cy="2057400"/>
+          </a:xfrm>
+          <a:prstGeom prst="rect">
+            <a:avLst/>
+          </a:prstGeom>
+          <a:solidFill>
+            <a:srgbClr val="F4F7FB"/>
+          </a:solidFill>
+          <a:ln w="6350">
+            <a:solidFill>
+              <a:srgbClr val="D5DCE6"/>
+            </a:solidFill>
+          </a:ln>
+        </p:spPr>
+        <p:style>
+          <a:lnRef idx="1">
+            <a:schemeClr val="accent1"/>
+          </a:lnRef>
+          <a:fillRef idx="3">
+            <a:schemeClr val="accent1"/>
+          </a:fillRef>
+          <a:effectRef idx="2">
+            <a:schemeClr val="accent1"/>
+          </a:effectRef>
+          <a:fontRef idx="minor">
+            <a:schemeClr val="lt1"/>
+          </a:fontRef>
+        </p:style>
+        <p:txBody>
+          <a:bodyPr rtlCol="0" anchor="ctr"/>
+          <a:lstStyle/>
+          <a:p>
+            <a:pPr algn="ctr"/>
+          </a:p>
+        </p:txBody>
+      </p:sp>
+      <p:sp>
+        <p:nvSpPr>
+          <p:cNvPr id="27" name="Rectangle 26"/>
+          <p:cNvSpPr/>
+          <p:nvPr/>
+        </p:nvSpPr>
+        <p:spPr>
+          <a:xfrm>
+            <a:off x="4251960" y="3566160"/>
+            <a:ext cx="73152" cy="2057400"/>
+          </a:xfrm>
+          <a:prstGeom prst="rect">
+            <a:avLst/>
+          </a:prstGeom>
+          <a:solidFill>
+            <a:srgbClr val="1F5EB8"/>
+          </a:solidFill>
+          <a:ln>
+            <a:noFill/>
+          </a:ln>
+        </p:spPr>
+        <p:style>
+          <a:lnRef idx="1">
+            <a:schemeClr val="accent1"/>
+          </a:lnRef>
+          <a:fillRef idx="3">
+            <a:schemeClr val="accent1"/>
+          </a:fillRef>
+          <a:effectRef idx="2">
+            <a:schemeClr val="accent1"/>
+          </a:effectRef>
+          <a:fontRef idx="minor">
+            <a:schemeClr val="lt1"/>
+          </a:fontRef>
+        </p:style>
+        <p:txBody>
+          <a:bodyPr rtlCol="0" anchor="ctr"/>
+          <a:lstStyle/>
+          <a:p>
+            <a:pPr algn="ctr"/>
+          </a:p>
+        </p:txBody>
+      </p:sp>
+      <p:sp>
+        <p:nvSpPr>
+          <p:cNvPr id="28" name="TextBox 27"/>
           <p:cNvSpPr txBox="1"/>
           <p:nvPr/>
         </p:nvSpPr>
         <p:spPr>
           <a:xfrm>
-            <a:off x="411480" y="6510528"/>
-            <a:ext cx="7772400" cy="256032"/>
+            <a:off x="4434840" y="3730752"/>
+            <a:ext cx="3291840" cy="320040"/>
           </a:xfrm>
           <a:prstGeom prst="rect">
             <a:avLst/>
@@ -8035,27 +8457,27 @@
               </a:spcAft>
             </a:pPr>
             <a:r>
-              <a:rPr sz="1100" b="0">
-                <a:solidFill>
-                  <a:srgbClr val="8C9BAE"/>
-                </a:solidFill>
-                <a:latin typeface="Calibri"/>
-              </a:rPr>
-              <a:t>Team 71  ·  Trịnh Hoàng Tú  ·  HUFLIT  ·  Track 4</a:t>
-            </a:r>
-          </a:p>
-        </p:txBody>
-      </p:sp>
-      <p:sp>
-        <p:nvSpPr>
-          <p:cNvPr id="32" name="TextBox 31"/>
+              <a:rPr sz="1400" b="1">
+                <a:solidFill>
+                  <a:srgbClr val="1F5EB8"/>
+                </a:solidFill>
+                <a:latin typeface="Calibri"/>
+              </a:rPr>
+              <a:t>5</a:t>
+            </a:r>
+          </a:p>
+        </p:txBody>
+      </p:sp>
+      <p:sp>
+        <p:nvSpPr>
+          <p:cNvPr id="29" name="TextBox 28"/>
           <p:cNvSpPr txBox="1"/>
           <p:nvPr/>
         </p:nvSpPr>
         <p:spPr>
           <a:xfrm>
-            <a:off x="9692640" y="6510528"/>
-            <a:ext cx="2011680" cy="256032"/>
+            <a:off x="4434840" y="4069080"/>
+            <a:ext cx="3291840" cy="411480"/>
           </a:xfrm>
           <a:prstGeom prst="rect">
             <a:avLst/>
@@ -8068,6 +8490,328 @@
           </a:bodyPr>
           <a:lstStyle/>
           <a:p>
+            <a:pPr algn="l">
+              <a:spcAft>
+                <a:spcPts val="600"/>
+              </a:spcAft>
+            </a:pPr>
+            <a:r>
+              <a:rPr sz="2200" b="1">
+                <a:solidFill>
+                  <a:srgbClr val="1A1F2B"/>
+                </a:solidFill>
+                <a:latin typeface="Calibri"/>
+              </a:rPr>
+              <a:t>Certificate</a:t>
+            </a:r>
+          </a:p>
+        </p:txBody>
+      </p:sp>
+      <p:sp>
+        <p:nvSpPr>
+          <p:cNvPr id="30" name="TextBox 29"/>
+          <p:cNvSpPr txBox="1"/>
+          <p:nvPr/>
+        </p:nvSpPr>
+        <p:spPr>
+          <a:xfrm>
+            <a:off x="4434840" y="4617720"/>
+            <a:ext cx="3291840" cy="731520"/>
+          </a:xfrm>
+          <a:prstGeom prst="rect">
+            <a:avLst/>
+          </a:prstGeom>
+          <a:noFill/>
+        </p:spPr>
+        <p:txBody>
+          <a:bodyPr wrap="square">
+            <a:spAutoFit/>
+          </a:bodyPr>
+          <a:lstStyle/>
+          <a:p>
+            <a:pPr algn="l">
+              <a:spcAft>
+                <a:spcPts val="600"/>
+              </a:spcAft>
+            </a:pPr>
+            <a:r>
+              <a:rPr sz="1500" b="0">
+                <a:solidFill>
+                  <a:srgbClr val="5C6775"/>
+                </a:solidFill>
+                <a:latin typeface="Calibri"/>
+              </a:rPr>
+              <a:t>HMAC-SHA256 over canonical payload</a:t>
+            </a:r>
+          </a:p>
+        </p:txBody>
+      </p:sp>
+      <p:sp>
+        <p:nvSpPr>
+          <p:cNvPr id="31" name="Rectangle 30"/>
+          <p:cNvSpPr/>
+          <p:nvPr/>
+        </p:nvSpPr>
+        <p:spPr>
+          <a:xfrm>
+            <a:off x="8092440" y="3566160"/>
+            <a:ext cx="3657600" cy="2057400"/>
+          </a:xfrm>
+          <a:prstGeom prst="rect">
+            <a:avLst/>
+          </a:prstGeom>
+          <a:solidFill>
+            <a:srgbClr val="F4F7FB"/>
+          </a:solidFill>
+          <a:ln w="6350">
+            <a:solidFill>
+              <a:srgbClr val="D5DCE6"/>
+            </a:solidFill>
+          </a:ln>
+        </p:spPr>
+        <p:style>
+          <a:lnRef idx="1">
+            <a:schemeClr val="accent1"/>
+          </a:lnRef>
+          <a:fillRef idx="3">
+            <a:schemeClr val="accent1"/>
+          </a:fillRef>
+          <a:effectRef idx="2">
+            <a:schemeClr val="accent1"/>
+          </a:effectRef>
+          <a:fontRef idx="minor">
+            <a:schemeClr val="lt1"/>
+          </a:fontRef>
+        </p:style>
+        <p:txBody>
+          <a:bodyPr rtlCol="0" anchor="ctr"/>
+          <a:lstStyle/>
+          <a:p>
+            <a:pPr algn="ctr"/>
+          </a:p>
+        </p:txBody>
+      </p:sp>
+      <p:sp>
+        <p:nvSpPr>
+          <p:cNvPr id="32" name="Rectangle 31"/>
+          <p:cNvSpPr/>
+          <p:nvPr/>
+        </p:nvSpPr>
+        <p:spPr>
+          <a:xfrm>
+            <a:off x="8092440" y="3566160"/>
+            <a:ext cx="73152" cy="2057400"/>
+          </a:xfrm>
+          <a:prstGeom prst="rect">
+            <a:avLst/>
+          </a:prstGeom>
+          <a:solidFill>
+            <a:srgbClr val="1F5EB8"/>
+          </a:solidFill>
+          <a:ln>
+            <a:noFill/>
+          </a:ln>
+        </p:spPr>
+        <p:style>
+          <a:lnRef idx="1">
+            <a:schemeClr val="accent1"/>
+          </a:lnRef>
+          <a:fillRef idx="3">
+            <a:schemeClr val="accent1"/>
+          </a:fillRef>
+          <a:effectRef idx="2">
+            <a:schemeClr val="accent1"/>
+          </a:effectRef>
+          <a:fontRef idx="minor">
+            <a:schemeClr val="lt1"/>
+          </a:fontRef>
+        </p:style>
+        <p:txBody>
+          <a:bodyPr rtlCol="0" anchor="ctr"/>
+          <a:lstStyle/>
+          <a:p>
+            <a:pPr algn="ctr"/>
+          </a:p>
+        </p:txBody>
+      </p:sp>
+      <p:sp>
+        <p:nvSpPr>
+          <p:cNvPr id="33" name="TextBox 32"/>
+          <p:cNvSpPr txBox="1"/>
+          <p:nvPr/>
+        </p:nvSpPr>
+        <p:spPr>
+          <a:xfrm>
+            <a:off x="8275320" y="3730752"/>
+            <a:ext cx="3291840" cy="320040"/>
+          </a:xfrm>
+          <a:prstGeom prst="rect">
+            <a:avLst/>
+          </a:prstGeom>
+          <a:noFill/>
+        </p:spPr>
+        <p:txBody>
+          <a:bodyPr wrap="square">
+            <a:spAutoFit/>
+          </a:bodyPr>
+          <a:lstStyle/>
+          <a:p>
+            <a:pPr algn="l">
+              <a:spcAft>
+                <a:spcPts val="600"/>
+              </a:spcAft>
+            </a:pPr>
+            <a:r>
+              <a:rPr sz="1400" b="1">
+                <a:solidFill>
+                  <a:srgbClr val="1F5EB8"/>
+                </a:solidFill>
+                <a:latin typeface="Calibri"/>
+              </a:rPr>
+              <a:t>6</a:t>
+            </a:r>
+          </a:p>
+        </p:txBody>
+      </p:sp>
+      <p:sp>
+        <p:nvSpPr>
+          <p:cNvPr id="34" name="TextBox 33"/>
+          <p:cNvSpPr txBox="1"/>
+          <p:nvPr/>
+        </p:nvSpPr>
+        <p:spPr>
+          <a:xfrm>
+            <a:off x="8275320" y="4069080"/>
+            <a:ext cx="3291840" cy="411480"/>
+          </a:xfrm>
+          <a:prstGeom prst="rect">
+            <a:avLst/>
+          </a:prstGeom>
+          <a:noFill/>
+        </p:spPr>
+        <p:txBody>
+          <a:bodyPr wrap="square">
+            <a:spAutoFit/>
+          </a:bodyPr>
+          <a:lstStyle/>
+          <a:p>
+            <a:pPr algn="l">
+              <a:spcAft>
+                <a:spcPts val="600"/>
+              </a:spcAft>
+            </a:pPr>
+            <a:r>
+              <a:rPr sz="2200" b="1">
+                <a:solidFill>
+                  <a:srgbClr val="1A1F2B"/>
+                </a:solidFill>
+                <a:latin typeface="Calibri"/>
+              </a:rPr>
+              <a:t>Audit</a:t>
+            </a:r>
+          </a:p>
+        </p:txBody>
+      </p:sp>
+      <p:sp>
+        <p:nvSpPr>
+          <p:cNvPr id="35" name="TextBox 34"/>
+          <p:cNvSpPr txBox="1"/>
+          <p:nvPr/>
+        </p:nvSpPr>
+        <p:spPr>
+          <a:xfrm>
+            <a:off x="8275320" y="4617720"/>
+            <a:ext cx="3291840" cy="731520"/>
+          </a:xfrm>
+          <a:prstGeom prst="rect">
+            <a:avLst/>
+          </a:prstGeom>
+          <a:noFill/>
+        </p:spPr>
+        <p:txBody>
+          <a:bodyPr wrap="square">
+            <a:spAutoFit/>
+          </a:bodyPr>
+          <a:lstStyle/>
+          <a:p>
+            <a:pPr algn="l">
+              <a:spcAft>
+                <a:spcPts val="600"/>
+              </a:spcAft>
+            </a:pPr>
+            <a:r>
+              <a:rPr sz="1500" b="0">
+                <a:solidFill>
+                  <a:srgbClr val="5C6775"/>
+                </a:solidFill>
+                <a:latin typeface="Calibri"/>
+              </a:rPr>
+              <a:t>Operator confirm phrase is durable</a:t>
+            </a:r>
+          </a:p>
+        </p:txBody>
+      </p:sp>
+      <p:sp>
+        <p:nvSpPr>
+          <p:cNvPr id="36" name="TextBox 35"/>
+          <p:cNvSpPr txBox="1"/>
+          <p:nvPr/>
+        </p:nvSpPr>
+        <p:spPr>
+          <a:xfrm>
+            <a:off x="411480" y="6510528"/>
+            <a:ext cx="7772400" cy="256032"/>
+          </a:xfrm>
+          <a:prstGeom prst="rect">
+            <a:avLst/>
+          </a:prstGeom>
+          <a:noFill/>
+        </p:spPr>
+        <p:txBody>
+          <a:bodyPr wrap="square">
+            <a:spAutoFit/>
+          </a:bodyPr>
+          <a:lstStyle/>
+          <a:p>
+            <a:pPr algn="l">
+              <a:spcAft>
+                <a:spcPts val="600"/>
+              </a:spcAft>
+            </a:pPr>
+            <a:r>
+              <a:rPr sz="1100" b="0">
+                <a:solidFill>
+                  <a:srgbClr val="5C6775"/>
+                </a:solidFill>
+                <a:latin typeface="Calibri"/>
+              </a:rPr>
+              <a:t>Team 71  ·  Trịnh Hoàng Tú  ·  HUFLIT  ·  Track 4</a:t>
+            </a:r>
+          </a:p>
+        </p:txBody>
+      </p:sp>
+      <p:sp>
+        <p:nvSpPr>
+          <p:cNvPr id="37" name="TextBox 36"/>
+          <p:cNvSpPr txBox="1"/>
+          <p:nvPr/>
+        </p:nvSpPr>
+        <p:spPr>
+          <a:xfrm>
+            <a:off x="9692640" y="6510528"/>
+            <a:ext cx="2011680" cy="256032"/>
+          </a:xfrm>
+          <a:prstGeom prst="rect">
+            <a:avLst/>
+          </a:prstGeom>
+          <a:noFill/>
+        </p:spPr>
+        <p:txBody>
+          <a:bodyPr wrap="square">
+            <a:spAutoFit/>
+          </a:bodyPr>
+          <a:lstStyle/>
+          <a:p>
             <a:pPr algn="r">
               <a:spcAft>
                 <a:spcPts val="600"/>
@@ -8076,7 +8820,7 @@
             <a:r>
               <a:rPr sz="1100" b="1">
                 <a:solidFill>
-                  <a:srgbClr val="8C9BAE"/>
+                  <a:srgbClr val="5C6775"/>
                 </a:solidFill>
                 <a:latin typeface="Calibri"/>
               </a:rPr>
@@ -8118,7 +8862,7 @@
             <a:avLst/>
           </a:prstGeom>
           <a:solidFill>
-            <a:srgbClr val="0A0D14"/>
+            <a:srgbClr val="FFFFFF"/>
           </a:solidFill>
           <a:ln>
             <a:noFill/>
@@ -8154,14 +8898,14 @@
         </p:nvSpPr>
         <p:spPr>
           <a:xfrm>
-            <a:off x="0" y="0"/>
-            <a:ext cx="109728" cy="6858000"/>
+            <a:off x="0" y="6446520"/>
+            <a:ext cx="12191695" cy="12700"/>
           </a:xfrm>
           <a:prstGeom prst="rect">
             <a:avLst/>
           </a:prstGeom>
           <a:solidFill>
-            <a:srgbClr val="00E5FF"/>
+            <a:srgbClr val="D5DCE6"/>
           </a:solidFill>
           <a:ln>
             <a:noFill/>
@@ -8191,23 +8935,103 @@
       </p:sp>
       <p:sp>
         <p:nvSpPr>
-          <p:cNvPr id="4" name="Rectangle 3"/>
+          <p:cNvPr id="4" name="TextBox 3"/>
+          <p:cNvSpPr txBox="1"/>
+          <p:nvPr/>
+        </p:nvSpPr>
+        <p:spPr>
+          <a:xfrm>
+            <a:off x="411480" y="201168"/>
+            <a:ext cx="11338560" cy="292608"/>
+          </a:xfrm>
+          <a:prstGeom prst="rect">
+            <a:avLst/>
+          </a:prstGeom>
+          <a:noFill/>
+        </p:spPr>
+        <p:txBody>
+          <a:bodyPr wrap="square">
+            <a:spAutoFit/>
+          </a:bodyPr>
+          <a:lstStyle/>
+          <a:p>
+            <a:pPr algn="l">
+              <a:spcAft>
+                <a:spcPts val="600"/>
+              </a:spcAft>
+            </a:pPr>
+            <a:r>
+              <a:rPr sz="1200" b="1">
+                <a:solidFill>
+                  <a:srgbClr val="1F5EB8"/>
+                </a:solidFill>
+                <a:latin typeface="Calibri"/>
+              </a:rPr>
+              <a:t>07    |    4:20–5:10</a:t>
+            </a:r>
+          </a:p>
+        </p:txBody>
+      </p:sp>
+      <p:sp>
+        <p:nvSpPr>
+          <p:cNvPr id="5" name="TextBox 4"/>
+          <p:cNvSpPr txBox="1"/>
+          <p:nvPr/>
+        </p:nvSpPr>
+        <p:spPr>
+          <a:xfrm>
+            <a:off x="411480" y="457200"/>
+            <a:ext cx="11338560" cy="822960"/>
+          </a:xfrm>
+          <a:prstGeom prst="rect">
+            <a:avLst/>
+          </a:prstGeom>
+          <a:noFill/>
+        </p:spPr>
+        <p:txBody>
+          <a:bodyPr wrap="square">
+            <a:spAutoFit/>
+          </a:bodyPr>
+          <a:lstStyle/>
+          <a:p>
+            <a:pPr algn="l">
+              <a:spcAft>
+                <a:spcPts val="600"/>
+              </a:spcAft>
+            </a:pPr>
+            <a:r>
+              <a:rPr sz="2400" b="1">
+                <a:solidFill>
+                  <a:srgbClr val="1A1F2B"/>
+                </a:solidFill>
+                <a:latin typeface="Calibri"/>
+              </a:rPr>
+              <a:t>Real optical evidence is reproducible — and bounded.</a:t>
+            </a:r>
+          </a:p>
+        </p:txBody>
+      </p:sp>
+      <p:sp>
+        <p:nvSpPr>
+          <p:cNvPr id="6" name="Rectangle 5"/>
           <p:cNvSpPr/>
           <p:nvPr/>
         </p:nvSpPr>
         <p:spPr>
           <a:xfrm>
-            <a:off x="0" y="6446520"/>
-            <a:ext cx="12191695" cy="411480"/>
+            <a:off x="411480" y="1417320"/>
+            <a:ext cx="2743200" cy="1965960"/>
           </a:xfrm>
           <a:prstGeom prst="rect">
             <a:avLst/>
           </a:prstGeom>
           <a:solidFill>
-            <a:srgbClr val="080B12"/>
+            <a:srgbClr val="F4F7FB"/>
           </a:solidFill>
-          <a:ln>
-            <a:noFill/>
+          <a:ln w="6350">
+            <a:solidFill>
+              <a:srgbClr val="D5DCE6"/>
+            </a:solidFill>
           </a:ln>
         </p:spPr>
         <p:style>
@@ -8234,84 +9058,6 @@
       </p:sp>
       <p:sp>
         <p:nvSpPr>
-          <p:cNvPr id="5" name="TextBox 4"/>
-          <p:cNvSpPr txBox="1"/>
-          <p:nvPr/>
-        </p:nvSpPr>
-        <p:spPr>
-          <a:xfrm>
-            <a:off x="411480" y="201168"/>
-            <a:ext cx="11338560" cy="292608"/>
-          </a:xfrm>
-          <a:prstGeom prst="rect">
-            <a:avLst/>
-          </a:prstGeom>
-          <a:noFill/>
-        </p:spPr>
-        <p:txBody>
-          <a:bodyPr wrap="square">
-            <a:spAutoFit/>
-          </a:bodyPr>
-          <a:lstStyle/>
-          <a:p>
-            <a:pPr algn="l">
-              <a:spcAft>
-                <a:spcPts val="600"/>
-              </a:spcAft>
-            </a:pPr>
-            <a:r>
-              <a:rPr sz="1200" b="1">
-                <a:solidFill>
-                  <a:srgbClr val="00E5FF"/>
-                </a:solidFill>
-                <a:latin typeface="Calibri"/>
-              </a:rPr>
-              <a:t>07    4:20–5:10</a:t>
-            </a:r>
-          </a:p>
-        </p:txBody>
-      </p:sp>
-      <p:sp>
-        <p:nvSpPr>
-          <p:cNvPr id="6" name="TextBox 5"/>
-          <p:cNvSpPr txBox="1"/>
-          <p:nvPr/>
-        </p:nvSpPr>
-        <p:spPr>
-          <a:xfrm>
-            <a:off x="411480" y="457200"/>
-            <a:ext cx="11338560" cy="822960"/>
-          </a:xfrm>
-          <a:prstGeom prst="rect">
-            <a:avLst/>
-          </a:prstGeom>
-          <a:noFill/>
-        </p:spPr>
-        <p:txBody>
-          <a:bodyPr wrap="square">
-            <a:spAutoFit/>
-          </a:bodyPr>
-          <a:lstStyle/>
-          <a:p>
-            <a:pPr algn="l">
-              <a:spcAft>
-                <a:spcPts val="600"/>
-              </a:spcAft>
-            </a:pPr>
-            <a:r>
-              <a:rPr sz="2400" b="1">
-                <a:solidFill>
-                  <a:srgbClr val="FFFFFF"/>
-                </a:solidFill>
-                <a:latin typeface="Calibri"/>
-              </a:rPr>
-              <a:t>Real optical evidence is reproducible — and bounded.</a:t>
-            </a:r>
-          </a:p>
-        </p:txBody>
-      </p:sp>
-      <p:sp>
-        <p:nvSpPr>
           <p:cNvPr id="7" name="Rectangle 6"/>
           <p:cNvSpPr/>
           <p:nvPr/>
@@ -8319,18 +9065,16 @@
         <p:spPr>
           <a:xfrm>
             <a:off x="411480" y="1417320"/>
-            <a:ext cx="2743200" cy="1965960"/>
+            <a:ext cx="73152" cy="1965960"/>
           </a:xfrm>
           <a:prstGeom prst="rect">
             <a:avLst/>
           </a:prstGeom>
           <a:solidFill>
-            <a:srgbClr val="151B28"/>
+            <a:srgbClr val="1F5EB8"/>
           </a:solidFill>
-          <a:ln w="6350">
-            <a:solidFill>
-              <a:srgbClr val="222C3E"/>
-            </a:solidFill>
+          <a:ln>
+            <a:noFill/>
           </a:ln>
         </p:spPr>
         <p:style>
@@ -8385,7 +9129,7 @@
             <a:r>
               <a:rPr sz="1300" b="1">
                 <a:solidFill>
-                  <a:srgbClr val="8C9BAE"/>
+                  <a:srgbClr val="5C6775"/>
                 </a:solidFill>
                 <a:latin typeface="Calibri"/>
               </a:rPr>
@@ -8424,7 +9168,7 @@
             <a:r>
               <a:rPr sz="2800" b="1">
                 <a:solidFill>
-                  <a:srgbClr val="FFFFFF"/>
+                  <a:srgbClr val="1A1F2B"/>
                 </a:solidFill>
                 <a:latin typeface="Calibri"/>
               </a:rPr>
@@ -8463,7 +9207,7 @@
             <a:r>
               <a:rPr sz="1200" b="0">
                 <a:solidFill>
-                  <a:srgbClr val="8C9BAE"/>
+                  <a:srgbClr val="5C6775"/>
                 </a:solidFill>
                 <a:latin typeface="Calibri"/>
               </a:rPr>
@@ -8487,11 +9231,11 @@
             <a:avLst/>
           </a:prstGeom>
           <a:solidFill>
-            <a:srgbClr val="151B28"/>
+            <a:srgbClr val="F4F7FB"/>
           </a:solidFill>
           <a:ln w="6350">
             <a:solidFill>
-              <a:srgbClr val="222C3E"/>
+              <a:srgbClr val="D5DCE6"/>
             </a:solidFill>
           </a:ln>
         </p:spPr>
@@ -8519,142 +9263,23 @@
       </p:sp>
       <p:sp>
         <p:nvSpPr>
-          <p:cNvPr id="12" name="TextBox 11"/>
-          <p:cNvSpPr txBox="1"/>
-          <p:nvPr/>
-        </p:nvSpPr>
-        <p:spPr>
-          <a:xfrm>
-            <a:off x="3429000" y="1536192"/>
-            <a:ext cx="2468880" cy="274320"/>
-          </a:xfrm>
-          <a:prstGeom prst="rect">
-            <a:avLst/>
-          </a:prstGeom>
-          <a:noFill/>
-        </p:spPr>
-        <p:txBody>
-          <a:bodyPr wrap="square">
-            <a:spAutoFit/>
-          </a:bodyPr>
-          <a:lstStyle/>
-          <a:p>
-            <a:pPr algn="l">
-              <a:spcAft>
-                <a:spcPts val="600"/>
-              </a:spcAft>
-            </a:pPr>
-            <a:r>
-              <a:rPr sz="1300" b="1">
-                <a:solidFill>
-                  <a:srgbClr val="8C9BAE"/>
-                </a:solidFill>
-                <a:latin typeface="Calibri"/>
-              </a:rPr>
-              <a:t>RECALL</a:t>
-            </a:r>
-          </a:p>
-        </p:txBody>
-      </p:sp>
-      <p:sp>
-        <p:nvSpPr>
-          <p:cNvPr id="13" name="TextBox 12"/>
-          <p:cNvSpPr txBox="1"/>
-          <p:nvPr/>
-        </p:nvSpPr>
-        <p:spPr>
-          <a:xfrm>
-            <a:off x="3429000" y="1874519"/>
-            <a:ext cx="2468880" cy="502920"/>
-          </a:xfrm>
-          <a:prstGeom prst="rect">
-            <a:avLst/>
-          </a:prstGeom>
-          <a:noFill/>
-        </p:spPr>
-        <p:txBody>
-          <a:bodyPr wrap="square">
-            <a:spAutoFit/>
-          </a:bodyPr>
-          <a:lstStyle/>
-          <a:p>
-            <a:pPr algn="l">
-              <a:spcAft>
-                <a:spcPts val="600"/>
-              </a:spcAft>
-            </a:pPr>
-            <a:r>
-              <a:rPr sz="2800" b="1">
-                <a:solidFill>
-                  <a:srgbClr val="FFFFFF"/>
-                </a:solidFill>
-                <a:latin typeface="Calibri"/>
-              </a:rPr>
-              <a:t>64.2%</a:t>
-            </a:r>
-          </a:p>
-        </p:txBody>
-      </p:sp>
-      <p:sp>
-        <p:nvSpPr>
-          <p:cNvPr id="14" name="TextBox 13"/>
-          <p:cNvSpPr txBox="1"/>
-          <p:nvPr/>
-        </p:nvSpPr>
-        <p:spPr>
-          <a:xfrm>
-            <a:off x="3429000" y="2468880"/>
-            <a:ext cx="2468880" cy="640080"/>
-          </a:xfrm>
-          <a:prstGeom prst="rect">
-            <a:avLst/>
-          </a:prstGeom>
-          <a:noFill/>
-        </p:spPr>
-        <p:txBody>
-          <a:bodyPr wrap="square">
-            <a:spAutoFit/>
-          </a:bodyPr>
-          <a:lstStyle/>
-          <a:p>
-            <a:pPr algn="l">
-              <a:spcAft>
-                <a:spcPts val="600"/>
-              </a:spcAft>
-            </a:pPr>
-            <a:r>
-              <a:rPr sz="1200" b="0">
-                <a:solidFill>
-                  <a:srgbClr val="8C9BAE"/>
-                </a:solidFill>
-                <a:latin typeface="Calibri"/>
-              </a:rPr>
-              <a:t>measured on configured checkpoint</a:t>
-            </a:r>
-          </a:p>
-        </p:txBody>
-      </p:sp>
-      <p:sp>
-        <p:nvSpPr>
-          <p:cNvPr id="15" name="Rectangle 14"/>
+          <p:cNvPr id="12" name="Rectangle 11"/>
           <p:cNvSpPr/>
           <p:nvPr/>
         </p:nvSpPr>
         <p:spPr>
           <a:xfrm>
-            <a:off x="6172200" y="1417320"/>
-            <a:ext cx="2743200" cy="1965960"/>
+            <a:off x="3291840" y="1417320"/>
+            <a:ext cx="73152" cy="1965960"/>
           </a:xfrm>
           <a:prstGeom prst="rect">
             <a:avLst/>
           </a:prstGeom>
           <a:solidFill>
-            <a:srgbClr val="151B28"/>
+            <a:srgbClr val="1F5EB8"/>
           </a:solidFill>
-          <a:ln w="6350">
-            <a:solidFill>
-              <a:srgbClr val="222C3E"/>
-            </a:solidFill>
+          <a:ln>
+            <a:noFill/>
           </a:ln>
         </p:spPr>
         <p:style>
@@ -8681,13 +9306,13 @@
       </p:sp>
       <p:sp>
         <p:nvSpPr>
-          <p:cNvPr id="16" name="TextBox 15"/>
+          <p:cNvPr id="13" name="TextBox 12"/>
           <p:cNvSpPr txBox="1"/>
           <p:nvPr/>
         </p:nvSpPr>
         <p:spPr>
           <a:xfrm>
-            <a:off x="6309360" y="1536192"/>
+            <a:off x="3429000" y="1536192"/>
             <a:ext cx="2468880" cy="274320"/>
           </a:xfrm>
           <a:prstGeom prst="rect">
@@ -8709,24 +9334,24 @@
             <a:r>
               <a:rPr sz="1300" b="1">
                 <a:solidFill>
-                  <a:srgbClr val="8C9BAE"/>
-                </a:solidFill>
-                <a:latin typeface="Calibri"/>
-              </a:rPr>
-              <a:t>mAP50</a:t>
-            </a:r>
-          </a:p>
-        </p:txBody>
-      </p:sp>
-      <p:sp>
-        <p:nvSpPr>
-          <p:cNvPr id="17" name="TextBox 16"/>
+                  <a:srgbClr val="5C6775"/>
+                </a:solidFill>
+                <a:latin typeface="Calibri"/>
+              </a:rPr>
+              <a:t>RECALL</a:t>
+            </a:r>
+          </a:p>
+        </p:txBody>
+      </p:sp>
+      <p:sp>
+        <p:nvSpPr>
+          <p:cNvPr id="14" name="TextBox 13"/>
           <p:cNvSpPr txBox="1"/>
           <p:nvPr/>
         </p:nvSpPr>
         <p:spPr>
           <a:xfrm>
-            <a:off x="6309360" y="1874519"/>
+            <a:off x="3429000" y="1874519"/>
             <a:ext cx="2468880" cy="502920"/>
           </a:xfrm>
           <a:prstGeom prst="rect">
@@ -8748,24 +9373,24 @@
             <a:r>
               <a:rPr sz="2800" b="1">
                 <a:solidFill>
-                  <a:srgbClr val="FFFFFF"/>
-                </a:solidFill>
-                <a:latin typeface="Calibri"/>
-              </a:rPr>
-              <a:t>63.3%</a:t>
-            </a:r>
-          </a:p>
-        </p:txBody>
-      </p:sp>
-      <p:sp>
-        <p:nvSpPr>
-          <p:cNvPr id="18" name="TextBox 17"/>
+                  <a:srgbClr val="1A1F2B"/>
+                </a:solidFill>
+                <a:latin typeface="Calibri"/>
+              </a:rPr>
+              <a:t>64.2%</a:t>
+            </a:r>
+          </a:p>
+        </p:txBody>
+      </p:sp>
+      <p:sp>
+        <p:nvSpPr>
+          <p:cNvPr id="15" name="TextBox 14"/>
           <p:cNvSpPr txBox="1"/>
           <p:nvPr/>
         </p:nvSpPr>
         <p:spPr>
           <a:xfrm>
-            <a:off x="6309360" y="2468880"/>
+            <a:off x="3429000" y="2468880"/>
             <a:ext cx="2468880" cy="640080"/>
           </a:xfrm>
           <a:prstGeom prst="rect">
@@ -8787,7 +9412,7 @@
             <a:r>
               <a:rPr sz="1200" b="0">
                 <a:solidFill>
-                  <a:srgbClr val="8C9BAE"/>
+                  <a:srgbClr val="5C6775"/>
                 </a:solidFill>
                 <a:latin typeface="Calibri"/>
               </a:rPr>
@@ -8798,24 +9423,24 @@
       </p:sp>
       <p:sp>
         <p:nvSpPr>
-          <p:cNvPr id="19" name="Rectangle 18"/>
+          <p:cNvPr id="16" name="Rectangle 15"/>
           <p:cNvSpPr/>
           <p:nvPr/>
         </p:nvSpPr>
         <p:spPr>
           <a:xfrm>
-            <a:off x="9052559" y="1417320"/>
+            <a:off x="6172200" y="1417320"/>
             <a:ext cx="2743200" cy="1965960"/>
           </a:xfrm>
           <a:prstGeom prst="rect">
             <a:avLst/>
           </a:prstGeom>
           <a:solidFill>
-            <a:srgbClr val="151B28"/>
+            <a:srgbClr val="F4F7FB"/>
           </a:solidFill>
           <a:ln w="6350">
             <a:solidFill>
-              <a:srgbClr val="222C3E"/>
+              <a:srgbClr val="D5DCE6"/>
             </a:solidFill>
           </a:ln>
         </p:spPr>
@@ -8843,142 +9468,23 @@
       </p:sp>
       <p:sp>
         <p:nvSpPr>
-          <p:cNvPr id="20" name="TextBox 19"/>
-          <p:cNvSpPr txBox="1"/>
-          <p:nvPr/>
-        </p:nvSpPr>
-        <p:spPr>
-          <a:xfrm>
-            <a:off x="9189719" y="1536192"/>
-            <a:ext cx="2468880" cy="274320"/>
-          </a:xfrm>
-          <a:prstGeom prst="rect">
-            <a:avLst/>
-          </a:prstGeom>
-          <a:noFill/>
-        </p:spPr>
-        <p:txBody>
-          <a:bodyPr wrap="square">
-            <a:spAutoFit/>
-          </a:bodyPr>
-          <a:lstStyle/>
-          <a:p>
-            <a:pPr algn="l">
-              <a:spcAft>
-                <a:spcPts val="600"/>
-              </a:spcAft>
-            </a:pPr>
-            <a:r>
-              <a:rPr sz="1300" b="1">
-                <a:solidFill>
-                  <a:srgbClr val="8C9BAE"/>
-                </a:solidFill>
-                <a:latin typeface="Calibri"/>
-              </a:rPr>
-              <a:t>mAP50-95</a:t>
-            </a:r>
-          </a:p>
-        </p:txBody>
-      </p:sp>
-      <p:sp>
-        <p:nvSpPr>
-          <p:cNvPr id="21" name="TextBox 20"/>
-          <p:cNvSpPr txBox="1"/>
-          <p:nvPr/>
-        </p:nvSpPr>
-        <p:spPr>
-          <a:xfrm>
-            <a:off x="9189719" y="1874519"/>
-            <a:ext cx="2468880" cy="502920"/>
-          </a:xfrm>
-          <a:prstGeom prst="rect">
-            <a:avLst/>
-          </a:prstGeom>
-          <a:noFill/>
-        </p:spPr>
-        <p:txBody>
-          <a:bodyPr wrap="square">
-            <a:spAutoFit/>
-          </a:bodyPr>
-          <a:lstStyle/>
-          <a:p>
-            <a:pPr algn="l">
-              <a:spcAft>
-                <a:spcPts val="600"/>
-              </a:spcAft>
-            </a:pPr>
-            <a:r>
-              <a:rPr sz="2800" b="1">
-                <a:solidFill>
-                  <a:srgbClr val="FFD600"/>
-                </a:solidFill>
-                <a:latin typeface="Calibri"/>
-              </a:rPr>
-              <a:t>35.4%</a:t>
-            </a:r>
-          </a:p>
-        </p:txBody>
-      </p:sp>
-      <p:sp>
-        <p:nvSpPr>
-          <p:cNvPr id="22" name="TextBox 21"/>
-          <p:cNvSpPr txBox="1"/>
-          <p:nvPr/>
-        </p:nvSpPr>
-        <p:spPr>
-          <a:xfrm>
-            <a:off x="9189719" y="2468880"/>
-            <a:ext cx="2468880" cy="640080"/>
-          </a:xfrm>
-          <a:prstGeom prst="rect">
-            <a:avLst/>
-          </a:prstGeom>
-          <a:noFill/>
-        </p:spPr>
-        <p:txBody>
-          <a:bodyPr wrap="square">
-            <a:spAutoFit/>
-          </a:bodyPr>
-          <a:lstStyle/>
-          <a:p>
-            <a:pPr algn="l">
-              <a:spcAft>
-                <a:spcPts val="600"/>
-              </a:spcAft>
-            </a:pPr>
-            <a:r>
-              <a:rPr sz="1200" b="0">
-                <a:solidFill>
-                  <a:srgbClr val="8C9BAE"/>
-                </a:solidFill>
-                <a:latin typeface="Calibri"/>
-              </a:rPr>
-              <a:t>IoU 0.50:0.95</a:t>
-            </a:r>
-          </a:p>
-        </p:txBody>
-      </p:sp>
-      <p:sp>
-        <p:nvSpPr>
-          <p:cNvPr id="23" name="Rectangle 22"/>
+          <p:cNvPr id="17" name="Rectangle 16"/>
           <p:cNvSpPr/>
           <p:nvPr/>
         </p:nvSpPr>
         <p:spPr>
           <a:xfrm>
-            <a:off x="411480" y="3611880"/>
-            <a:ext cx="11338560" cy="2514600"/>
+            <a:off x="6172200" y="1417320"/>
+            <a:ext cx="73152" cy="1965960"/>
           </a:xfrm>
           <a:prstGeom prst="rect">
             <a:avLst/>
           </a:prstGeom>
           <a:solidFill>
-            <a:srgbClr val="151B28"/>
+            <a:srgbClr val="1F5EB8"/>
           </a:solidFill>
-          <a:ln w="6350">
-            <a:solidFill>
-              <a:srgbClr val="222C3E"/>
-            </a:solidFill>
+          <a:ln>
+            <a:noFill/>
           </a:ln>
         </p:spPr>
         <p:style>
@@ -9005,14 +9511,14 @@
       </p:sp>
       <p:sp>
         <p:nvSpPr>
-          <p:cNvPr id="24" name="TextBox 23"/>
+          <p:cNvPr id="18" name="TextBox 17"/>
           <p:cNvSpPr txBox="1"/>
           <p:nvPr/>
         </p:nvSpPr>
         <p:spPr>
           <a:xfrm>
-            <a:off x="640080" y="3794760"/>
-            <a:ext cx="10972800" cy="2194560"/>
+            <a:off x="6309360" y="1536192"/>
+            <a:ext cx="2468880" cy="274320"/>
           </a:xfrm>
           <a:prstGeom prst="rect">
             <a:avLst/>
@@ -9033,57 +9539,25 @@
             <a:r>
               <a:rPr sz="1300" b="1">
                 <a:solidFill>
-                  <a:srgbClr val="00E5FF"/>
-                </a:solidFill>
-                <a:latin typeface="Calibri"/>
-              </a:rPr>
-              <a:t>EVIDENCE IDENTITY</a:t>
-            </a:r>
-          </a:p>
-          <a:p>
-            <a:pPr algn="l">
-              <a:spcAft>
-                <a:spcPts val="1000"/>
-              </a:spcAft>
-            </a:pPr>
-            <a:r>
-              <a:rPr sz="1800" b="1">
-                <a:solidFill>
-                  <a:srgbClr val="FFFFFF"/>
-                </a:solidFill>
-                <a:latin typeface="Calibri"/>
-              </a:rPr>
-              <a:t>88 test images  ·  seed 71  ·  weights f72a8f2b…  ·  dataset 3c3f2773…</a:t>
-            </a:r>
-          </a:p>
-          <a:p>
-            <a:pPr algn="l">
-              <a:spcAft>
-                <a:spcPts val="600"/>
-              </a:spcAft>
-            </a:pPr>
-            <a:r>
-              <a:rPr sz="1500" b="0">
-                <a:solidFill>
-                  <a:srgbClr val="8C9BAE"/>
-                </a:solidFill>
-                <a:latin typeface="Calibri"/>
-              </a:rPr>
-              <a:t>Public real optical image-disjoint split. Not roll-disjoint; not factory qualification.</a:t>
-            </a:r>
-          </a:p>
-        </p:txBody>
-      </p:sp>
-      <p:sp>
-        <p:nvSpPr>
-          <p:cNvPr id="25" name="TextBox 24"/>
+                  <a:srgbClr val="5C6775"/>
+                </a:solidFill>
+                <a:latin typeface="Calibri"/>
+              </a:rPr>
+              <a:t>mAP50</a:t>
+            </a:r>
+          </a:p>
+        </p:txBody>
+      </p:sp>
+      <p:sp>
+        <p:nvSpPr>
+          <p:cNvPr id="19" name="TextBox 18"/>
           <p:cNvSpPr txBox="1"/>
           <p:nvPr/>
         </p:nvSpPr>
         <p:spPr>
           <a:xfrm>
-            <a:off x="411480" y="6510528"/>
-            <a:ext cx="7772400" cy="256032"/>
+            <a:off x="6309360" y="1874519"/>
+            <a:ext cx="2468880" cy="502920"/>
           </a:xfrm>
           <a:prstGeom prst="rect">
             <a:avLst/>
@@ -9102,27 +9576,27 @@
               </a:spcAft>
             </a:pPr>
             <a:r>
-              <a:rPr sz="1100" b="0">
-                <a:solidFill>
-                  <a:srgbClr val="8C9BAE"/>
-                </a:solidFill>
-                <a:latin typeface="Calibri"/>
-              </a:rPr>
-              <a:t>Team 71  ·  Trịnh Hoàng Tú  ·  HUFLIT  ·  Track 4</a:t>
-            </a:r>
-          </a:p>
-        </p:txBody>
-      </p:sp>
-      <p:sp>
-        <p:nvSpPr>
-          <p:cNvPr id="26" name="TextBox 25"/>
+              <a:rPr sz="2800" b="1">
+                <a:solidFill>
+                  <a:srgbClr val="1A1F2B"/>
+                </a:solidFill>
+                <a:latin typeface="Calibri"/>
+              </a:rPr>
+              <a:t>63.3%</a:t>
+            </a:r>
+          </a:p>
+        </p:txBody>
+      </p:sp>
+      <p:sp>
+        <p:nvSpPr>
+          <p:cNvPr id="20" name="TextBox 19"/>
           <p:cNvSpPr txBox="1"/>
           <p:nvPr/>
         </p:nvSpPr>
         <p:spPr>
           <a:xfrm>
-            <a:off x="9692640" y="6510528"/>
-            <a:ext cx="2011680" cy="256032"/>
+            <a:off x="6309360" y="2468880"/>
+            <a:ext cx="2468880" cy="640080"/>
           </a:xfrm>
           <a:prstGeom prst="rect">
             <a:avLst/>
@@ -9135,6 +9609,448 @@
           </a:bodyPr>
           <a:lstStyle/>
           <a:p>
+            <a:pPr algn="l">
+              <a:spcAft>
+                <a:spcPts val="600"/>
+              </a:spcAft>
+            </a:pPr>
+            <a:r>
+              <a:rPr sz="1200" b="0">
+                <a:solidFill>
+                  <a:srgbClr val="5C6775"/>
+                </a:solidFill>
+                <a:latin typeface="Calibri"/>
+              </a:rPr>
+              <a:t>measured on configured checkpoint</a:t>
+            </a:r>
+          </a:p>
+        </p:txBody>
+      </p:sp>
+      <p:sp>
+        <p:nvSpPr>
+          <p:cNvPr id="21" name="Rectangle 20"/>
+          <p:cNvSpPr/>
+          <p:nvPr/>
+        </p:nvSpPr>
+        <p:spPr>
+          <a:xfrm>
+            <a:off x="9052559" y="1417320"/>
+            <a:ext cx="2743200" cy="1965960"/>
+          </a:xfrm>
+          <a:prstGeom prst="rect">
+            <a:avLst/>
+          </a:prstGeom>
+          <a:solidFill>
+            <a:srgbClr val="F4F7FB"/>
+          </a:solidFill>
+          <a:ln w="6350">
+            <a:solidFill>
+              <a:srgbClr val="D5DCE6"/>
+            </a:solidFill>
+          </a:ln>
+        </p:spPr>
+        <p:style>
+          <a:lnRef idx="1">
+            <a:schemeClr val="accent1"/>
+          </a:lnRef>
+          <a:fillRef idx="3">
+            <a:schemeClr val="accent1"/>
+          </a:fillRef>
+          <a:effectRef idx="2">
+            <a:schemeClr val="accent1"/>
+          </a:effectRef>
+          <a:fontRef idx="minor">
+            <a:schemeClr val="lt1"/>
+          </a:fontRef>
+        </p:style>
+        <p:txBody>
+          <a:bodyPr rtlCol="0" anchor="ctr"/>
+          <a:lstStyle/>
+          <a:p>
+            <a:pPr algn="ctr"/>
+          </a:p>
+        </p:txBody>
+      </p:sp>
+      <p:sp>
+        <p:nvSpPr>
+          <p:cNvPr id="22" name="Rectangle 21"/>
+          <p:cNvSpPr/>
+          <p:nvPr/>
+        </p:nvSpPr>
+        <p:spPr>
+          <a:xfrm>
+            <a:off x="9052559" y="1417320"/>
+            <a:ext cx="73152" cy="1965960"/>
+          </a:xfrm>
+          <a:prstGeom prst="rect">
+            <a:avLst/>
+          </a:prstGeom>
+          <a:solidFill>
+            <a:srgbClr val="1F5EB8"/>
+          </a:solidFill>
+          <a:ln>
+            <a:noFill/>
+          </a:ln>
+        </p:spPr>
+        <p:style>
+          <a:lnRef idx="1">
+            <a:schemeClr val="accent1"/>
+          </a:lnRef>
+          <a:fillRef idx="3">
+            <a:schemeClr val="accent1"/>
+          </a:fillRef>
+          <a:effectRef idx="2">
+            <a:schemeClr val="accent1"/>
+          </a:effectRef>
+          <a:fontRef idx="minor">
+            <a:schemeClr val="lt1"/>
+          </a:fontRef>
+        </p:style>
+        <p:txBody>
+          <a:bodyPr rtlCol="0" anchor="ctr"/>
+          <a:lstStyle/>
+          <a:p>
+            <a:pPr algn="ctr"/>
+          </a:p>
+        </p:txBody>
+      </p:sp>
+      <p:sp>
+        <p:nvSpPr>
+          <p:cNvPr id="23" name="TextBox 22"/>
+          <p:cNvSpPr txBox="1"/>
+          <p:nvPr/>
+        </p:nvSpPr>
+        <p:spPr>
+          <a:xfrm>
+            <a:off x="9189719" y="1536192"/>
+            <a:ext cx="2468880" cy="274320"/>
+          </a:xfrm>
+          <a:prstGeom prst="rect">
+            <a:avLst/>
+          </a:prstGeom>
+          <a:noFill/>
+        </p:spPr>
+        <p:txBody>
+          <a:bodyPr wrap="square">
+            <a:spAutoFit/>
+          </a:bodyPr>
+          <a:lstStyle/>
+          <a:p>
+            <a:pPr algn="l">
+              <a:spcAft>
+                <a:spcPts val="600"/>
+              </a:spcAft>
+            </a:pPr>
+            <a:r>
+              <a:rPr sz="1300" b="1">
+                <a:solidFill>
+                  <a:srgbClr val="5C6775"/>
+                </a:solidFill>
+                <a:latin typeface="Calibri"/>
+              </a:rPr>
+              <a:t>mAP50-95</a:t>
+            </a:r>
+          </a:p>
+        </p:txBody>
+      </p:sp>
+      <p:sp>
+        <p:nvSpPr>
+          <p:cNvPr id="24" name="TextBox 23"/>
+          <p:cNvSpPr txBox="1"/>
+          <p:nvPr/>
+        </p:nvSpPr>
+        <p:spPr>
+          <a:xfrm>
+            <a:off x="9189719" y="1874519"/>
+            <a:ext cx="2468880" cy="502920"/>
+          </a:xfrm>
+          <a:prstGeom prst="rect">
+            <a:avLst/>
+          </a:prstGeom>
+          <a:noFill/>
+        </p:spPr>
+        <p:txBody>
+          <a:bodyPr wrap="square">
+            <a:spAutoFit/>
+          </a:bodyPr>
+          <a:lstStyle/>
+          <a:p>
+            <a:pPr algn="l">
+              <a:spcAft>
+                <a:spcPts val="600"/>
+              </a:spcAft>
+            </a:pPr>
+            <a:r>
+              <a:rPr sz="2800" b="1">
+                <a:solidFill>
+                  <a:srgbClr val="C47B00"/>
+                </a:solidFill>
+                <a:latin typeface="Calibri"/>
+              </a:rPr>
+              <a:t>35.4%</a:t>
+            </a:r>
+          </a:p>
+        </p:txBody>
+      </p:sp>
+      <p:sp>
+        <p:nvSpPr>
+          <p:cNvPr id="25" name="TextBox 24"/>
+          <p:cNvSpPr txBox="1"/>
+          <p:nvPr/>
+        </p:nvSpPr>
+        <p:spPr>
+          <a:xfrm>
+            <a:off x="9189719" y="2468880"/>
+            <a:ext cx="2468880" cy="640080"/>
+          </a:xfrm>
+          <a:prstGeom prst="rect">
+            <a:avLst/>
+          </a:prstGeom>
+          <a:noFill/>
+        </p:spPr>
+        <p:txBody>
+          <a:bodyPr wrap="square">
+            <a:spAutoFit/>
+          </a:bodyPr>
+          <a:lstStyle/>
+          <a:p>
+            <a:pPr algn="l">
+              <a:spcAft>
+                <a:spcPts val="600"/>
+              </a:spcAft>
+            </a:pPr>
+            <a:r>
+              <a:rPr sz="1200" b="0">
+                <a:solidFill>
+                  <a:srgbClr val="5C6775"/>
+                </a:solidFill>
+                <a:latin typeface="Calibri"/>
+              </a:rPr>
+              <a:t>IoU 0.50:0.95</a:t>
+            </a:r>
+          </a:p>
+        </p:txBody>
+      </p:sp>
+      <p:sp>
+        <p:nvSpPr>
+          <p:cNvPr id="26" name="Rectangle 25"/>
+          <p:cNvSpPr/>
+          <p:nvPr/>
+        </p:nvSpPr>
+        <p:spPr>
+          <a:xfrm>
+            <a:off x="411480" y="3611880"/>
+            <a:ext cx="11338560" cy="2514600"/>
+          </a:xfrm>
+          <a:prstGeom prst="rect">
+            <a:avLst/>
+          </a:prstGeom>
+          <a:solidFill>
+            <a:srgbClr val="F4F7FB"/>
+          </a:solidFill>
+          <a:ln w="6350">
+            <a:solidFill>
+              <a:srgbClr val="D5DCE6"/>
+            </a:solidFill>
+          </a:ln>
+        </p:spPr>
+        <p:style>
+          <a:lnRef idx="1">
+            <a:schemeClr val="accent1"/>
+          </a:lnRef>
+          <a:fillRef idx="3">
+            <a:schemeClr val="accent1"/>
+          </a:fillRef>
+          <a:effectRef idx="2">
+            <a:schemeClr val="accent1"/>
+          </a:effectRef>
+          <a:fontRef idx="minor">
+            <a:schemeClr val="lt1"/>
+          </a:fontRef>
+        </p:style>
+        <p:txBody>
+          <a:bodyPr rtlCol="0" anchor="ctr"/>
+          <a:lstStyle/>
+          <a:p>
+            <a:pPr algn="ctr"/>
+          </a:p>
+        </p:txBody>
+      </p:sp>
+      <p:sp>
+        <p:nvSpPr>
+          <p:cNvPr id="27" name="Rectangle 26"/>
+          <p:cNvSpPr/>
+          <p:nvPr/>
+        </p:nvSpPr>
+        <p:spPr>
+          <a:xfrm>
+            <a:off x="411480" y="3611880"/>
+            <a:ext cx="73152" cy="2514600"/>
+          </a:xfrm>
+          <a:prstGeom prst="rect">
+            <a:avLst/>
+          </a:prstGeom>
+          <a:solidFill>
+            <a:srgbClr val="1F5EB8"/>
+          </a:solidFill>
+          <a:ln>
+            <a:noFill/>
+          </a:ln>
+        </p:spPr>
+        <p:style>
+          <a:lnRef idx="1">
+            <a:schemeClr val="accent1"/>
+          </a:lnRef>
+          <a:fillRef idx="3">
+            <a:schemeClr val="accent1"/>
+          </a:fillRef>
+          <a:effectRef idx="2">
+            <a:schemeClr val="accent1"/>
+          </a:effectRef>
+          <a:fontRef idx="minor">
+            <a:schemeClr val="lt1"/>
+          </a:fontRef>
+        </p:style>
+        <p:txBody>
+          <a:bodyPr rtlCol="0" anchor="ctr"/>
+          <a:lstStyle/>
+          <a:p>
+            <a:pPr algn="ctr"/>
+          </a:p>
+        </p:txBody>
+      </p:sp>
+      <p:sp>
+        <p:nvSpPr>
+          <p:cNvPr id="28" name="TextBox 27"/>
+          <p:cNvSpPr txBox="1"/>
+          <p:nvPr/>
+        </p:nvSpPr>
+        <p:spPr>
+          <a:xfrm>
+            <a:off x="640080" y="3794760"/>
+            <a:ext cx="10972800" cy="2194560"/>
+          </a:xfrm>
+          <a:prstGeom prst="rect">
+            <a:avLst/>
+          </a:prstGeom>
+          <a:noFill/>
+        </p:spPr>
+        <p:txBody>
+          <a:bodyPr wrap="square">
+            <a:spAutoFit/>
+          </a:bodyPr>
+          <a:lstStyle/>
+          <a:p>
+            <a:pPr algn="l">
+              <a:spcAft>
+                <a:spcPts val="600"/>
+              </a:spcAft>
+            </a:pPr>
+            <a:r>
+              <a:rPr sz="1300" b="1">
+                <a:solidFill>
+                  <a:srgbClr val="1F5EB8"/>
+                </a:solidFill>
+                <a:latin typeface="Calibri"/>
+              </a:rPr>
+              <a:t>EVIDENCE IDENTITY</a:t>
+            </a:r>
+          </a:p>
+          <a:p>
+            <a:pPr algn="l">
+              <a:spcAft>
+                <a:spcPts val="1000"/>
+              </a:spcAft>
+            </a:pPr>
+            <a:r>
+              <a:rPr sz="1800" b="1">
+                <a:solidFill>
+                  <a:srgbClr val="1A1F2B"/>
+                </a:solidFill>
+                <a:latin typeface="Calibri"/>
+              </a:rPr>
+              <a:t>88 test images  ·  seed 71  ·  weights f72a8f2b…  ·  dataset 3c3f2773…</a:t>
+            </a:r>
+          </a:p>
+          <a:p>
+            <a:pPr algn="l">
+              <a:spcAft>
+                <a:spcPts val="600"/>
+              </a:spcAft>
+            </a:pPr>
+            <a:r>
+              <a:rPr sz="1500" b="0">
+                <a:solidFill>
+                  <a:srgbClr val="5C6775"/>
+                </a:solidFill>
+                <a:latin typeface="Calibri"/>
+              </a:rPr>
+              <a:t>Public real optical image-disjoint split. Not roll-disjoint; not factory qualification.</a:t>
+            </a:r>
+          </a:p>
+        </p:txBody>
+      </p:sp>
+      <p:sp>
+        <p:nvSpPr>
+          <p:cNvPr id="29" name="TextBox 28"/>
+          <p:cNvSpPr txBox="1"/>
+          <p:nvPr/>
+        </p:nvSpPr>
+        <p:spPr>
+          <a:xfrm>
+            <a:off x="411480" y="6510528"/>
+            <a:ext cx="7772400" cy="256032"/>
+          </a:xfrm>
+          <a:prstGeom prst="rect">
+            <a:avLst/>
+          </a:prstGeom>
+          <a:noFill/>
+        </p:spPr>
+        <p:txBody>
+          <a:bodyPr wrap="square">
+            <a:spAutoFit/>
+          </a:bodyPr>
+          <a:lstStyle/>
+          <a:p>
+            <a:pPr algn="l">
+              <a:spcAft>
+                <a:spcPts val="600"/>
+              </a:spcAft>
+            </a:pPr>
+            <a:r>
+              <a:rPr sz="1100" b="0">
+                <a:solidFill>
+                  <a:srgbClr val="5C6775"/>
+                </a:solidFill>
+                <a:latin typeface="Calibri"/>
+              </a:rPr>
+              <a:t>Team 71  ·  Trịnh Hoàng Tú  ·  HUFLIT  ·  Track 4</a:t>
+            </a:r>
+          </a:p>
+        </p:txBody>
+      </p:sp>
+      <p:sp>
+        <p:nvSpPr>
+          <p:cNvPr id="30" name="TextBox 29"/>
+          <p:cNvSpPr txBox="1"/>
+          <p:nvPr/>
+        </p:nvSpPr>
+        <p:spPr>
+          <a:xfrm>
+            <a:off x="9692640" y="6510528"/>
+            <a:ext cx="2011680" cy="256032"/>
+          </a:xfrm>
+          <a:prstGeom prst="rect">
+            <a:avLst/>
+          </a:prstGeom>
+          <a:noFill/>
+        </p:spPr>
+        <p:txBody>
+          <a:bodyPr wrap="square">
+            <a:spAutoFit/>
+          </a:bodyPr>
+          <a:lstStyle/>
+          <a:p>
             <a:pPr algn="r">
               <a:spcAft>
                 <a:spcPts val="600"/>
@@ -9143,7 +10059,7 @@
             <a:r>
               <a:rPr sz="1100" b="1">
                 <a:solidFill>
-                  <a:srgbClr val="8C9BAE"/>
+                  <a:srgbClr val="5C6775"/>
                 </a:solidFill>
                 <a:latin typeface="Calibri"/>
               </a:rPr>
@@ -9185,7 +10101,7 @@
             <a:avLst/>
           </a:prstGeom>
           <a:solidFill>
-            <a:srgbClr val="0A0D14"/>
+            <a:srgbClr val="FFFFFF"/>
           </a:solidFill>
           <a:ln>
             <a:noFill/>
@@ -9221,14 +10137,14 @@
         </p:nvSpPr>
         <p:spPr>
           <a:xfrm>
-            <a:off x="0" y="0"/>
-            <a:ext cx="109728" cy="6858000"/>
+            <a:off x="0" y="6446520"/>
+            <a:ext cx="12191695" cy="12700"/>
           </a:xfrm>
           <a:prstGeom prst="rect">
             <a:avLst/>
           </a:prstGeom>
           <a:solidFill>
-            <a:srgbClr val="00E5FF"/>
+            <a:srgbClr val="D5DCE6"/>
           </a:solidFill>
           <a:ln>
             <a:noFill/>
@@ -9258,23 +10174,103 @@
       </p:sp>
       <p:sp>
         <p:nvSpPr>
-          <p:cNvPr id="4" name="Rectangle 3"/>
+          <p:cNvPr id="4" name="TextBox 3"/>
+          <p:cNvSpPr txBox="1"/>
+          <p:nvPr/>
+        </p:nvSpPr>
+        <p:spPr>
+          <a:xfrm>
+            <a:off x="411480" y="201168"/>
+            <a:ext cx="11338560" cy="292608"/>
+          </a:xfrm>
+          <a:prstGeom prst="rect">
+            <a:avLst/>
+          </a:prstGeom>
+          <a:noFill/>
+        </p:spPr>
+        <p:txBody>
+          <a:bodyPr wrap="square">
+            <a:spAutoFit/>
+          </a:bodyPr>
+          <a:lstStyle/>
+          <a:p>
+            <a:pPr algn="l">
+              <a:spcAft>
+                <a:spcPts val="600"/>
+              </a:spcAft>
+            </a:pPr>
+            <a:r>
+              <a:rPr sz="1200" b="1">
+                <a:solidFill>
+                  <a:srgbClr val="1F5EB8"/>
+                </a:solidFill>
+                <a:latin typeface="Calibri"/>
+              </a:rPr>
+              <a:t>08    |    5:10–6:00</a:t>
+            </a:r>
+          </a:p>
+        </p:txBody>
+      </p:sp>
+      <p:sp>
+        <p:nvSpPr>
+          <p:cNvPr id="5" name="TextBox 4"/>
+          <p:cNvSpPr txBox="1"/>
+          <p:nvPr/>
+        </p:nvSpPr>
+        <p:spPr>
+          <a:xfrm>
+            <a:off x="411480" y="457200"/>
+            <a:ext cx="11338560" cy="411480"/>
+          </a:xfrm>
+          <a:prstGeom prst="rect">
+            <a:avLst/>
+          </a:prstGeom>
+          <a:noFill/>
+        </p:spPr>
+        <p:txBody>
+          <a:bodyPr wrap="square">
+            <a:spAutoFit/>
+          </a:bodyPr>
+          <a:lstStyle/>
+          <a:p>
+            <a:pPr algn="l">
+              <a:spcAft>
+                <a:spcPts val="600"/>
+              </a:spcAft>
+            </a:pPr>
+            <a:r>
+              <a:rPr sz="2600" b="1">
+                <a:solidFill>
+                  <a:srgbClr val="1A1F2B"/>
+                </a:solidFill>
+                <a:latin typeface="Calibri"/>
+              </a:rPr>
+              <a:t>Let the loops run. Then say the close.</a:t>
+            </a:r>
+          </a:p>
+        </p:txBody>
+      </p:sp>
+      <p:sp>
+        <p:nvSpPr>
+          <p:cNvPr id="6" name="Rectangle 5"/>
           <p:cNvSpPr/>
           <p:nvPr/>
         </p:nvSpPr>
         <p:spPr>
           <a:xfrm>
-            <a:off x="0" y="6446520"/>
-            <a:ext cx="12191695" cy="411480"/>
+            <a:off x="411480" y="960120"/>
+            <a:ext cx="5623560" cy="3703320"/>
           </a:xfrm>
           <a:prstGeom prst="rect">
             <a:avLst/>
           </a:prstGeom>
           <a:solidFill>
-            <a:srgbClr val="080B12"/>
+            <a:srgbClr val="F4F7FB"/>
           </a:solidFill>
-          <a:ln>
-            <a:noFill/>
+          <a:ln w="6350">
+            <a:solidFill>
+              <a:srgbClr val="D5DCE6"/>
+            </a:solidFill>
           </a:ln>
         </p:spPr>
         <p:style>
@@ -9301,14 +10297,14 @@
       </p:sp>
       <p:sp>
         <p:nvSpPr>
-          <p:cNvPr id="5" name="TextBox 4"/>
+          <p:cNvPr id="7" name="TextBox 6"/>
           <p:cNvSpPr txBox="1"/>
           <p:nvPr/>
         </p:nvSpPr>
         <p:spPr>
           <a:xfrm>
-            <a:off x="411480" y="201168"/>
-            <a:ext cx="11338560" cy="292608"/>
+            <a:off x="548640" y="1024128"/>
+            <a:ext cx="5349240" cy="256032"/>
           </a:xfrm>
           <a:prstGeom prst="rect">
             <a:avLst/>
@@ -9329,130 +10325,7 @@
             <a:r>
               <a:rPr sz="1200" b="1">
                 <a:solidFill>
-                  <a:srgbClr val="00E5FF"/>
-                </a:solidFill>
-                <a:latin typeface="Calibri"/>
-              </a:rPr>
-              <a:t>08    5:10–6:00</a:t>
-            </a:r>
-          </a:p>
-        </p:txBody>
-      </p:sp>
-      <p:sp>
-        <p:nvSpPr>
-          <p:cNvPr id="6" name="TextBox 5"/>
-          <p:cNvSpPr txBox="1"/>
-          <p:nvPr/>
-        </p:nvSpPr>
-        <p:spPr>
-          <a:xfrm>
-            <a:off x="411480" y="457200"/>
-            <a:ext cx="11338560" cy="411480"/>
-          </a:xfrm>
-          <a:prstGeom prst="rect">
-            <a:avLst/>
-          </a:prstGeom>
-          <a:noFill/>
-        </p:spPr>
-        <p:txBody>
-          <a:bodyPr wrap="square">
-            <a:spAutoFit/>
-          </a:bodyPr>
-          <a:lstStyle/>
-          <a:p>
-            <a:pPr algn="l">
-              <a:spcAft>
-                <a:spcPts val="600"/>
-              </a:spcAft>
-            </a:pPr>
-            <a:r>
-              <a:rPr sz="2600" b="1">
-                <a:solidFill>
-                  <a:srgbClr val="FFFFFF"/>
-                </a:solidFill>
-                <a:latin typeface="Calibri"/>
-              </a:rPr>
-              <a:t>Let the loops run. Then say the close.</a:t>
-            </a:r>
-          </a:p>
-        </p:txBody>
-      </p:sp>
-      <p:sp>
-        <p:nvSpPr>
-          <p:cNvPr id="7" name="Rectangle 6"/>
-          <p:cNvSpPr/>
-          <p:nvPr/>
-        </p:nvSpPr>
-        <p:spPr>
-          <a:xfrm>
-            <a:off x="411480" y="960120"/>
-            <a:ext cx="5623560" cy="3703320"/>
-          </a:xfrm>
-          <a:prstGeom prst="rect">
-            <a:avLst/>
-          </a:prstGeom>
-          <a:solidFill>
-            <a:srgbClr val="151B28"/>
-          </a:solidFill>
-          <a:ln w="6350">
-            <a:solidFill>
-              <a:srgbClr val="222C3E"/>
-            </a:solidFill>
-          </a:ln>
-        </p:spPr>
-        <p:style>
-          <a:lnRef idx="1">
-            <a:schemeClr val="accent1"/>
-          </a:lnRef>
-          <a:fillRef idx="3">
-            <a:schemeClr val="accent1"/>
-          </a:fillRef>
-          <a:effectRef idx="2">
-            <a:schemeClr val="accent1"/>
-          </a:effectRef>
-          <a:fontRef idx="minor">
-            <a:schemeClr val="lt1"/>
-          </a:fontRef>
-        </p:style>
-        <p:txBody>
-          <a:bodyPr rtlCol="0" anchor="ctr"/>
-          <a:lstStyle/>
-          <a:p>
-            <a:pPr algn="ctr"/>
-          </a:p>
-        </p:txBody>
-      </p:sp>
-      <p:sp>
-        <p:nvSpPr>
-          <p:cNvPr id="8" name="TextBox 7"/>
-          <p:cNvSpPr txBox="1"/>
-          <p:nvPr/>
-        </p:nvSpPr>
-        <p:spPr>
-          <a:xfrm>
-            <a:off x="548640" y="1024128"/>
-            <a:ext cx="5349240" cy="256032"/>
-          </a:xfrm>
-          <a:prstGeom prst="rect">
-            <a:avLst/>
-          </a:prstGeom>
-          <a:noFill/>
-        </p:spPr>
-        <p:txBody>
-          <a:bodyPr wrap="square">
-            <a:spAutoFit/>
-          </a:bodyPr>
-          <a:lstStyle/>
-          <a:p>
-            <a:pPr algn="l">
-              <a:spcAft>
-                <a:spcPts val="600"/>
-              </a:spcAft>
-            </a:pPr>
-            <a:r>
-              <a:rPr sz="1200" b="1">
-                <a:solidFill>
-                  <a:srgbClr val="FFD600"/>
+                  <a:srgbClr val="C47B00"/>
                 </a:solidFill>
                 <a:latin typeface="Calibri"/>
               </a:rPr>
@@ -9463,7 +10336,7 @@
       </p:sp>
       <p:pic>
         <p:nvPicPr>
-          <p:cNvPr id="9" name="Picture 8" descr="rgb_hold_replay.gif"/>
+          <p:cNvPr id="8" name="Picture 7" descr="rgb_hold_replay.gif"/>
           <p:cNvPicPr>
             <a:picLocks noChangeAspect="1"/>
           </p:cNvPicPr>
@@ -9487,7 +10360,7 @@
       </p:pic>
       <p:sp>
         <p:nvSpPr>
-          <p:cNvPr id="10" name="Rectangle 9"/>
+          <p:cNvPr id="9" name="Rectangle 8"/>
           <p:cNvSpPr/>
           <p:nvPr/>
         </p:nvSpPr>
@@ -9500,11 +10373,11 @@
             <a:avLst/>
           </a:prstGeom>
           <a:solidFill>
-            <a:srgbClr val="151B28"/>
+            <a:srgbClr val="F4F7FB"/>
           </a:solidFill>
           <a:ln w="6350">
             <a:solidFill>
-              <a:srgbClr val="222C3E"/>
+              <a:srgbClr val="D5DCE6"/>
             </a:solidFill>
           </a:ln>
         </p:spPr>
@@ -9532,7 +10405,7 @@
       </p:sp>
       <p:sp>
         <p:nvSpPr>
-          <p:cNvPr id="11" name="TextBox 10"/>
+          <p:cNvPr id="10" name="TextBox 9"/>
           <p:cNvSpPr txBox="1"/>
           <p:nvPr/>
         </p:nvSpPr>
@@ -9560,7 +10433,7 @@
             <a:r>
               <a:rPr sz="1200" b="1">
                 <a:solidFill>
-                  <a:srgbClr val="00E5FF"/>
+                  <a:srgbClr val="1F5EB8"/>
                 </a:solidFill>
                 <a:latin typeface="Calibri"/>
               </a:rPr>
@@ -9571,7 +10444,7 @@
       </p:sp>
       <p:pic>
         <p:nvPicPr>
-          <p:cNvPr id="12" name="Picture 11" descr="libad_gate.gif"/>
+          <p:cNvPr id="11" name="Picture 10" descr="libad_gate.gif"/>
           <p:cNvPicPr>
             <a:picLocks noChangeAspect="1"/>
           </p:cNvPicPr>
@@ -9595,7 +10468,7 @@
       </p:pic>
       <p:sp>
         <p:nvSpPr>
-          <p:cNvPr id="13" name="TextBox 12"/>
+          <p:cNvPr id="12" name="TextBox 11"/>
           <p:cNvSpPr txBox="1"/>
           <p:nvPr/>
         </p:nvSpPr>
@@ -9623,7 +10496,7 @@
             <a:r>
               <a:rPr sz="1200" b="1">
                 <a:solidFill>
-                  <a:srgbClr val="00E5FF"/>
+                  <a:srgbClr val="1F5EB8"/>
                 </a:solidFill>
                 <a:latin typeface="Calibri"/>
               </a:rPr>
@@ -9639,7 +10512,7 @@
             <a:r>
               <a:rPr sz="2000" b="1">
                 <a:solidFill>
-                  <a:srgbClr val="FFFFFF"/>
+                  <a:srgbClr val="1A1F2B"/>
                 </a:solidFill>
                 <a:latin typeface="Calibri"/>
               </a:rPr>
@@ -9655,7 +10528,7 @@
             <a:r>
               <a:rPr sz="1400" b="0">
                 <a:solidFill>
-                  <a:srgbClr val="8C9BAE"/>
+                  <a:srgbClr val="5C6775"/>
                 </a:solidFill>
                 <a:latin typeface="Calibri"/>
               </a:rPr>
@@ -9666,7 +10539,7 @@
       </p:sp>
       <p:sp>
         <p:nvSpPr>
-          <p:cNvPr id="14" name="TextBox 13"/>
+          <p:cNvPr id="13" name="TextBox 12"/>
           <p:cNvSpPr txBox="1"/>
           <p:nvPr/>
         </p:nvSpPr>
@@ -9694,7 +10567,7 @@
             <a:r>
               <a:rPr sz="1100" b="0">
                 <a:solidFill>
-                  <a:srgbClr val="8C9BAE"/>
+                  <a:srgbClr val="5C6775"/>
                 </a:solidFill>
                 <a:latin typeface="Calibri"/>
               </a:rPr>
@@ -9705,7 +10578,7 @@
       </p:sp>
       <p:sp>
         <p:nvSpPr>
-          <p:cNvPr id="15" name="TextBox 14"/>
+          <p:cNvPr id="14" name="TextBox 13"/>
           <p:cNvSpPr txBox="1"/>
           <p:nvPr/>
         </p:nvSpPr>
@@ -9733,7 +10606,7 @@
             <a:r>
               <a:rPr sz="1100" b="1">
                 <a:solidFill>
-                  <a:srgbClr val="8C9BAE"/>
+                  <a:srgbClr val="5C6775"/>
                 </a:solidFill>
                 <a:latin typeface="Calibri"/>
               </a:rPr>

--- a/SecureCoating-Vision_Final_Defense_6min.pptx
+++ b/SecureCoating-Vision_Final_Defense_6min.pptx
@@ -5326,7 +5326,7 @@
                 </a:solidFill>
                 <a:latin typeface="Calibri"/>
               </a:rPr>
-              <a:t>Official 10-seed ran on a hash-verified mount with the local CPU numpy descriptor (AUROC ~0.70, FPR95 ~0.84). Not DINOv3. Demo cases stay protocol fixtures.</a:t>
+              <a:t>Official mount hashed. Numpy 10-seed ~AUROC 0.70 / FPR95 0.84. Authors' runner interim DINOv2 (1 seed) ~AUROC 0.856 / FPR95 0.716 — still not paper DINOv3. Demo cases stay protocol fixtures.</a:t>
             </a:r>
           </a:p>
           <a:p>
@@ -10532,7 +10532,7 @@
                 </a:solidFill>
                 <a:latin typeface="Calibri"/>
               </a:rPr>
-              <a:t>GIFs loop checked-in artifacts. RGB HOLD is real optical + mock PLC. LIBAD cases are protocol fixtures, not DINOv3. Next gate: HIL, factory calibration, roll-disjoint data.</a:t>
+              <a:t>GIFs loop checked-in artifacts. RGB HOLD is real optical + mock PLC. LIBAD fixtures stay protocol fixtures. Authors' interim is DINOv2 1-seed, not DINOv3. Next gate: HIL, factory calibration, roll-disjoint data.</a:t>
             </a:r>
           </a:p>
         </p:txBody>

--- a/SecureCoating-Vision_Final_Defense_6min.pptx
+++ b/SecureCoating-Vision_Final_Defense_6min.pptx
@@ -6227,7 +6227,7 @@
                 </a:solidFill>
                 <a:latin typeface="Calibri"/>
               </a:rPr>
-              <a:t>INDUSTRIAL MEANING</a:t>
+              <a:t>SOFTWARE SAFETY SEMANTICS</a:t>
             </a:r>
           </a:p>
           <a:p>
@@ -6237,13 +6237,13 @@
               </a:spcAft>
             </a:pPr>
             <a:r>
-              <a:rPr sz="2000" b="1">
+              <a:rPr sz="1800" b="1">
                 <a:solidFill>
                   <a:srgbClr val="1A1F2B"/>
                 </a:solidFill>
                 <a:latin typeface="Calibri"/>
               </a:rPr>
-              <a:t>Uncertainty becomes a controlled operational state, not a hidden false-positive rate.</a:t>
+              <a:t>Uncertainty becomes a controlled software state — not a claim of factory-qualified process safety.</a:t>
             </a:r>
           </a:p>
           <a:p>
@@ -6253,13 +6253,13 @@
               </a:spcAft>
             </a:pPr>
             <a:r>
-              <a:rPr sz="1500" b="0">
+              <a:rPr sz="1400" b="0">
                 <a:solidFill>
                   <a:srgbClr val="5C6775"/>
                 </a:solidFill>
                 <a:latin typeface="Calibri"/>
               </a:rPr>
-              <a:t>Software E-stop latches local interlock and requests PLC channels. It is not a safety-rated hardwired stop.</a:t>
+              <a:t>Local LIBAD adapter gate metrics (escape ~51% / HOLD ~5%) evaluate semantics, not a plant operating point. Software E-stop latches local interlock and requests PLC channels; it is not a safety-rated hardwired stop.</a:t>
             </a:r>
           </a:p>
         </p:txBody>
@@ -7510,13 +7510,13 @@
               </a:spcAft>
             </a:pPr>
             <a:r>
-              <a:rPr sz="2800" b="1">
+              <a:rPr sz="2400" b="1">
                 <a:solidFill>
                   <a:srgbClr val="1A1F2B"/>
                 </a:solidFill>
                 <a:latin typeface="Calibri"/>
               </a:rPr>
-              <a:t>Trace first. Command second. ACK or HOLD.</a:t>
+              <a:t>Intent → command → ACK. HOLD is requested, then confirmed.</a:t>
             </a:r>
           </a:p>
         </p:txBody>
@@ -8297,7 +8297,7 @@
                 </a:solidFill>
                 <a:latin typeface="Calibri"/>
               </a:rPr>
-              <a:t>Finalize</a:t>
+              <a:t>Confirm</a:t>
             </a:r>
           </a:p>
         </p:txBody>
@@ -8336,7 +8336,7 @@
                 </a:solidFill>
                 <a:latin typeface="Calibri"/>
               </a:rPr>
-              <a:t>PASS/REJECT, or HOLD if ACK fails</a:t>
+              <a:t>PASS/REJECT only after ACK; HOLD_REQUESTED ≠ HOLD_CONFIRMED</a:t>
             </a:r>
           </a:p>
         </p:txBody>
@@ -10510,13 +10510,13 @@
               </a:spcAft>
             </a:pPr>
             <a:r>
-              <a:rPr sz="2000" b="1">
+              <a:rPr sz="1800" b="1">
                 <a:solidFill>
                   <a:srgbClr val="1A1F2B"/>
                 </a:solidFill>
                 <a:latin typeface="Calibri"/>
               </a:rPr>
-              <a:t>The model finds defects. The evidence gate controls when the line may act.</a:t>
+              <a:t>The model finds defects. The evidence gate controls when software may authorize a disposition.</a:t>
             </a:r>
           </a:p>
           <a:p>
@@ -10526,13 +10526,13 @@
               </a:spcAft>
             </a:pPr>
             <a:r>
-              <a:rPr sz="1400" b="0">
+              <a:rPr sz="1300" b="0">
                 <a:solidFill>
                   <a:srgbClr val="5C6775"/>
                 </a:solidFill>
                 <a:latin typeface="Calibri"/>
               </a:rPr>
-              <a:t>GIFs loop checked-in artifacts. RGB HOLD is real optical + mock PLC. LIBAD fixtures stay protocol fixtures. Authors' interim is DINOv2 1-seed, not DINOv3. Next gate: HIL, factory calibration, roll-disjoint data.</a:t>
+              <a:t>Registered title states the target Zero-Trust Edge-Cloud architecture; this artifact validates inspection, evidence, and fail-closed contracts — not completed mTLS/RBAC/OT. GIFs loop checked-in artifacts. Authors' interim is DINOv2 1-seed, not DINOv3.</a:t>
             </a:r>
           </a:p>
         </p:txBody>

--- a/SecureCoating-Vision_Final_Defense_6min.pptx
+++ b/SecureCoating-Vision_Final_Defense_6min.pptx
@@ -4608,7 +4608,7 @@
                 </a:solidFill>
                 <a:latin typeface="Calibri"/>
               </a:rPr>
-              <a:t>88 held-out images · mAP50 0.633</a:t>
+              <a:t>88 held-out images · mAP50 0.634</a:t>
             </a:r>
           </a:p>
           <a:p>
@@ -9582,7 +9582,7 @@
                 </a:solidFill>
                 <a:latin typeface="Calibri"/>
               </a:rPr>
-              <a:t>63.3%</a:t>
+              <a:t>63.4%</a:t>
             </a:r>
           </a:p>
         </p:txBody>
@@ -9969,7 +9969,7 @@
                 </a:solidFill>
                 <a:latin typeface="Calibri"/>
               </a:rPr>
-              <a:t>88 test images  ·  seed 71  ·  weights f72a8f2b…  ·  dataset 3c3f2773…</a:t>
+              <a:t>88 test images  ·  seed 71  ·  weights f72a8f2b…  ·  dataset d1db7823…</a:t>
             </a:r>
           </a:p>
           <a:p>

--- a/SecureCoating-Vision_Final_Defense_6min.pptx
+++ b/SecureCoating-Vision_Final_Defense_6min.pptx
@@ -6259,7 +6259,7 @@
                 </a:solidFill>
                 <a:latin typeface="Calibri"/>
               </a:rPr>
-              <a:t>Local LIBAD adapter gate metrics (escape ~51% / HOLD ~5%) evaluate semantics, not a plant operating point. Software E-stop latches local interlock and requests PLC channels; it is not a safety-rated hardwired stop.</a:t>
+              <a:t>Readiness failure → HOLD. PASS/REJECT require confirmed control evidence. No readiness gate, no automatic release. Software E-stop latches local interlock and requests PLC channels; it is not a safety-rated hardwired stop.</a:t>
             </a:r>
           </a:p>
         </p:txBody>
@@ -10350,8 +10350,8 @@
         </p:blipFill>
         <p:spPr>
           <a:xfrm>
-            <a:off x="548640" y="1325880"/>
-            <a:ext cx="5349240" cy="3365564"/>
+            <a:off x="643561" y="1325880"/>
+            <a:ext cx="5159396" cy="3246120"/>
           </a:xfrm>
           <a:prstGeom prst="rect">
             <a:avLst/>
@@ -10458,8 +10458,8 @@
         </p:blipFill>
         <p:spPr>
           <a:xfrm>
-            <a:off x="6309360" y="1325880"/>
-            <a:ext cx="5349240" cy="4041648"/>
+            <a:off x="6835812" y="1325880"/>
+            <a:ext cx="4296335" cy="3246120"/>
           </a:xfrm>
           <a:prstGeom prst="rect">
             <a:avLst/>

--- a/SecureCoating-Vision_Final_Defense_6min.pptx
+++ b/SecureCoating-Vision_Final_Defense_6min.pptx
@@ -3181,40 +3181,16 @@
           </a:p>
         </p:txBody>
       </p:sp>
-      <p:pic>
-        <p:nvPicPr>
-          <p:cNvPr id="4" name="Picture 3" descr="logo.png"/>
-          <p:cNvPicPr>
-            <a:picLocks noChangeAspect="1"/>
-          </p:cNvPicPr>
-          <p:nvPr/>
-        </p:nvPicPr>
-        <p:blipFill>
-          <a:blip r:embed="rId2"/>
-          <a:stretch>
-            <a:fillRect/>
-          </a:stretch>
-        </p:blipFill>
-        <p:spPr>
-          <a:xfrm>
-            <a:off x="411480" y="201168"/>
-            <a:ext cx="4297680" cy="935843"/>
-          </a:xfrm>
-          <a:prstGeom prst="rect">
-            <a:avLst/>
-          </a:prstGeom>
-        </p:spPr>
-      </p:pic>
-      <p:sp>
-        <p:nvSpPr>
-          <p:cNvPr id="5" name="TextBox 4"/>
+      <p:sp>
+        <p:nvSpPr>
+          <p:cNvPr id="4" name="TextBox 3"/>
           <p:cNvSpPr txBox="1"/>
           <p:nvPr/>
         </p:nvSpPr>
         <p:spPr>
           <a:xfrm>
-            <a:off x="6766560" y="201168"/>
-            <a:ext cx="4983480" cy="960120"/>
+            <a:off x="411480" y="320040"/>
+            <a:ext cx="11338560" cy="320040"/>
           </a:xfrm>
           <a:prstGeom prst="rect">
             <a:avLst/>
@@ -3227,65 +3203,33 @@
           </a:bodyPr>
           <a:lstStyle/>
           <a:p>
-            <a:pPr algn="r">
-              <a:spcAft>
-                <a:spcPts val="400"/>
-              </a:spcAft>
-            </a:pPr>
-            <a:r>
-              <a:rPr sz="1100" b="1">
+            <a:pPr algn="l">
+              <a:spcAft>
+                <a:spcPts val="600"/>
+              </a:spcAft>
+            </a:pPr>
+            <a:r>
+              <a:rPr sz="1400" b="1">
                 <a:solidFill>
                   <a:srgbClr val="1F5EB8"/>
                 </a:solidFill>
                 <a:latin typeface="Calibri"/>
               </a:rPr>
-              <a:t>GLOBAL AI + MATERIALS INNOVATION COMPETITION 2026</a:t>
-            </a:r>
-          </a:p>
-          <a:p>
-            <a:pPr algn="r">
-              <a:spcAft>
-                <a:spcPts val="200"/>
-              </a:spcAft>
-            </a:pPr>
-            <a:r>
-              <a:rPr sz="1200" b="1">
-                <a:solidFill>
-                  <a:srgbClr val="1A1F2B"/>
-                </a:solidFill>
-                <a:latin typeface="Calibri"/>
-              </a:rPr>
-              <a:t>TRACK 4  ·  AI + MATERIALS TESTING AND CHARACTERIZATION</a:t>
-            </a:r>
-          </a:p>
-          <a:p>
-            <a:pPr algn="r">
-              <a:spcAft>
-                <a:spcPts val="600"/>
-              </a:spcAft>
-            </a:pPr>
-            <a:r>
-              <a:rPr sz="1200" b="0">
-                <a:solidFill>
-                  <a:srgbClr val="5C6775"/>
-                </a:solidFill>
-                <a:latin typeface="Calibri"/>
-              </a:rPr>
-              <a:t>人工智能 + 材料检测与表征</a:t>
-            </a:r>
-          </a:p>
-        </p:txBody>
-      </p:sp>
-      <p:sp>
-        <p:nvSpPr>
-          <p:cNvPr id="6" name="TextBox 5"/>
+              <a:t>Global AI + Materials Innovation Application Competition 2026</a:t>
+            </a:r>
+          </a:p>
+        </p:txBody>
+      </p:sp>
+      <p:sp>
+        <p:nvSpPr>
+          <p:cNvPr id="5" name="TextBox 4"/>
           <p:cNvSpPr txBox="1"/>
           <p:nvPr/>
         </p:nvSpPr>
         <p:spPr>
           <a:xfrm>
-            <a:off x="411480" y="1325880"/>
-            <a:ext cx="11338560" cy="365760"/>
+            <a:off x="411480" y="960120"/>
+            <a:ext cx="11338560" cy="411480"/>
           </a:xfrm>
           <a:prstGeom prst="rect">
             <a:avLst/>
@@ -3304,26 +3248,26 @@
               </a:spcAft>
             </a:pPr>
             <a:r>
-              <a:rPr sz="2800" b="1">
+              <a:rPr sz="3200" b="1">
                 <a:solidFill>
                   <a:srgbClr val="1A1F2B"/>
                 </a:solidFill>
                 <a:latin typeface="Calibri"/>
               </a:rPr>
-              <a:t>SecureCoating-Vision</a:t>
-            </a:r>
-          </a:p>
-        </p:txBody>
-      </p:sp>
-      <p:sp>
-        <p:nvSpPr>
-          <p:cNvPr id="7" name="TextBox 6"/>
+              <a:t>SecureCoating Vision</a:t>
+            </a:r>
+          </a:p>
+        </p:txBody>
+      </p:sp>
+      <p:sp>
+        <p:nvSpPr>
+          <p:cNvPr id="6" name="TextBox 5"/>
           <p:cNvSpPr txBox="1"/>
           <p:nvPr/>
         </p:nvSpPr>
         <p:spPr>
           <a:xfrm>
-            <a:off x="411480" y="1783080"/>
+            <a:off x="411480" y="1417320"/>
             <a:ext cx="11338560" cy="1234440"/>
           </a:xfrm>
           <a:prstGeom prst="rect">
@@ -3343,7 +3287,7 @@
               </a:spcAft>
             </a:pPr>
             <a:r>
-              <a:rPr sz="1800" b="1">
+              <a:rPr sz="1700" b="1">
                 <a:solidFill>
                   <a:srgbClr val="1A1F2B"/>
                 </a:solidFill>
@@ -3356,13 +3300,13 @@
       </p:sp>
       <p:sp>
         <p:nvSpPr>
-          <p:cNvPr id="8" name="TextBox 7"/>
+          <p:cNvPr id="7" name="TextBox 6"/>
           <p:cNvSpPr txBox="1"/>
           <p:nvPr/>
         </p:nvSpPr>
         <p:spPr>
           <a:xfrm>
-            <a:off x="411480" y="3063240"/>
+            <a:off x="411480" y="2788920"/>
             <a:ext cx="11338560" cy="365760"/>
           </a:xfrm>
           <a:prstGeom prst="rect">
@@ -3395,13 +3339,13 @@
       </p:sp>
       <p:sp>
         <p:nvSpPr>
-          <p:cNvPr id="9" name="Rectangle 8"/>
+          <p:cNvPr id="8" name="Rectangle 7"/>
           <p:cNvSpPr/>
           <p:nvPr/>
         </p:nvSpPr>
         <p:spPr>
           <a:xfrm>
-            <a:off x="411480" y="3520440"/>
+            <a:off x="411480" y="3246120"/>
             <a:ext cx="11338560" cy="12700"/>
           </a:xfrm>
           <a:prstGeom prst="rect">
@@ -3438,102 +3382,14 @@
       </p:sp>
       <p:sp>
         <p:nvSpPr>
-          <p:cNvPr id="10" name="Rectangle 9"/>
-          <p:cNvSpPr/>
-          <p:nvPr/>
-        </p:nvSpPr>
-        <p:spPr>
-          <a:xfrm>
-            <a:off x="411480" y="3749039"/>
-            <a:ext cx="5532120" cy="868680"/>
-          </a:xfrm>
-          <a:prstGeom prst="rect">
-            <a:avLst/>
-          </a:prstGeom>
-          <a:solidFill>
-            <a:srgbClr val="F4F7FB"/>
-          </a:solidFill>
-          <a:ln w="6350">
-            <a:solidFill>
-              <a:srgbClr val="D5DCE6"/>
-            </a:solidFill>
-          </a:ln>
-        </p:spPr>
-        <p:style>
-          <a:lnRef idx="1">
-            <a:schemeClr val="accent1"/>
-          </a:lnRef>
-          <a:fillRef idx="3">
-            <a:schemeClr val="accent1"/>
-          </a:fillRef>
-          <a:effectRef idx="2">
-            <a:schemeClr val="accent1"/>
-          </a:effectRef>
-          <a:fontRef idx="minor">
-            <a:schemeClr val="lt1"/>
-          </a:fontRef>
-        </p:style>
-        <p:txBody>
-          <a:bodyPr rtlCol="0" anchor="ctr"/>
-          <a:lstStyle/>
-          <a:p>
-            <a:pPr algn="ctr"/>
-          </a:p>
-        </p:txBody>
-      </p:sp>
-      <p:sp>
-        <p:nvSpPr>
-          <p:cNvPr id="11" name="Rectangle 10"/>
-          <p:cNvSpPr/>
-          <p:nvPr/>
-        </p:nvSpPr>
-        <p:spPr>
-          <a:xfrm>
-            <a:off x="411480" y="3749039"/>
-            <a:ext cx="73152" cy="868680"/>
-          </a:xfrm>
-          <a:prstGeom prst="rect">
-            <a:avLst/>
-          </a:prstGeom>
-          <a:solidFill>
-            <a:srgbClr val="1F5EB8"/>
-          </a:solidFill>
-          <a:ln>
-            <a:noFill/>
-          </a:ln>
-        </p:spPr>
-        <p:style>
-          <a:lnRef idx="1">
-            <a:schemeClr val="accent1"/>
-          </a:lnRef>
-          <a:fillRef idx="3">
-            <a:schemeClr val="accent1"/>
-          </a:fillRef>
-          <a:effectRef idx="2">
-            <a:schemeClr val="accent1"/>
-          </a:effectRef>
-          <a:fontRef idx="minor">
-            <a:schemeClr val="lt1"/>
-          </a:fontRef>
-        </p:style>
-        <p:txBody>
-          <a:bodyPr rtlCol="0" anchor="ctr"/>
-          <a:lstStyle/>
-          <a:p>
-            <a:pPr algn="ctr"/>
-          </a:p>
-        </p:txBody>
-      </p:sp>
-      <p:sp>
-        <p:nvSpPr>
-          <p:cNvPr id="12" name="TextBox 11"/>
+          <p:cNvPr id="9" name="TextBox 8"/>
           <p:cNvSpPr txBox="1"/>
           <p:nvPr/>
         </p:nvSpPr>
         <p:spPr>
           <a:xfrm>
-            <a:off x="640080" y="3840479"/>
-            <a:ext cx="5120640" cy="228600"/>
+            <a:off x="411480" y="3520440"/>
+            <a:ext cx="11338560" cy="822960"/>
           </a:xfrm>
           <a:prstGeom prst="rect">
             <a:avLst/>
@@ -3548,31 +3404,63 @@
           <a:p>
             <a:pPr algn="l">
               <a:spcAft>
+                <a:spcPts val="800"/>
+              </a:spcAft>
+            </a:pPr>
+            <a:r>
+              <a:rPr sz="1800" b="1">
+                <a:solidFill>
+                  <a:srgbClr val="1A1F2B"/>
+                </a:solidFill>
+                <a:latin typeface="Calibri"/>
+              </a:rPr>
+              <a:t>Team 71 · Track 4 — AI + Materials Testing &amp; Characterization</a:t>
+            </a:r>
+          </a:p>
+          <a:p>
+            <a:pPr algn="l">
+              <a:spcAft>
+                <a:spcPts val="1000"/>
+              </a:spcAft>
+            </a:pPr>
+            <a:r>
+              <a:rPr sz="1800" b="1">
+                <a:solidFill>
+                  <a:srgbClr val="1A1F2B"/>
+                </a:solidFill>
+                <a:latin typeface="Calibri"/>
+              </a:rPr>
+              <a:t>Trinh Hoang Tu · HUFLIT</a:t>
+            </a:r>
+          </a:p>
+          <a:p>
+            <a:pPr algn="l">
+              <a:spcAft>
                 <a:spcPts val="600"/>
               </a:spcAft>
             </a:pPr>
             <a:r>
-              <a:rPr sz="1100" b="1">
+              <a:rPr sz="1300" b="0">
                 <a:solidFill>
                   <a:srgbClr val="5C6775"/>
                 </a:solidFill>
                 <a:latin typeface="Calibri"/>
               </a:rPr>
-              <a:t>TEAM</a:t>
-            </a:r>
-          </a:p>
-        </p:txBody>
-      </p:sp>
-      <p:sp>
-        <p:nvSpPr>
-          <p:cNvPr id="13" name="TextBox 12"/>
+              <a:t>Advisor: Prof. Kris Singh · Visiting Professor, Tsinghua University · Founder &amp; CEO, SRII</a:t>
+            </a:r>
+          </a:p>
+        </p:txBody>
+      </p:sp>
+      <p:sp>
+        <p:nvSpPr>
+          <p:cNvPr id="10" name="TextBox 9"/>
           <p:cNvSpPr txBox="1"/>
           <p:nvPr/>
         </p:nvSpPr>
         <p:spPr>
           <a:xfrm>
-            <a:off x="640080" y="4114799"/>
-            <a:ext cx="5120640" cy="365760"/>
+            <a:off x="411480" y="5074920"/>
+            <a:ext cx="11338560" cy="1005840"/>
           </a:xfrm>
           <a:prstGeom prst="rect">
             <a:avLst/>
@@ -3587,119 +3475,47 @@
           <a:p>
             <a:pPr algn="l">
               <a:spcAft>
+                <a:spcPts val="800"/>
+              </a:spcAft>
+            </a:pPr>
+            <a:r>
+              <a:rPr sz="1400" b="0">
+                <a:solidFill>
+                  <a:srgbClr val="5C6775"/>
+                </a:solidFill>
+                <a:latin typeface="Calibri"/>
+              </a:rPr>
+              <a:t>Registered title describes the target Zero-Trust Edge-Cloud architecture. This prototype validates inspection, evidence gating, and fail-closed contracts — not completed mTLS/RBAC/OT or factory qualification.</a:t>
+            </a:r>
+          </a:p>
+          <a:p>
+            <a:pPr algn="l">
+              <a:spcAft>
                 <a:spcPts val="600"/>
               </a:spcAft>
             </a:pPr>
             <a:r>
-              <a:rPr sz="1600" b="1">
-                <a:solidFill>
-                  <a:srgbClr val="1A1F2B"/>
-                </a:solidFill>
-                <a:latin typeface="Calibri"/>
-              </a:rPr>
-              <a:t>71  ·  Trịnh Hoàng Tú</a:t>
-            </a:r>
-          </a:p>
-        </p:txBody>
-      </p:sp>
-      <p:sp>
-        <p:nvSpPr>
-          <p:cNvPr id="14" name="Rectangle 13"/>
-          <p:cNvSpPr/>
-          <p:nvPr/>
-        </p:nvSpPr>
-        <p:spPr>
-          <a:xfrm>
-            <a:off x="6172200" y="3749039"/>
-            <a:ext cx="5532120" cy="868680"/>
-          </a:xfrm>
-          <a:prstGeom prst="rect">
-            <a:avLst/>
-          </a:prstGeom>
-          <a:solidFill>
-            <a:srgbClr val="F4F7FB"/>
-          </a:solidFill>
-          <a:ln w="6350">
-            <a:solidFill>
-              <a:srgbClr val="D5DCE6"/>
-            </a:solidFill>
-          </a:ln>
-        </p:spPr>
-        <p:style>
-          <a:lnRef idx="1">
-            <a:schemeClr val="accent1"/>
-          </a:lnRef>
-          <a:fillRef idx="3">
-            <a:schemeClr val="accent1"/>
-          </a:fillRef>
-          <a:effectRef idx="2">
-            <a:schemeClr val="accent1"/>
-          </a:effectRef>
-          <a:fontRef idx="minor">
-            <a:schemeClr val="lt1"/>
-          </a:fontRef>
-        </p:style>
-        <p:txBody>
-          <a:bodyPr rtlCol="0" anchor="ctr"/>
-          <a:lstStyle/>
-          <a:p>
-            <a:pPr algn="ctr"/>
-          </a:p>
-        </p:txBody>
-      </p:sp>
-      <p:sp>
-        <p:nvSpPr>
-          <p:cNvPr id="15" name="Rectangle 14"/>
-          <p:cNvSpPr/>
-          <p:nvPr/>
-        </p:nvSpPr>
-        <p:spPr>
-          <a:xfrm>
-            <a:off x="6172200" y="3749039"/>
-            <a:ext cx="73152" cy="868680"/>
-          </a:xfrm>
-          <a:prstGeom prst="rect">
-            <a:avLst/>
-          </a:prstGeom>
-          <a:solidFill>
-            <a:srgbClr val="1F5EB8"/>
-          </a:solidFill>
-          <a:ln>
-            <a:noFill/>
-          </a:ln>
-        </p:spPr>
-        <p:style>
-          <a:lnRef idx="1">
-            <a:schemeClr val="accent1"/>
-          </a:lnRef>
-          <a:fillRef idx="3">
-            <a:schemeClr val="accent1"/>
-          </a:fillRef>
-          <a:effectRef idx="2">
-            <a:schemeClr val="accent1"/>
-          </a:effectRef>
-          <a:fontRef idx="minor">
-            <a:schemeClr val="lt1"/>
-          </a:fontRef>
-        </p:style>
-        <p:txBody>
-          <a:bodyPr rtlCol="0" anchor="ctr"/>
-          <a:lstStyle/>
-          <a:p>
-            <a:pPr algn="ctr"/>
-          </a:p>
-        </p:txBody>
-      </p:sp>
-      <p:sp>
-        <p:nvSpPr>
-          <p:cNvPr id="16" name="TextBox 15"/>
+              <a:rPr sz="1400" b="0">
+                <a:solidFill>
+                  <a:srgbClr val="5C6775"/>
+                </a:solidFill>
+                <a:latin typeface="Calibri"/>
+              </a:rPr>
+              <a:t>Decision objective: prove a defensible inline inspection architecture. Supervised factory pilot is the next gate.</a:t>
+            </a:r>
+          </a:p>
+        </p:txBody>
+      </p:sp>
+      <p:sp>
+        <p:nvSpPr>
+          <p:cNvPr id="11" name="TextBox 10"/>
           <p:cNvSpPr txBox="1"/>
           <p:nvPr/>
         </p:nvSpPr>
         <p:spPr>
           <a:xfrm>
-            <a:off x="6400800" y="3840479"/>
-            <a:ext cx="5120640" cy="228600"/>
+            <a:off x="411480" y="6510528"/>
+            <a:ext cx="7772400" cy="256032"/>
           </a:xfrm>
           <a:prstGeom prst="rect">
             <a:avLst/>
@@ -3718,461 +3534,12 @@
               </a:spcAft>
             </a:pPr>
             <a:r>
-              <a:rPr sz="1100" b="1">
+              <a:rPr sz="1100" b="0">
                 <a:solidFill>
                   <a:srgbClr val="5C6775"/>
                 </a:solidFill>
                 <a:latin typeface="Calibri"/>
               </a:rPr>
-              <a:t>AFFILIATION</a:t>
-            </a:r>
-          </a:p>
-        </p:txBody>
-      </p:sp>
-      <p:sp>
-        <p:nvSpPr>
-          <p:cNvPr id="17" name="TextBox 16"/>
-          <p:cNvSpPr txBox="1"/>
-          <p:nvPr/>
-        </p:nvSpPr>
-        <p:spPr>
-          <a:xfrm>
-            <a:off x="6400800" y="4114799"/>
-            <a:ext cx="5120640" cy="365760"/>
-          </a:xfrm>
-          <a:prstGeom prst="rect">
-            <a:avLst/>
-          </a:prstGeom>
-          <a:noFill/>
-        </p:spPr>
-        <p:txBody>
-          <a:bodyPr wrap="square">
-            <a:spAutoFit/>
-          </a:bodyPr>
-          <a:lstStyle/>
-          <a:p>
-            <a:pPr algn="l">
-              <a:spcAft>
-                <a:spcPts val="600"/>
-              </a:spcAft>
-            </a:pPr>
-            <a:r>
-              <a:rPr sz="1600" b="1">
-                <a:solidFill>
-                  <a:srgbClr val="1A1F2B"/>
-                </a:solidFill>
-                <a:latin typeface="Calibri"/>
-              </a:rPr>
-              <a:t>HUFLIT</a:t>
-            </a:r>
-          </a:p>
-        </p:txBody>
-      </p:sp>
-      <p:sp>
-        <p:nvSpPr>
-          <p:cNvPr id="18" name="Rectangle 17"/>
-          <p:cNvSpPr/>
-          <p:nvPr/>
-        </p:nvSpPr>
-        <p:spPr>
-          <a:xfrm>
-            <a:off x="411480" y="4754879"/>
-            <a:ext cx="5532120" cy="868680"/>
-          </a:xfrm>
-          <a:prstGeom prst="rect">
-            <a:avLst/>
-          </a:prstGeom>
-          <a:solidFill>
-            <a:srgbClr val="F4F7FB"/>
-          </a:solidFill>
-          <a:ln w="6350">
-            <a:solidFill>
-              <a:srgbClr val="D5DCE6"/>
-            </a:solidFill>
-          </a:ln>
-        </p:spPr>
-        <p:style>
-          <a:lnRef idx="1">
-            <a:schemeClr val="accent1"/>
-          </a:lnRef>
-          <a:fillRef idx="3">
-            <a:schemeClr val="accent1"/>
-          </a:fillRef>
-          <a:effectRef idx="2">
-            <a:schemeClr val="accent1"/>
-          </a:effectRef>
-          <a:fontRef idx="minor">
-            <a:schemeClr val="lt1"/>
-          </a:fontRef>
-        </p:style>
-        <p:txBody>
-          <a:bodyPr rtlCol="0" anchor="ctr"/>
-          <a:lstStyle/>
-          <a:p>
-            <a:pPr algn="ctr"/>
-          </a:p>
-        </p:txBody>
-      </p:sp>
-      <p:sp>
-        <p:nvSpPr>
-          <p:cNvPr id="19" name="Rectangle 18"/>
-          <p:cNvSpPr/>
-          <p:nvPr/>
-        </p:nvSpPr>
-        <p:spPr>
-          <a:xfrm>
-            <a:off x="411480" y="4754879"/>
-            <a:ext cx="73152" cy="868680"/>
-          </a:xfrm>
-          <a:prstGeom prst="rect">
-            <a:avLst/>
-          </a:prstGeom>
-          <a:solidFill>
-            <a:srgbClr val="1F5EB8"/>
-          </a:solidFill>
-          <a:ln>
-            <a:noFill/>
-          </a:ln>
-        </p:spPr>
-        <p:style>
-          <a:lnRef idx="1">
-            <a:schemeClr val="accent1"/>
-          </a:lnRef>
-          <a:fillRef idx="3">
-            <a:schemeClr val="accent1"/>
-          </a:fillRef>
-          <a:effectRef idx="2">
-            <a:schemeClr val="accent1"/>
-          </a:effectRef>
-          <a:fontRef idx="minor">
-            <a:schemeClr val="lt1"/>
-          </a:fontRef>
-        </p:style>
-        <p:txBody>
-          <a:bodyPr rtlCol="0" anchor="ctr"/>
-          <a:lstStyle/>
-          <a:p>
-            <a:pPr algn="ctr"/>
-          </a:p>
-        </p:txBody>
-      </p:sp>
-      <p:sp>
-        <p:nvSpPr>
-          <p:cNvPr id="20" name="TextBox 19"/>
-          <p:cNvSpPr txBox="1"/>
-          <p:nvPr/>
-        </p:nvSpPr>
-        <p:spPr>
-          <a:xfrm>
-            <a:off x="640080" y="4846319"/>
-            <a:ext cx="5120640" cy="228600"/>
-          </a:xfrm>
-          <a:prstGeom prst="rect">
-            <a:avLst/>
-          </a:prstGeom>
-          <a:noFill/>
-        </p:spPr>
-        <p:txBody>
-          <a:bodyPr wrap="square">
-            <a:spAutoFit/>
-          </a:bodyPr>
-          <a:lstStyle/>
-          <a:p>
-            <a:pPr algn="l">
-              <a:spcAft>
-                <a:spcPts val="600"/>
-              </a:spcAft>
-            </a:pPr>
-            <a:r>
-              <a:rPr sz="1100" b="1">
-                <a:solidFill>
-                  <a:srgbClr val="5C6775"/>
-                </a:solidFill>
-                <a:latin typeface="Calibri"/>
-              </a:rPr>
-              <a:t>TRACK</a:t>
-            </a:r>
-          </a:p>
-        </p:txBody>
-      </p:sp>
-      <p:sp>
-        <p:nvSpPr>
-          <p:cNvPr id="21" name="TextBox 20"/>
-          <p:cNvSpPr txBox="1"/>
-          <p:nvPr/>
-        </p:nvSpPr>
-        <p:spPr>
-          <a:xfrm>
-            <a:off x="640080" y="5120639"/>
-            <a:ext cx="5120640" cy="365760"/>
-          </a:xfrm>
-          <a:prstGeom prst="rect">
-            <a:avLst/>
-          </a:prstGeom>
-          <a:noFill/>
-        </p:spPr>
-        <p:txBody>
-          <a:bodyPr wrap="square">
-            <a:spAutoFit/>
-          </a:bodyPr>
-          <a:lstStyle/>
-          <a:p>
-            <a:pPr algn="l">
-              <a:spcAft>
-                <a:spcPts val="600"/>
-              </a:spcAft>
-            </a:pPr>
-            <a:r>
-              <a:rPr sz="1600" b="1">
-                <a:solidFill>
-                  <a:srgbClr val="1A1F2B"/>
-                </a:solidFill>
-                <a:latin typeface="Calibri"/>
-              </a:rPr>
-              <a:t>4  ·  AI + Materials Testing and Characterization</a:t>
-            </a:r>
-          </a:p>
-        </p:txBody>
-      </p:sp>
-      <p:sp>
-        <p:nvSpPr>
-          <p:cNvPr id="22" name="Rectangle 21"/>
-          <p:cNvSpPr/>
-          <p:nvPr/>
-        </p:nvSpPr>
-        <p:spPr>
-          <a:xfrm>
-            <a:off x="6172200" y="4754879"/>
-            <a:ext cx="5532120" cy="868680"/>
-          </a:xfrm>
-          <a:prstGeom prst="rect">
-            <a:avLst/>
-          </a:prstGeom>
-          <a:solidFill>
-            <a:srgbClr val="F4F7FB"/>
-          </a:solidFill>
-          <a:ln w="6350">
-            <a:solidFill>
-              <a:srgbClr val="D5DCE6"/>
-            </a:solidFill>
-          </a:ln>
-        </p:spPr>
-        <p:style>
-          <a:lnRef idx="1">
-            <a:schemeClr val="accent1"/>
-          </a:lnRef>
-          <a:fillRef idx="3">
-            <a:schemeClr val="accent1"/>
-          </a:fillRef>
-          <a:effectRef idx="2">
-            <a:schemeClr val="accent1"/>
-          </a:effectRef>
-          <a:fontRef idx="minor">
-            <a:schemeClr val="lt1"/>
-          </a:fontRef>
-        </p:style>
-        <p:txBody>
-          <a:bodyPr rtlCol="0" anchor="ctr"/>
-          <a:lstStyle/>
-          <a:p>
-            <a:pPr algn="ctr"/>
-          </a:p>
-        </p:txBody>
-      </p:sp>
-      <p:sp>
-        <p:nvSpPr>
-          <p:cNvPr id="23" name="Rectangle 22"/>
-          <p:cNvSpPr/>
-          <p:nvPr/>
-        </p:nvSpPr>
-        <p:spPr>
-          <a:xfrm>
-            <a:off x="6172200" y="4754879"/>
-            <a:ext cx="73152" cy="868680"/>
-          </a:xfrm>
-          <a:prstGeom prst="rect">
-            <a:avLst/>
-          </a:prstGeom>
-          <a:solidFill>
-            <a:srgbClr val="1F5EB8"/>
-          </a:solidFill>
-          <a:ln>
-            <a:noFill/>
-          </a:ln>
-        </p:spPr>
-        <p:style>
-          <a:lnRef idx="1">
-            <a:schemeClr val="accent1"/>
-          </a:lnRef>
-          <a:fillRef idx="3">
-            <a:schemeClr val="accent1"/>
-          </a:fillRef>
-          <a:effectRef idx="2">
-            <a:schemeClr val="accent1"/>
-          </a:effectRef>
-          <a:fontRef idx="minor">
-            <a:schemeClr val="lt1"/>
-          </a:fontRef>
-        </p:style>
-        <p:txBody>
-          <a:bodyPr rtlCol="0" anchor="ctr"/>
-          <a:lstStyle/>
-          <a:p>
-            <a:pPr algn="ctr"/>
-          </a:p>
-        </p:txBody>
-      </p:sp>
-      <p:sp>
-        <p:nvSpPr>
-          <p:cNvPr id="24" name="TextBox 23"/>
-          <p:cNvSpPr txBox="1"/>
-          <p:nvPr/>
-        </p:nvSpPr>
-        <p:spPr>
-          <a:xfrm>
-            <a:off x="6400800" y="4846319"/>
-            <a:ext cx="5120640" cy="228600"/>
-          </a:xfrm>
-          <a:prstGeom prst="rect">
-            <a:avLst/>
-          </a:prstGeom>
-          <a:noFill/>
-        </p:spPr>
-        <p:txBody>
-          <a:bodyPr wrap="square">
-            <a:spAutoFit/>
-          </a:bodyPr>
-          <a:lstStyle/>
-          <a:p>
-            <a:pPr algn="l">
-              <a:spcAft>
-                <a:spcPts val="600"/>
-              </a:spcAft>
-            </a:pPr>
-            <a:r>
-              <a:rPr sz="1100" b="1">
-                <a:solidFill>
-                  <a:srgbClr val="5C6775"/>
-                </a:solidFill>
-                <a:latin typeface="Calibri"/>
-              </a:rPr>
-              <a:t>ADVISOR</a:t>
-            </a:r>
-          </a:p>
-        </p:txBody>
-      </p:sp>
-      <p:sp>
-        <p:nvSpPr>
-          <p:cNvPr id="25" name="TextBox 24"/>
-          <p:cNvSpPr txBox="1"/>
-          <p:nvPr/>
-        </p:nvSpPr>
-        <p:spPr>
-          <a:xfrm>
-            <a:off x="6400800" y="5120639"/>
-            <a:ext cx="5120640" cy="365760"/>
-          </a:xfrm>
-          <a:prstGeom prst="rect">
-            <a:avLst/>
-          </a:prstGeom>
-          <a:noFill/>
-        </p:spPr>
-        <p:txBody>
-          <a:bodyPr wrap="square">
-            <a:spAutoFit/>
-          </a:bodyPr>
-          <a:lstStyle/>
-          <a:p>
-            <a:pPr algn="l">
-              <a:spcAft>
-                <a:spcPts val="600"/>
-              </a:spcAft>
-            </a:pPr>
-            <a:r>
-              <a:rPr sz="1600" b="1">
-                <a:solidFill>
-                  <a:srgbClr val="1A1F2B"/>
-                </a:solidFill>
-                <a:latin typeface="Calibri"/>
-              </a:rPr>
-              <a:t>Prof. Kris Singh  ·  SRII / Tsinghua (visiting)</a:t>
-            </a:r>
-          </a:p>
-        </p:txBody>
-      </p:sp>
-      <p:sp>
-        <p:nvSpPr>
-          <p:cNvPr id="26" name="TextBox 25"/>
-          <p:cNvSpPr txBox="1"/>
-          <p:nvPr/>
-        </p:nvSpPr>
-        <p:spPr>
-          <a:xfrm>
-            <a:off x="411480" y="5852160"/>
-            <a:ext cx="11338560" cy="457200"/>
-          </a:xfrm>
-          <a:prstGeom prst="rect">
-            <a:avLst/>
-          </a:prstGeom>
-          <a:noFill/>
-        </p:spPr>
-        <p:txBody>
-          <a:bodyPr wrap="square">
-            <a:spAutoFit/>
-          </a:bodyPr>
-          <a:lstStyle/>
-          <a:p>
-            <a:pPr algn="l">
-              <a:spcAft>
-                <a:spcPts val="600"/>
-              </a:spcAft>
-            </a:pPr>
-            <a:r>
-              <a:rPr sz="1400" b="0">
-                <a:solidFill>
-                  <a:srgbClr val="5C6775"/>
-                </a:solidFill>
-                <a:latin typeface="Calibri"/>
-              </a:rPr>
-              <a:t>Decision objective: prove a defensible inline inspection architecture. Supervised factory pilot is the next gate.</a:t>
-            </a:r>
-          </a:p>
-        </p:txBody>
-      </p:sp>
-      <p:sp>
-        <p:nvSpPr>
-          <p:cNvPr id="27" name="TextBox 26"/>
-          <p:cNvSpPr txBox="1"/>
-          <p:nvPr/>
-        </p:nvSpPr>
-        <p:spPr>
-          <a:xfrm>
-            <a:off x="411480" y="6510528"/>
-            <a:ext cx="7772400" cy="256032"/>
-          </a:xfrm>
-          <a:prstGeom prst="rect">
-            <a:avLst/>
-          </a:prstGeom>
-          <a:noFill/>
-        </p:spPr>
-        <p:txBody>
-          <a:bodyPr wrap="square">
-            <a:spAutoFit/>
-          </a:bodyPr>
-          <a:lstStyle/>
-          <a:p>
-            <a:pPr algn="l">
-              <a:spcAft>
-                <a:spcPts val="600"/>
-              </a:spcAft>
-            </a:pPr>
-            <a:r>
-              <a:rPr sz="1100" b="0">
-                <a:solidFill>
-                  <a:srgbClr val="5C6775"/>
-                </a:solidFill>
-                <a:latin typeface="Calibri"/>
-              </a:rPr>
               <a:t>Team 71  ·  Trịnh Hoàng Tú  ·  HUFLIT  ·  Track 4</a:t>
             </a:r>
           </a:p>
@@ -4180,7 +3547,7 @@
       </p:sp>
       <p:sp>
         <p:nvSpPr>
-          <p:cNvPr id="28" name="TextBox 27"/>
+          <p:cNvPr id="12" name="TextBox 11"/>
           <p:cNvSpPr txBox="1"/>
           <p:nvPr/>
         </p:nvSpPr>

--- a/SecureCoating-Vision_Final_Defense_6min.pptx
+++ b/SecureCoating-Vision_Final_Defense_6min.pptx
@@ -3254,7 +3254,7 @@
                 </a:solidFill>
                 <a:latin typeface="Calibri"/>
               </a:rPr>
-              <a:t>SecureCoating Vision</a:t>
+              <a:t>SecureCoating-Vision</a:t>
             </a:r>
           </a:p>
         </p:txBody>

--- a/SecureCoating-Vision_Final_Defense_6min.pptx
+++ b/SecureCoating-Vision_Final_Defense_6min.pptx
@@ -8386,8 +8386,8 @@
         </p:nvSpPr>
         <p:spPr>
           <a:xfrm>
-            <a:off x="411480" y="1417320"/>
-            <a:ext cx="2743200" cy="1965960"/>
+            <a:off x="411480" y="1325880"/>
+            <a:ext cx="2743200" cy="1783080"/>
           </a:xfrm>
           <a:prstGeom prst="rect">
             <a:avLst/>
@@ -8431,8 +8431,8 @@
         </p:nvSpPr>
         <p:spPr>
           <a:xfrm>
-            <a:off x="411480" y="1417320"/>
-            <a:ext cx="73152" cy="1965960"/>
+            <a:off x="411480" y="1325880"/>
+            <a:ext cx="73152" cy="1783080"/>
           </a:xfrm>
           <a:prstGeom prst="rect">
             <a:avLst/>
@@ -8474,8 +8474,8 @@
         </p:nvSpPr>
         <p:spPr>
           <a:xfrm>
-            <a:off x="548640" y="1536192"/>
-            <a:ext cx="2468880" cy="274320"/>
+            <a:off x="548640" y="1417320"/>
+            <a:ext cx="2468880" cy="256032"/>
           </a:xfrm>
           <a:prstGeom prst="rect">
             <a:avLst/>
@@ -8513,8 +8513,8 @@
         </p:nvSpPr>
         <p:spPr>
           <a:xfrm>
-            <a:off x="548640" y="1874519"/>
-            <a:ext cx="2468880" cy="502920"/>
+            <a:off x="548640" y="1737360"/>
+            <a:ext cx="2468880" cy="457200"/>
           </a:xfrm>
           <a:prstGeom prst="rect">
             <a:avLst/>
@@ -8533,7 +8533,7 @@
               </a:spcAft>
             </a:pPr>
             <a:r>
-              <a:rPr sz="2800" b="1">
+              <a:rPr sz="2600" b="1">
                 <a:solidFill>
                   <a:srgbClr val="1A1F2B"/>
                 </a:solidFill>
@@ -8552,7 +8552,7 @@
         </p:nvSpPr>
         <p:spPr>
           <a:xfrm>
-            <a:off x="548640" y="2468880"/>
+            <a:off x="548640" y="2286000"/>
             <a:ext cx="2468880" cy="640080"/>
           </a:xfrm>
           <a:prstGeom prst="rect">
@@ -8591,8 +8591,8 @@
         </p:nvSpPr>
         <p:spPr>
           <a:xfrm>
-            <a:off x="3291840" y="1417320"/>
-            <a:ext cx="2743200" cy="1965960"/>
+            <a:off x="3291840" y="1325880"/>
+            <a:ext cx="2743200" cy="1783080"/>
           </a:xfrm>
           <a:prstGeom prst="rect">
             <a:avLst/>
@@ -8636,8 +8636,8 @@
         </p:nvSpPr>
         <p:spPr>
           <a:xfrm>
-            <a:off x="3291840" y="1417320"/>
-            <a:ext cx="73152" cy="1965960"/>
+            <a:off x="3291840" y="1325880"/>
+            <a:ext cx="73152" cy="1783080"/>
           </a:xfrm>
           <a:prstGeom prst="rect">
             <a:avLst/>
@@ -8679,8 +8679,8 @@
         </p:nvSpPr>
         <p:spPr>
           <a:xfrm>
-            <a:off x="3429000" y="1536192"/>
-            <a:ext cx="2468880" cy="274320"/>
+            <a:off x="3429000" y="1417320"/>
+            <a:ext cx="2468880" cy="256032"/>
           </a:xfrm>
           <a:prstGeom prst="rect">
             <a:avLst/>
@@ -8718,8 +8718,8 @@
         </p:nvSpPr>
         <p:spPr>
           <a:xfrm>
-            <a:off x="3429000" y="1874519"/>
-            <a:ext cx="2468880" cy="502920"/>
+            <a:off x="3429000" y="1737360"/>
+            <a:ext cx="2468880" cy="457200"/>
           </a:xfrm>
           <a:prstGeom prst="rect">
             <a:avLst/>
@@ -8738,7 +8738,7 @@
               </a:spcAft>
             </a:pPr>
             <a:r>
-              <a:rPr sz="2800" b="1">
+              <a:rPr sz="2600" b="1">
                 <a:solidFill>
                   <a:srgbClr val="1A1F2B"/>
                 </a:solidFill>
@@ -8757,7 +8757,7 @@
         </p:nvSpPr>
         <p:spPr>
           <a:xfrm>
-            <a:off x="3429000" y="2468880"/>
+            <a:off x="3429000" y="2286000"/>
             <a:ext cx="2468880" cy="640080"/>
           </a:xfrm>
           <a:prstGeom prst="rect">
@@ -8796,8 +8796,8 @@
         </p:nvSpPr>
         <p:spPr>
           <a:xfrm>
-            <a:off x="6172200" y="1417320"/>
-            <a:ext cx="2743200" cy="1965960"/>
+            <a:off x="6172200" y="1325880"/>
+            <a:ext cx="2743200" cy="1783080"/>
           </a:xfrm>
           <a:prstGeom prst="rect">
             <a:avLst/>
@@ -8841,8 +8841,8 @@
         </p:nvSpPr>
         <p:spPr>
           <a:xfrm>
-            <a:off x="6172200" y="1417320"/>
-            <a:ext cx="73152" cy="1965960"/>
+            <a:off x="6172200" y="1325880"/>
+            <a:ext cx="73152" cy="1783080"/>
           </a:xfrm>
           <a:prstGeom prst="rect">
             <a:avLst/>
@@ -8884,8 +8884,8 @@
         </p:nvSpPr>
         <p:spPr>
           <a:xfrm>
-            <a:off x="6309360" y="1536192"/>
-            <a:ext cx="2468880" cy="274320"/>
+            <a:off x="6309360" y="1417320"/>
+            <a:ext cx="2468880" cy="256032"/>
           </a:xfrm>
           <a:prstGeom prst="rect">
             <a:avLst/>
@@ -8923,8 +8923,8 @@
         </p:nvSpPr>
         <p:spPr>
           <a:xfrm>
-            <a:off x="6309360" y="1874519"/>
-            <a:ext cx="2468880" cy="502920"/>
+            <a:off x="6309360" y="1737360"/>
+            <a:ext cx="2468880" cy="457200"/>
           </a:xfrm>
           <a:prstGeom prst="rect">
             <a:avLst/>
@@ -8943,7 +8943,7 @@
               </a:spcAft>
             </a:pPr>
             <a:r>
-              <a:rPr sz="2800" b="1">
+              <a:rPr sz="2600" b="1">
                 <a:solidFill>
                   <a:srgbClr val="1A1F2B"/>
                 </a:solidFill>
@@ -8962,7 +8962,7 @@
         </p:nvSpPr>
         <p:spPr>
           <a:xfrm>
-            <a:off x="6309360" y="2468880"/>
+            <a:off x="6309360" y="2286000"/>
             <a:ext cx="2468880" cy="640080"/>
           </a:xfrm>
           <a:prstGeom prst="rect">
@@ -9001,8 +9001,8 @@
         </p:nvSpPr>
         <p:spPr>
           <a:xfrm>
-            <a:off x="9052559" y="1417320"/>
-            <a:ext cx="2743200" cy="1965960"/>
+            <a:off x="9052559" y="1325880"/>
+            <a:ext cx="2743200" cy="1783080"/>
           </a:xfrm>
           <a:prstGeom prst="rect">
             <a:avLst/>
@@ -9046,8 +9046,8 @@
         </p:nvSpPr>
         <p:spPr>
           <a:xfrm>
-            <a:off x="9052559" y="1417320"/>
-            <a:ext cx="73152" cy="1965960"/>
+            <a:off x="9052559" y="1325880"/>
+            <a:ext cx="73152" cy="1783080"/>
           </a:xfrm>
           <a:prstGeom prst="rect">
             <a:avLst/>
@@ -9089,8 +9089,8 @@
         </p:nvSpPr>
         <p:spPr>
           <a:xfrm>
-            <a:off x="9189719" y="1536192"/>
-            <a:ext cx="2468880" cy="274320"/>
+            <a:off x="9189719" y="1417320"/>
+            <a:ext cx="2468880" cy="256032"/>
           </a:xfrm>
           <a:prstGeom prst="rect">
             <a:avLst/>
@@ -9128,8 +9128,8 @@
         </p:nvSpPr>
         <p:spPr>
           <a:xfrm>
-            <a:off x="9189719" y="1874519"/>
-            <a:ext cx="2468880" cy="502920"/>
+            <a:off x="9189719" y="1737360"/>
+            <a:ext cx="2468880" cy="457200"/>
           </a:xfrm>
           <a:prstGeom prst="rect">
             <a:avLst/>
@@ -9148,7 +9148,7 @@
               </a:spcAft>
             </a:pPr>
             <a:r>
-              <a:rPr sz="2800" b="1">
+              <a:rPr sz="2600" b="1">
                 <a:solidFill>
                   <a:srgbClr val="C47B00"/>
                 </a:solidFill>
@@ -9167,7 +9167,7 @@
         </p:nvSpPr>
         <p:spPr>
           <a:xfrm>
-            <a:off x="9189719" y="2468880"/>
+            <a:off x="9189719" y="2286000"/>
             <a:ext cx="2468880" cy="640080"/>
           </a:xfrm>
           <a:prstGeom prst="rect">
@@ -9206,8 +9206,8 @@
         </p:nvSpPr>
         <p:spPr>
           <a:xfrm>
-            <a:off x="411480" y="3611880"/>
-            <a:ext cx="11338560" cy="2514600"/>
+            <a:off x="411480" y="3246120"/>
+            <a:ext cx="11338560" cy="960120"/>
           </a:xfrm>
           <a:prstGeom prst="rect">
             <a:avLst/>
@@ -9251,8 +9251,8 @@
         </p:nvSpPr>
         <p:spPr>
           <a:xfrm>
-            <a:off x="411480" y="3611880"/>
-            <a:ext cx="73152" cy="2514600"/>
+            <a:off x="411480" y="3246120"/>
+            <a:ext cx="73152" cy="960120"/>
           </a:xfrm>
           <a:prstGeom prst="rect">
             <a:avLst/>
@@ -9294,8 +9294,8 @@
         </p:nvSpPr>
         <p:spPr>
           <a:xfrm>
-            <a:off x="640080" y="3794760"/>
-            <a:ext cx="10972800" cy="2194560"/>
+            <a:off x="640080" y="3337560"/>
+            <a:ext cx="10972800" cy="777240"/>
           </a:xfrm>
           <a:prstGeom prst="rect">
             <a:avLst/>
@@ -9320,13 +9320,13 @@
                 </a:solidFill>
                 <a:latin typeface="Calibri"/>
               </a:rPr>
-              <a:t>EVIDENCE IDENTITY</a:t>
-            </a:r>
-          </a:p>
-          <a:p>
-            <a:pPr algn="l">
-              <a:spcAft>
-                <a:spcPts val="1000"/>
+              <a:t>INFERENCE</a:t>
+            </a:r>
+          </a:p>
+          <a:p>
+            <a:pPr algn="l">
+              <a:spcAft>
+                <a:spcPts val="600"/>
               </a:spcAft>
             </a:pPr>
             <a:r>
@@ -9336,37 +9336,109 @@
                 </a:solidFill>
                 <a:latin typeface="Calibri"/>
               </a:rPr>
-              <a:t>88 test images  ·  seed 71  ·  weights f72a8f2b…  ·  dataset d1db7823…</a:t>
-            </a:r>
-          </a:p>
-          <a:p>
-            <a:pPr algn="l">
-              <a:spcAft>
-                <a:spcPts val="600"/>
-              </a:spcAft>
-            </a:pPr>
-            <a:r>
-              <a:rPr sz="1500" b="0">
-                <a:solidFill>
-                  <a:srgbClr val="5C6775"/>
-                </a:solidFill>
-                <a:latin typeface="Calibri"/>
-              </a:rPr>
-              <a:t>Public real optical image-disjoint split. Not roll-disjoint; not factory qualification.</a:t>
-            </a:r>
-          </a:p>
-        </p:txBody>
-      </p:sp>
-      <p:sp>
-        <p:nvSpPr>
-          <p:cNvPr id="29" name="TextBox 28"/>
+              <a:t>21.6 ms/image  ·  CPU evaluation  ·  model inference only  ·  not factory-line throughput</a:t>
+            </a:r>
+          </a:p>
+        </p:txBody>
+      </p:sp>
+      <p:sp>
+        <p:nvSpPr>
+          <p:cNvPr id="29" name="Rectangle 28"/>
+          <p:cNvSpPr/>
+          <p:nvPr/>
+        </p:nvSpPr>
+        <p:spPr>
+          <a:xfrm>
+            <a:off x="411480" y="4343400"/>
+            <a:ext cx="11338560" cy="1783080"/>
+          </a:xfrm>
+          <a:prstGeom prst="rect">
+            <a:avLst/>
+          </a:prstGeom>
+          <a:solidFill>
+            <a:srgbClr val="F4F7FB"/>
+          </a:solidFill>
+          <a:ln w="6350">
+            <a:solidFill>
+              <a:srgbClr val="D5DCE6"/>
+            </a:solidFill>
+          </a:ln>
+        </p:spPr>
+        <p:style>
+          <a:lnRef idx="1">
+            <a:schemeClr val="accent1"/>
+          </a:lnRef>
+          <a:fillRef idx="3">
+            <a:schemeClr val="accent1"/>
+          </a:fillRef>
+          <a:effectRef idx="2">
+            <a:schemeClr val="accent1"/>
+          </a:effectRef>
+          <a:fontRef idx="minor">
+            <a:schemeClr val="lt1"/>
+          </a:fontRef>
+        </p:style>
+        <p:txBody>
+          <a:bodyPr rtlCol="0" anchor="ctr"/>
+          <a:lstStyle/>
+          <a:p>
+            <a:pPr algn="ctr"/>
+          </a:p>
+        </p:txBody>
+      </p:sp>
+      <p:sp>
+        <p:nvSpPr>
+          <p:cNvPr id="30" name="Rectangle 29"/>
+          <p:cNvSpPr/>
+          <p:nvPr/>
+        </p:nvSpPr>
+        <p:spPr>
+          <a:xfrm>
+            <a:off x="411480" y="4343400"/>
+            <a:ext cx="73152" cy="1783080"/>
+          </a:xfrm>
+          <a:prstGeom prst="rect">
+            <a:avLst/>
+          </a:prstGeom>
+          <a:solidFill>
+            <a:srgbClr val="1F5EB8"/>
+          </a:solidFill>
+          <a:ln>
+            <a:noFill/>
+          </a:ln>
+        </p:spPr>
+        <p:style>
+          <a:lnRef idx="1">
+            <a:schemeClr val="accent1"/>
+          </a:lnRef>
+          <a:fillRef idx="3">
+            <a:schemeClr val="accent1"/>
+          </a:fillRef>
+          <a:effectRef idx="2">
+            <a:schemeClr val="accent1"/>
+          </a:effectRef>
+          <a:fontRef idx="minor">
+            <a:schemeClr val="lt1"/>
+          </a:fontRef>
+        </p:style>
+        <p:txBody>
+          <a:bodyPr rtlCol="0" anchor="ctr"/>
+          <a:lstStyle/>
+          <a:p>
+            <a:pPr algn="ctr"/>
+          </a:p>
+        </p:txBody>
+      </p:sp>
+      <p:sp>
+        <p:nvSpPr>
+          <p:cNvPr id="31" name="TextBox 30"/>
           <p:cNvSpPr txBox="1"/>
           <p:nvPr/>
         </p:nvSpPr>
         <p:spPr>
           <a:xfrm>
-            <a:off x="411480" y="6510528"/>
-            <a:ext cx="7772400" cy="256032"/>
+            <a:off x="640080" y="4480560"/>
+            <a:ext cx="10972800" cy="1508760"/>
           </a:xfrm>
           <a:prstGeom prst="rect">
             <a:avLst/>
@@ -9385,6 +9457,77 @@
               </a:spcAft>
             </a:pPr>
             <a:r>
+              <a:rPr sz="1300" b="1">
+                <a:solidFill>
+                  <a:srgbClr val="1F5EB8"/>
+                </a:solidFill>
+                <a:latin typeface="Calibri"/>
+              </a:rPr>
+              <a:t>EVIDENCE IDENTITY</a:t>
+            </a:r>
+          </a:p>
+          <a:p>
+            <a:pPr algn="l">
+              <a:spcAft>
+                <a:spcPts val="800"/>
+              </a:spcAft>
+            </a:pPr>
+            <a:r>
+              <a:rPr sz="1700" b="1">
+                <a:solidFill>
+                  <a:srgbClr val="1A1F2B"/>
+                </a:solidFill>
+                <a:latin typeface="Calibri"/>
+              </a:rPr>
+              <a:t>88 test images  ·  seed 71  ·  weights f72a8f2b…  ·  dataset d1db7823…</a:t>
+            </a:r>
+          </a:p>
+          <a:p>
+            <a:pPr algn="l">
+              <a:spcAft>
+                <a:spcPts val="600"/>
+              </a:spcAft>
+            </a:pPr>
+            <a:r>
+              <a:rPr sz="1400" b="0">
+                <a:solidFill>
+                  <a:srgbClr val="5C6775"/>
+                </a:solidFill>
+                <a:latin typeface="Calibri"/>
+              </a:rPr>
+              <a:t>Public real optical image-disjoint split. Not roll-disjoint; not factory qualification. Timing excludes camera exposure, transport, and PLC ACK.</a:t>
+            </a:r>
+          </a:p>
+        </p:txBody>
+      </p:sp>
+      <p:sp>
+        <p:nvSpPr>
+          <p:cNvPr id="32" name="TextBox 31"/>
+          <p:cNvSpPr txBox="1"/>
+          <p:nvPr/>
+        </p:nvSpPr>
+        <p:spPr>
+          <a:xfrm>
+            <a:off x="411480" y="6510528"/>
+            <a:ext cx="7772400" cy="256032"/>
+          </a:xfrm>
+          <a:prstGeom prst="rect">
+            <a:avLst/>
+          </a:prstGeom>
+          <a:noFill/>
+        </p:spPr>
+        <p:txBody>
+          <a:bodyPr wrap="square">
+            <a:spAutoFit/>
+          </a:bodyPr>
+          <a:lstStyle/>
+          <a:p>
+            <a:pPr algn="l">
+              <a:spcAft>
+                <a:spcPts val="600"/>
+              </a:spcAft>
+            </a:pPr>
+            <a:r>
               <a:rPr sz="1100" b="0">
                 <a:solidFill>
                   <a:srgbClr val="5C6775"/>
@@ -9398,7 +9541,7 @@
       </p:sp>
       <p:sp>
         <p:nvSpPr>
-          <p:cNvPr id="30" name="TextBox 29"/>
+          <p:cNvPr id="33" name="TextBox 32"/>
           <p:cNvSpPr txBox="1"/>
           <p:nvPr/>
         </p:nvSpPr>

--- a/SecureCoating-Vision_Final_Defense_6min.pptx
+++ b/SecureCoating-Vision_Final_Defense_6min.pptx
@@ -3991,7 +3991,7 @@
                 </a:solidFill>
                 <a:latin typeface="Calibri"/>
               </a:rPr>
-              <a:t>Public CoatingVision image-disjoint split, seed 71. Not factory roll-disjoint; HIL and calibration remain pilot gates.</a:t>
+              <a:t>Public CoatingVision image-disjoint test split, seed 71; not factory roll-disjoint.</a:t>
             </a:r>
           </a:p>
         </p:txBody>
@@ -4518,7 +4518,7 @@
                 </a:solidFill>
                 <a:latin typeface="Calibri"/>
               </a:rPr>
-              <a:t>FastAPI  ·  SQLite PENDING→final  ·  OPC UA / Modbus command+ACK  ·  HMAC certificate</a:t>
+              <a:t>FastAPI  ·  SQLite PENDING→final  ·  OPC UA / Modbus command+ACK  ·  HMAC-SHA256 authenticated certificate</a:t>
             </a:r>
           </a:p>
           <a:p>
@@ -4677,7 +4677,7 @@
                 </a:solidFill>
                 <a:latin typeface="Calibri"/>
               </a:rPr>
-              <a:t>LIBAD VIS + X-rayL adapter</a:t>
+              <a:t>LIBAD VIS + X-rayL local adapter</a:t>
             </a:r>
           </a:p>
           <a:p>
@@ -4687,29 +4687,29 @@
               </a:spcAft>
             </a:pPr>
             <a:r>
+              <a:rPr sz="1400" b="0">
+                <a:solidFill>
+                  <a:srgbClr val="5C6775"/>
+                </a:solidFill>
+                <a:latin typeface="Calibri"/>
+              </a:rPr>
+              <a:t>Official mount hashed. Local numpy adapter mean multimodal AUROC 0.700 / FPR95 0.839 over 10 official splits — non-paper-comparable. Authors' DINOv2 interim (1 seed) ~AUROC 0.856 / FPR95 0.716; not paper DINOv3/DA-Core. Demo cases stay protocol fixtures.</a:t>
+            </a:r>
+          </a:p>
+          <a:p>
+            <a:pPr algn="l">
+              <a:spcAft>
+                <a:spcPts val="600"/>
+              </a:spcAft>
+            </a:pPr>
+            <a:r>
               <a:rPr sz="1500" b="0">
                 <a:solidFill>
-                  <a:srgbClr val="5C6775"/>
-                </a:solidFill>
-                <a:latin typeface="Calibri"/>
-              </a:rPr>
-              <a:t>Official mount hashed. Numpy 10-seed ~AUROC 0.70 / FPR95 0.84. Authors' runner interim DINOv2 (1 seed) ~AUROC 0.856 / FPR95 0.716 — still not paper DINOv3. Demo cases stay protocol fixtures.</a:t>
-            </a:r>
-          </a:p>
-          <a:p>
-            <a:pPr algn="l">
-              <a:spcAft>
-                <a:spcPts val="600"/>
-              </a:spcAft>
-            </a:pPr>
-            <a:r>
-              <a:rPr sz="1500" b="0">
-                <a:solidFill>
                   <a:srgbClr val="1F5EB8"/>
                 </a:solidFill>
                 <a:latin typeface="Calibri"/>
               </a:rPr>
-              <a:t>DA-Core is Sui et al. SecureCoating-Vision adds the evidence gate, not a new detector claim.</a:t>
+              <a:t>DA-Core is Sui et al. SecureCoating-Vision adds the evidence gate, not a paper reproduction claim.</a:t>
             </a:r>
           </a:p>
         </p:txBody>
@@ -7908,7 +7908,7 @@
                 </a:solidFill>
                 <a:latin typeface="Calibri"/>
               </a:rPr>
-              <a:t>HMAC-SHA256 over canonical payload</a:t>
+              <a:t>HMAC-SHA256 authenticated tag over canonical payload</a:t>
             </a:r>
           </a:p>
         </p:txBody>

--- a/SecureCoating-Vision_Final_Defense_6min.pptx
+++ b/SecureCoating-Vision_Final_Defense_6min.pptx
@@ -3293,7 +3293,7 @@
                 </a:solidFill>
                 <a:latin typeface="Calibri"/>
               </a:rPr>
-              <a:t>SecureCoating Vision: A High-Throughput and Zero-Trust Edge-Cloud Pipeline for Inline Battery Electrode Defect Inspection and Traceable Quality Decisions</a:t>
+              <a:t>SecureCoating-Vision: Evidence-Gated Multimodal AI for Battery Electrode Inspection and Traceable Quality Decisions</a:t>
             </a:r>
           </a:p>
         </p:txBody>
@@ -3485,7 +3485,7 @@
                 </a:solidFill>
                 <a:latin typeface="Calibri"/>
               </a:rPr>
-              <a:t>Registered title describes the target Zero-Trust Edge-Cloud architecture. This prototype validates inspection, evidence gating, and fail-closed contracts — not completed mTLS/RBAC/OT or factory qualification.</a:t>
+              <a:t>This prototype validates inspection, evidence gating, and fail-closed contracts on real optical and multimodal evidence. Production security hardening such as mTLS, RBAC, secret rotation, and OT segmentation remains part of the industrialization roadmap.</a:t>
             </a:r>
           </a:p>
           <a:p>
@@ -10042,7 +10042,7 @@
                 </a:solidFill>
                 <a:latin typeface="Calibri"/>
               </a:rPr>
-              <a:t>Registered title states the target Zero-Trust Edge-Cloud architecture; this artifact validates inspection, evidence, and fail-closed contracts — not completed mTLS/RBAC/OT. GIFs loop checked-in artifacts. Authors' interim is DINOv2 1-seed, not DINOv3.</a:t>
+              <a:t>This artifact validates inspection, evidence, and fail-closed contracts. Production mTLS/RBAC/OT hardening remains on the industrialization roadmap. GIFs loop checked-in artifacts. Authors' interim is DINOv2 1-seed, not DINOv3.</a:t>
             </a:r>
           </a:p>
         </p:txBody>

--- a/SecureCoating-Vision_Final_Defense_6min.pptx
+++ b/SecureCoating-Vision_Final_Defense_6min.pptx
@@ -4687,13 +4687,13 @@
               </a:spcAft>
             </a:pPr>
             <a:r>
-              <a:rPr sz="1400" b="0">
+              <a:rPr sz="1300" b="0">
                 <a:solidFill>
                   <a:srgbClr val="5C6775"/>
                 </a:solidFill>
                 <a:latin typeface="Calibri"/>
               </a:rPr>
-              <a:t>Official mount hashed. Local numpy adapter mean multimodal AUROC 0.700 / FPR95 0.839 over 10 official splits — non-paper-comparable. Authors' DINOv2 interim (1 seed) ~AUROC 0.856 / FPR95 0.716; not paper DINOv3/DA-Core. Demo cases stay protocol fixtures.</a:t>
+              <a:t>Archived official-input local adapter: mean multimodal AUROC 0.700 / FPR95 0.839 over 10 official splits — historical evidence, non-paper-comparable. Authors' runner interim historical smoke (1 seed): AUROC ~0.856 / FPR95 ~0.716 — not DINOv3/DA-Core paper reproduction. Demo cases stay protocol fixtures.</a:t>
             </a:r>
           </a:p>
           <a:p>

--- a/SecureCoating-Vision_Final_Defense_6min.pptx
+++ b/SecureCoating-Vision_Final_Defense_6min.pptx
@@ -4677,7 +4677,7 @@
                 </a:solidFill>
                 <a:latin typeface="Calibri"/>
               </a:rPr>
-              <a:t>LIBAD VIS + X-rayL local adapter</a:t>
+              <a:t>LIBAD VIS + X-rayL</a:t>
             </a:r>
           </a:p>
           <a:p>
@@ -4687,13 +4687,13 @@
               </a:spcAft>
             </a:pPr>
             <a:r>
-              <a:rPr sz="1300" b="0">
+              <a:rPr sz="1500" b="0">
                 <a:solidFill>
                   <a:srgbClr val="5C6775"/>
                 </a:solidFill>
                 <a:latin typeface="Calibri"/>
               </a:rPr>
-              <a:t>Archived official-input local adapter: mean multimodal AUROC 0.700 / FPR95 0.839 over 10 official splits — historical evidence, non-paper-comparable. Authors' runner interim historical smoke (1 seed): AUROC ~0.856 / FPR95 ~0.716 — not DINOv3/DA-Core paper reproduction. Demo cases stay protocol fixtures.</a:t>
+              <a:t>We extended validation to LIBAD's real aligned VIS and X-rayL data over its 10 official splits. The current adapter is an external validation experiment—not a claim of reproducing the authors' DA-Core paper results.</a:t>
             </a:r>
           </a:p>
           <a:p>
@@ -4709,7 +4709,7 @@
                 </a:solidFill>
                 <a:latin typeface="Calibri"/>
               </a:rPr>
-              <a:t>DA-Core is Sui et al. SecureCoating-Vision adds the evidence gate, not a paper reproduction claim.</a:t>
+              <a:t>Even a stronger anomaly detector still leaves a false-positive operating point unsuitable for direct line authority. That is why detection is separated from disposition.</a:t>
             </a:r>
           </a:p>
         </p:txBody>
@@ -6507,6 +6507,54 @@
             <a:r>
               <a:rPr sz="1200" b="1">
                 <a:solidFill>
+                  <a:srgbClr val="1F5EB8"/>
+                </a:solidFill>
+                <a:latin typeface="Calibri"/>
+              </a:rPr>
+              <a:t>BUY PATH</a:t>
+            </a:r>
+          </a:p>
+          <a:p>
+            <a:pPr algn="l">
+              <a:spcAft>
+                <a:spcPts val="1000"/>
+              </a:spcAft>
+            </a:pPr>
+            <a:r>
+              <a:rPr sz="1400" b="1">
+                <a:solidFill>
+                  <a:srgbClr val="1A1F2B"/>
+                </a:solidFill>
+                <a:latin typeface="Calibri"/>
+              </a:rPr>
+              <a:t>Shadow inspection → PLC/HIL → controlled decision assistance → per-line deployment</a:t>
+            </a:r>
+          </a:p>
+          <a:p>
+            <a:pPr algn="l">
+              <a:spcAft>
+                <a:spcPts val="1400"/>
+              </a:spcAft>
+            </a:pPr>
+            <a:r>
+              <a:rPr sz="1300" b="0">
+                <a:solidFill>
+                  <a:srgbClr val="5C6775"/>
+                </a:solidFill>
+                <a:latin typeface="Calibri"/>
+              </a:rPr>
+              <a:t>Commercial model: per-line integration + calibration, model-monitoring and traceability support.</a:t>
+            </a:r>
+          </a:p>
+          <a:p>
+            <a:pPr algn="l">
+              <a:spcAft>
+                <a:spcPts val="600"/>
+              </a:spcAft>
+            </a:pPr>
+            <a:r>
+              <a:rPr sz="1200" b="1">
+                <a:solidFill>
                   <a:srgbClr val="C8102E"/>
                 </a:solidFill>
                 <a:latin typeface="Calibri"/>
@@ -6517,97 +6565,17 @@
           <a:p>
             <a:pPr algn="l">
               <a:spcAft>
-                <a:spcPts val="400"/>
-              </a:spcAft>
-            </a:pPr>
-            <a:r>
-              <a:rPr sz="1600" b="1">
+                <a:spcPts val="800"/>
+              </a:spcAft>
+            </a:pPr>
+            <a:r>
+              <a:rPr sz="1300" b="0">
                 <a:solidFill>
                   <a:srgbClr val="1A1F2B"/>
                 </a:solidFill>
                 <a:latin typeface="Calibri"/>
               </a:rPr>
-              <a:t>Recipe sliders</a:t>
-            </a:r>
-          </a:p>
-          <a:p>
-            <a:pPr algn="l">
-              <a:spcAft>
-                <a:spcPts val="400"/>
-              </a:spcAft>
-            </a:pPr>
-            <a:r>
-              <a:rPr sz="1600" b="1">
-                <a:solidFill>
-                  <a:srgbClr val="1A1F2B"/>
-                </a:solidFill>
-                <a:latin typeface="Calibri"/>
-              </a:rPr>
-              <a:t>Defect injection</a:t>
-            </a:r>
-          </a:p>
-          <a:p>
-            <a:pPr algn="l">
-              <a:spcAft>
-                <a:spcPts val="400"/>
-              </a:spcAft>
-            </a:pPr>
-            <a:r>
-              <a:rPr sz="1600" b="1">
-                <a:solidFill>
-                  <a:srgbClr val="1A1F2B"/>
-                </a:solidFill>
-                <a:latin typeface="Calibri"/>
-              </a:rPr>
-              <a:t>7-stage simulator</a:t>
-            </a:r>
-          </a:p>
-          <a:p>
-            <a:pPr algn="l">
-              <a:spcAft>
-                <a:spcPts val="400"/>
-              </a:spcAft>
-            </a:pPr>
-            <a:r>
-              <a:rPr sz="1600" b="1">
-                <a:solidFill>
-                  <a:srgbClr val="1A1F2B"/>
-                </a:solidFill>
-                <a:latin typeface="Calibri"/>
-              </a:rPr>
-              <a:t>LIBAD 90s demo</a:t>
-            </a:r>
-          </a:p>
-          <a:p>
-            <a:pPr algn="l">
-              <a:spcAft>
-                <a:spcPts val="1200"/>
-              </a:spcAft>
-            </a:pPr>
-            <a:r>
-              <a:rPr sz="1600" b="1">
-                <a:solidFill>
-                  <a:srgbClr val="1A1F2B"/>
-                </a:solidFill>
-                <a:latin typeface="Calibri"/>
-              </a:rPr>
-              <a:t>Send offset to PLC</a:t>
-            </a:r>
-          </a:p>
-          <a:p>
-            <a:pPr algn="l">
-              <a:spcAft>
-                <a:spcPts val="600"/>
-              </a:spcAft>
-            </a:pPr>
-            <a:r>
-              <a:rPr sz="1300" b="0">
-                <a:solidFill>
-                  <a:srgbClr val="5C6775"/>
-                </a:solidFill>
-                <a:latin typeface="Calibri"/>
-              </a:rPr>
-              <a:t>Sandbox-only features stay isolated from the operating surface.</a:t>
+              <a:t>Recipe / inject / 7-stage sim / LIBAD 90s demo / send offset — sandbox only.</a:t>
             </a:r>
           </a:p>
           <a:p>
@@ -9336,7 +9304,7 @@
                 </a:solidFill>
                 <a:latin typeface="Calibri"/>
               </a:rPr>
-              <a:t>21.6 ms/image  ·  CPU evaluation  ·  model inference only  ·  not factory-line throughput</a:t>
+              <a:t>59.5 ms/image  ·  CPU evaluation  ·  model inference only  ·  not factory-line throughput</a:t>
             </a:r>
           </a:p>
         </p:txBody>
@@ -10016,11 +9984,11 @@
           <a:p>
             <a:pPr algn="l">
               <a:spcAft>
-                <a:spcPts val="800"/>
-              </a:spcAft>
-            </a:pPr>
-            <a:r>
-              <a:rPr sz="1800" b="1">
+                <a:spcPts val="600"/>
+              </a:spcAft>
+            </a:pPr>
+            <a:r>
+              <a:rPr sz="1700" b="1">
                 <a:solidFill>
                   <a:srgbClr val="1A1F2B"/>
                 </a:solidFill>
@@ -10032,6 +10000,22 @@
           <a:p>
             <a:pPr algn="l">
               <a:spcAft>
+                <a:spcPts val="400"/>
+              </a:spcAft>
+            </a:pPr>
+            <a:r>
+              <a:rPr sz="1300" b="0">
+                <a:solidFill>
+                  <a:srgbClr val="5C6775"/>
+                </a:solidFill>
+                <a:latin typeface="Calibri"/>
+              </a:rPr>
+              <a:t>SecureCoating covers the inspection-to-quality-decision segment of an autonomous materials characterization pipeline. Property prediction is the next validation stage once plant-linked labels exist.</a:t>
+            </a:r>
+          </a:p>
+          <a:p>
+            <a:pPr algn="l">
+              <a:spcAft>
                 <a:spcPts val="600"/>
               </a:spcAft>
             </a:pPr>
@@ -10042,7 +10026,7 @@
                 </a:solidFill>
                 <a:latin typeface="Calibri"/>
               </a:rPr>
-              <a:t>This artifact validates inspection, evidence, and fail-closed contracts. Production mTLS/RBAC/OT hardening remains on the industrialization roadmap. GIFs loop checked-in artifacts. Authors' interim is DINOv2 1-seed, not DINOv3.</a:t>
+              <a:t>Buy path: shadow inspection → PLC/HIL → controlled decision assistance → per-line deployment. Production mTLS/RBAC/OT hardening remains on the industrialization roadmap.</a:t>
             </a:r>
           </a:p>
         </p:txBody>

--- a/SecureCoating-Vision_Final_Defense_6min.pptx
+++ b/SecureCoating-Vision_Final_Defense_6min.pptx
@@ -3389,7 +3389,7 @@
         <p:spPr>
           <a:xfrm>
             <a:off x="411480" y="3520440"/>
-            <a:ext cx="11338560" cy="822960"/>
+            <a:ext cx="11338560" cy="1051560"/>
           </a:xfrm>
           <a:prstGeom prst="rect">
             <a:avLst/>
@@ -3404,33 +3404,49 @@
           <a:p>
             <a:pPr algn="l">
               <a:spcAft>
+                <a:spcPts val="600"/>
+              </a:spcAft>
+            </a:pPr>
+            <a:r>
+              <a:rPr sz="1800" b="1">
+                <a:solidFill>
+                  <a:srgbClr val="1A1F2B"/>
+                </a:solidFill>
+                <a:latin typeface="Calibri"/>
+              </a:rPr>
+              <a:t>Team 71 · Track 4 — AI + Materials Testing &amp; Characterization</a:t>
+            </a:r>
+          </a:p>
+          <a:p>
+            <a:pPr algn="l">
+              <a:spcAft>
+                <a:spcPts val="400"/>
+              </a:spcAft>
+            </a:pPr>
+            <a:r>
+              <a:rPr sz="1800" b="1">
+                <a:solidFill>
+                  <a:srgbClr val="1A1F2B"/>
+                </a:solidFill>
+                <a:latin typeface="Calibri"/>
+              </a:rPr>
+              <a:t>Trinh Hoang Tu · HUFLIT</a:t>
+            </a:r>
+          </a:p>
+          <a:p>
+            <a:pPr algn="l">
+              <a:spcAft>
                 <a:spcPts val="800"/>
               </a:spcAft>
             </a:pPr>
             <a:r>
-              <a:rPr sz="1800" b="1">
-                <a:solidFill>
-                  <a:srgbClr val="1A1F2B"/>
-                </a:solidFill>
-                <a:latin typeface="Calibri"/>
-              </a:rPr>
-              <a:t>Team 71 · Track 4 — AI + Materials Testing &amp; Characterization</a:t>
-            </a:r>
-          </a:p>
-          <a:p>
-            <a:pPr algn="l">
-              <a:spcAft>
-                <a:spcPts val="1000"/>
-              </a:spcAft>
-            </a:pPr>
-            <a:r>
-              <a:rPr sz="1800" b="1">
-                <a:solidFill>
-                  <a:srgbClr val="1A1F2B"/>
-                </a:solidFill>
-                <a:latin typeface="Calibri"/>
-              </a:rPr>
-              <a:t>Trinh Hoang Tu · HUFLIT</a:t>
+              <a:rPr sz="1300" b="0">
+                <a:solidFill>
+                  <a:srgbClr val="1F5EB8"/>
+                </a:solidFill>
+                <a:latin typeface="Calibri"/>
+              </a:rPr>
+              <a:t>Core engineer: system architecture, evidence-gate / PLC contracts, and cybersecurity for the inspection pipeline</a:t>
             </a:r>
           </a:p>
           <a:p>
@@ -6511,7 +6527,7 @@
                 </a:solidFill>
                 <a:latin typeface="Calibri"/>
               </a:rPr>
-              <a:t>BUY PATH</a:t>
+              <a:t>DEPLOYMENT ROADMAP</a:t>
             </a:r>
           </a:p>
           <a:p>
@@ -6543,7 +6559,7 @@
                 </a:solidFill>
                 <a:latin typeface="Calibri"/>
               </a:rPr>
-              <a:t>Commercial model: per-line integration + calibration, model-monitoring and traceability support.</a:t>
+              <a:t>Integration &amp; maintenance strategy: per-line integration + calibration, model monitoring, and traceability support.</a:t>
             </a:r>
           </a:p>
           <a:p>
@@ -10026,7 +10042,7 @@
                 </a:solidFill>
                 <a:latin typeface="Calibri"/>
               </a:rPr>
-              <a:t>Buy path: shadow inspection → PLC/HIL → controlled decision assistance → per-line deployment. Production mTLS/RBAC/OT hardening remains on the industrialization roadmap.</a:t>
+              <a:t>Deployment roadmap: shadow inspection → PLC/HIL → controlled decision assistance → per-line deployment. Production mTLS/RBAC/OT hardening remains on the industrialization roadmap.</a:t>
             </a:r>
           </a:p>
         </p:txBody>
